--- a/公文汇编助手-系统介绍.pptx
+++ b/公文汇编助手-系统介绍.pptx
@@ -4440,7 +4440,7 @@
                 <a:ea typeface="Microsoft YaHei" pitchFamily="34" charset="-122"/>
                 <a:cs typeface="Microsoft YaHei" pitchFamily="34" charset="-120"/>
               </a:rPr>
-              <a:t>GWTOOL · 单机离线版 v1.2.0</a:t>
+              <a:t>GWTOOL · 单机离线版 v1.5.1</a:t>
             </a:r>
             <a:endParaRPr lang="en-US" sz="1300" dirty="0"/>
           </a:p>
@@ -4782,7 +4782,7 @@
                 <a:ea typeface="Microsoft YaHei" pitchFamily="34" charset="-122"/>
                 <a:cs typeface="Microsoft YaHei" pitchFamily="34" charset="-120"/>
               </a:rPr>
-              <a:t>87 项自动化测试</a:t>
+              <a:t>465 项自动化测试</a:t>
             </a:r>
             <a:endParaRPr lang="en-US" sz="1250" dirty="0"/>
           </a:p>
@@ -9091,7 +9091,7 @@
                 <a:ea typeface="Microsoft YaHei" pitchFamily="34" charset="-122"/>
                 <a:cs typeface="Microsoft YaHei" pitchFamily="34" charset="-120"/>
               </a:rPr>
-              <a:t>七种格式进得来，一座资料库管得住</a:t>
+              <a:t>八种格式进得来，一座资料库管得住</a:t>
             </a:r>
             <a:endParaRPr lang="en-US" sz="1500" dirty="0"/>
           </a:p>
@@ -9150,7 +9150,7 @@
                 <a:ea typeface="Microsoft YaHei" pitchFamily="34" charset="-122"/>
                 <a:cs typeface="Microsoft YaHei" pitchFamily="34" charset="-120"/>
               </a:rPr>
-              <a:t>格式解析全部本地完成，扫描件可选 OCR</a:t>
+              <a:t>格式解析全部本地完成，扫描件 OCR 内置开箱即用</a:t>
             </a:r>
             <a:endParaRPr lang="en-US" sz="1350" dirty="0"/>
           </a:p>
@@ -9517,7 +9517,7 @@
                 <a:ea typeface="Microsoft YaHei" pitchFamily="34" charset="-122"/>
                 <a:cs typeface="Microsoft YaHei" pitchFamily="34" charset="-120"/>
               </a:rPr>
-              <a:t>一站式导入：7 种文档格式 + 图片 OCR</a:t>
+              <a:t>一站式导入：8 种文档格式 + 图片 OCR</a:t>
             </a:r>
             <a:endParaRPr lang="en-US" sz="2600" dirty="0"/>
           </a:p>
@@ -9610,7 +9610,7 @@
         <p:spPr>
           <a:xfrm>
             <a:off x="457200" y="1783080"/>
-            <a:ext cx="1078992" cy="566928"/>
+            <a:ext cx="932688" cy="566928"/>
           </a:xfrm>
           <a:prstGeom prst="roundRect">
             <a:avLst>
@@ -9632,46 +9632,46 @@
         <p:spPr>
           <a:xfrm>
             <a:off x="530352" y="1783080"/>
+            <a:ext cx="786384" cy="566928"/>
+          </a:xfrm>
+          <a:prstGeom prst="rect">
+            <a:avLst/>
+          </a:prstGeom>
+          <a:noFill/>
+          <a:ln/>
+        </p:spPr>
+        <p:txBody>
+          <a:bodyPr wrap="square" lIns="0" tIns="0" rIns="0" bIns="0" rtlCol="0" anchor="ctr"/>
+          <a:lstStyle/>
+          <a:p>
+            <a:pPr algn="ctr" indent="0" marL="0">
+              <a:buNone/>
+            </a:pPr>
+            <a:r>
+              <a:rPr lang="en-US" sz="1300" b="1" dirty="0">
+                <a:solidFill>
+                  <a:srgbClr val="26201C"/>
+                </a:solidFill>
+                <a:latin typeface="Microsoft YaHei" pitchFamily="34" charset="0"/>
+                <a:ea typeface="Microsoft YaHei" pitchFamily="34" charset="-122"/>
+                <a:cs typeface="Microsoft YaHei" pitchFamily="34" charset="-120"/>
+              </a:rPr>
+              <a:t>docx</a:t>
+            </a:r>
+            <a:endParaRPr lang="en-US" sz="1300" dirty="0"/>
+          </a:p>
+        </p:txBody>
+      </p:sp>
+      <p:sp>
+        <p:nvSpPr>
+          <p:cNvPr id="10" name="Shape 8"/>
+          <p:cNvSpPr/>
+          <p:nvPr/>
+        </p:nvSpPr>
+        <p:spPr>
+          <a:xfrm>
+            <a:off x="1554480" y="1783080"/>
             <a:ext cx="932688" cy="566928"/>
-          </a:xfrm>
-          <a:prstGeom prst="rect">
-            <a:avLst/>
-          </a:prstGeom>
-          <a:noFill/>
-          <a:ln/>
-        </p:spPr>
-        <p:txBody>
-          <a:bodyPr wrap="square" lIns="0" tIns="0" rIns="0" bIns="0" rtlCol="0" anchor="ctr"/>
-          <a:lstStyle/>
-          <a:p>
-            <a:pPr algn="ctr" indent="0" marL="0">
-              <a:buNone/>
-            </a:pPr>
-            <a:r>
-              <a:rPr lang="en-US" sz="1300" b="1" dirty="0">
-                <a:solidFill>
-                  <a:srgbClr val="26201C"/>
-                </a:solidFill>
-                <a:latin typeface="Microsoft YaHei" pitchFamily="34" charset="0"/>
-                <a:ea typeface="Microsoft YaHei" pitchFamily="34" charset="-122"/>
-                <a:cs typeface="Microsoft YaHei" pitchFamily="34" charset="-120"/>
-              </a:rPr>
-              <a:t>docx</a:t>
-            </a:r>
-            <a:endParaRPr lang="en-US" sz="1300" dirty="0"/>
-          </a:p>
-        </p:txBody>
-      </p:sp>
-      <p:sp>
-        <p:nvSpPr>
-          <p:cNvPr id="10" name="Shape 8"/>
-          <p:cNvSpPr/>
-          <p:nvPr/>
-        </p:nvSpPr>
-        <p:spPr>
-          <a:xfrm>
-            <a:off x="1700784" y="1783080"/>
-            <a:ext cx="1078992" cy="566928"/>
           </a:xfrm>
           <a:prstGeom prst="roundRect">
             <a:avLst>
@@ -9692,47 +9692,47 @@
         </p:nvSpPr>
         <p:spPr>
           <a:xfrm>
-            <a:off x="1773936" y="1783080"/>
+            <a:off x="1627632" y="1783080"/>
+            <a:ext cx="786384" cy="566928"/>
+          </a:xfrm>
+          <a:prstGeom prst="rect">
+            <a:avLst/>
+          </a:prstGeom>
+          <a:noFill/>
+          <a:ln/>
+        </p:spPr>
+        <p:txBody>
+          <a:bodyPr wrap="square" lIns="0" tIns="0" rIns="0" bIns="0" rtlCol="0" anchor="ctr"/>
+          <a:lstStyle/>
+          <a:p>
+            <a:pPr algn="ctr" indent="0" marL="0">
+              <a:buNone/>
+            </a:pPr>
+            <a:r>
+              <a:rPr lang="en-US" sz="1300" b="1" dirty="0">
+                <a:solidFill>
+                  <a:srgbClr val="26201C"/>
+                </a:solidFill>
+                <a:latin typeface="Microsoft YaHei" pitchFamily="34" charset="0"/>
+                <a:ea typeface="Microsoft YaHei" pitchFamily="34" charset="-122"/>
+                <a:cs typeface="Microsoft YaHei" pitchFamily="34" charset="-120"/>
+              </a:rPr>
+              <a:t>doc</a:t>
+            </a:r>
+            <a:endParaRPr lang="en-US" sz="1300" dirty="0"/>
+          </a:p>
+        </p:txBody>
+      </p:sp>
+      <p:sp>
+        <p:nvSpPr>
+          <p:cNvPr id="12" name="Shape 10"/>
+          <p:cNvSpPr/>
+          <p:nvPr/>
+        </p:nvSpPr>
+        <p:spPr>
+          <a:xfrm>
+            <a:off x="2651760" y="1783080"/>
             <a:ext cx="932688" cy="566928"/>
-          </a:xfrm>
-          <a:prstGeom prst="rect">
-            <a:avLst/>
-          </a:prstGeom>
-          <a:noFill/>
-          <a:ln/>
-        </p:spPr>
-        <p:txBody>
-          <a:bodyPr wrap="square" lIns="0" tIns="0" rIns="0" bIns="0" rtlCol="0" anchor="ctr"/>
-          <a:lstStyle/>
-          <a:p>
-            <a:pPr algn="ctr" indent="0" marL="0">
-              <a:buNone/>
-            </a:pPr>
-            <a:r>
-              <a:rPr lang="en-US" sz="1300" b="1" dirty="0">
-                <a:solidFill>
-                  <a:srgbClr val="26201C"/>
-                </a:solidFill>
-                <a:latin typeface="Microsoft YaHei" pitchFamily="34" charset="0"/>
-                <a:ea typeface="Microsoft YaHei" pitchFamily="34" charset="-122"/>
-                <a:cs typeface="Microsoft YaHei" pitchFamily="34" charset="-120"/>
-              </a:rPr>
-              <a:t>doc</a:t>
-            </a:r>
-            <a:endParaRPr lang="en-US" sz="1300" dirty="0"/>
-          </a:p>
-        </p:txBody>
-      </p:sp>
-      <p:sp>
-        <p:nvSpPr>
-          <p:cNvPr id="12" name="Shape 10"/>
-          <p:cNvSpPr/>
-          <p:nvPr/>
-        </p:nvSpPr>
-        <p:spPr>
-          <a:xfrm>
-            <a:off x="2944368" y="1783080"/>
-            <a:ext cx="1078992" cy="566928"/>
           </a:xfrm>
           <a:prstGeom prst="roundRect">
             <a:avLst>
@@ -9753,47 +9753,47 @@
         </p:nvSpPr>
         <p:spPr>
           <a:xfrm>
-            <a:off x="3017520" y="1783080"/>
+            <a:off x="2724912" y="1783080"/>
+            <a:ext cx="786384" cy="566928"/>
+          </a:xfrm>
+          <a:prstGeom prst="rect">
+            <a:avLst/>
+          </a:prstGeom>
+          <a:noFill/>
+          <a:ln/>
+        </p:spPr>
+        <p:txBody>
+          <a:bodyPr wrap="square" lIns="0" tIns="0" rIns="0" bIns="0" rtlCol="0" anchor="ctr"/>
+          <a:lstStyle/>
+          <a:p>
+            <a:pPr algn="ctr" indent="0" marL="0">
+              <a:buNone/>
+            </a:pPr>
+            <a:r>
+              <a:rPr lang="en-US" sz="1300" b="1" dirty="0">
+                <a:solidFill>
+                  <a:srgbClr val="26201C"/>
+                </a:solidFill>
+                <a:latin typeface="Microsoft YaHei" pitchFamily="34" charset="0"/>
+                <a:ea typeface="Microsoft YaHei" pitchFamily="34" charset="-122"/>
+                <a:cs typeface="Microsoft YaHei" pitchFamily="34" charset="-120"/>
+              </a:rPr>
+              <a:t>wps</a:t>
+            </a:r>
+            <a:endParaRPr lang="en-US" sz="1300" dirty="0"/>
+          </a:p>
+        </p:txBody>
+      </p:sp>
+      <p:sp>
+        <p:nvSpPr>
+          <p:cNvPr id="14" name="Shape 12"/>
+          <p:cNvSpPr/>
+          <p:nvPr/>
+        </p:nvSpPr>
+        <p:spPr>
+          <a:xfrm>
+            <a:off x="3749040" y="1783080"/>
             <a:ext cx="932688" cy="566928"/>
-          </a:xfrm>
-          <a:prstGeom prst="rect">
-            <a:avLst/>
-          </a:prstGeom>
-          <a:noFill/>
-          <a:ln/>
-        </p:spPr>
-        <p:txBody>
-          <a:bodyPr wrap="square" lIns="0" tIns="0" rIns="0" bIns="0" rtlCol="0" anchor="ctr"/>
-          <a:lstStyle/>
-          <a:p>
-            <a:pPr algn="ctr" indent="0" marL="0">
-              <a:buNone/>
-            </a:pPr>
-            <a:r>
-              <a:rPr lang="en-US" sz="1300" b="1" dirty="0">
-                <a:solidFill>
-                  <a:srgbClr val="26201C"/>
-                </a:solidFill>
-                <a:latin typeface="Microsoft YaHei" pitchFamily="34" charset="0"/>
-                <a:ea typeface="Microsoft YaHei" pitchFamily="34" charset="-122"/>
-                <a:cs typeface="Microsoft YaHei" pitchFamily="34" charset="-120"/>
-              </a:rPr>
-              <a:t>txt</a:t>
-            </a:r>
-            <a:endParaRPr lang="en-US" sz="1300" dirty="0"/>
-          </a:p>
-        </p:txBody>
-      </p:sp>
-      <p:sp>
-        <p:nvSpPr>
-          <p:cNvPr id="14" name="Shape 12"/>
-          <p:cNvSpPr/>
-          <p:nvPr/>
-        </p:nvSpPr>
-        <p:spPr>
-          <a:xfrm>
-            <a:off x="4187952" y="1783080"/>
-            <a:ext cx="1078992" cy="566928"/>
           </a:xfrm>
           <a:prstGeom prst="roundRect">
             <a:avLst>
@@ -9814,47 +9814,47 @@
         </p:nvSpPr>
         <p:spPr>
           <a:xfrm>
-            <a:off x="4261104" y="1783080"/>
+            <a:off x="3822192" y="1783080"/>
+            <a:ext cx="786384" cy="566928"/>
+          </a:xfrm>
+          <a:prstGeom prst="rect">
+            <a:avLst/>
+          </a:prstGeom>
+          <a:noFill/>
+          <a:ln/>
+        </p:spPr>
+        <p:txBody>
+          <a:bodyPr wrap="square" lIns="0" tIns="0" rIns="0" bIns="0" rtlCol="0" anchor="ctr"/>
+          <a:lstStyle/>
+          <a:p>
+            <a:pPr algn="ctr" indent="0" marL="0">
+              <a:buNone/>
+            </a:pPr>
+            <a:r>
+              <a:rPr lang="en-US" sz="1300" b="1" dirty="0">
+                <a:solidFill>
+                  <a:srgbClr val="26201C"/>
+                </a:solidFill>
+                <a:latin typeface="Microsoft YaHei" pitchFamily="34" charset="0"/>
+                <a:ea typeface="Microsoft YaHei" pitchFamily="34" charset="-122"/>
+                <a:cs typeface="Microsoft YaHei" pitchFamily="34" charset="-120"/>
+              </a:rPr>
+              <a:t>txt</a:t>
+            </a:r>
+            <a:endParaRPr lang="en-US" sz="1300" dirty="0"/>
+          </a:p>
+        </p:txBody>
+      </p:sp>
+      <p:sp>
+        <p:nvSpPr>
+          <p:cNvPr id="16" name="Shape 14"/>
+          <p:cNvSpPr/>
+          <p:nvPr/>
+        </p:nvSpPr>
+        <p:spPr>
+          <a:xfrm>
+            <a:off x="4846320" y="1783080"/>
             <a:ext cx="932688" cy="566928"/>
-          </a:xfrm>
-          <a:prstGeom prst="rect">
-            <a:avLst/>
-          </a:prstGeom>
-          <a:noFill/>
-          <a:ln/>
-        </p:spPr>
-        <p:txBody>
-          <a:bodyPr wrap="square" lIns="0" tIns="0" rIns="0" bIns="0" rtlCol="0" anchor="ctr"/>
-          <a:lstStyle/>
-          <a:p>
-            <a:pPr algn="ctr" indent="0" marL="0">
-              <a:buNone/>
-            </a:pPr>
-            <a:r>
-              <a:rPr lang="en-US" sz="1300" b="1" dirty="0">
-                <a:solidFill>
-                  <a:srgbClr val="26201C"/>
-                </a:solidFill>
-                <a:latin typeface="Microsoft YaHei" pitchFamily="34" charset="0"/>
-                <a:ea typeface="Microsoft YaHei" pitchFamily="34" charset="-122"/>
-                <a:cs typeface="Microsoft YaHei" pitchFamily="34" charset="-120"/>
-              </a:rPr>
-              <a:t>rtf</a:t>
-            </a:r>
-            <a:endParaRPr lang="en-US" sz="1300" dirty="0"/>
-          </a:p>
-        </p:txBody>
-      </p:sp>
-      <p:sp>
-        <p:nvSpPr>
-          <p:cNvPr id="16" name="Shape 14"/>
-          <p:cNvSpPr/>
-          <p:nvPr/>
-        </p:nvSpPr>
-        <p:spPr>
-          <a:xfrm>
-            <a:off x="5431536" y="1783080"/>
-            <a:ext cx="1078992" cy="566928"/>
           </a:xfrm>
           <a:prstGeom prst="roundRect">
             <a:avLst>
@@ -9875,47 +9875,47 @@
         </p:nvSpPr>
         <p:spPr>
           <a:xfrm>
-            <a:off x="5504688" y="1783080"/>
+            <a:off x="4919472" y="1783080"/>
+            <a:ext cx="786384" cy="566928"/>
+          </a:xfrm>
+          <a:prstGeom prst="rect">
+            <a:avLst/>
+          </a:prstGeom>
+          <a:noFill/>
+          <a:ln/>
+        </p:spPr>
+        <p:txBody>
+          <a:bodyPr wrap="square" lIns="0" tIns="0" rIns="0" bIns="0" rtlCol="0" anchor="ctr"/>
+          <a:lstStyle/>
+          <a:p>
+            <a:pPr algn="ctr" indent="0" marL="0">
+              <a:buNone/>
+            </a:pPr>
+            <a:r>
+              <a:rPr lang="en-US" sz="1300" b="1" dirty="0">
+                <a:solidFill>
+                  <a:srgbClr val="26201C"/>
+                </a:solidFill>
+                <a:latin typeface="Microsoft YaHei" pitchFamily="34" charset="0"/>
+                <a:ea typeface="Microsoft YaHei" pitchFamily="34" charset="-122"/>
+                <a:cs typeface="Microsoft YaHei" pitchFamily="34" charset="-120"/>
+              </a:rPr>
+              <a:t>rtf</a:t>
+            </a:r>
+            <a:endParaRPr lang="en-US" sz="1300" dirty="0"/>
+          </a:p>
+        </p:txBody>
+      </p:sp>
+      <p:sp>
+        <p:nvSpPr>
+          <p:cNvPr id="18" name="Shape 16"/>
+          <p:cNvSpPr/>
+          <p:nvPr/>
+        </p:nvSpPr>
+        <p:spPr>
+          <a:xfrm>
+            <a:off x="5943600" y="1783080"/>
             <a:ext cx="932688" cy="566928"/>
-          </a:xfrm>
-          <a:prstGeom prst="rect">
-            <a:avLst/>
-          </a:prstGeom>
-          <a:noFill/>
-          <a:ln/>
-        </p:spPr>
-        <p:txBody>
-          <a:bodyPr wrap="square" lIns="0" tIns="0" rIns="0" bIns="0" rtlCol="0" anchor="ctr"/>
-          <a:lstStyle/>
-          <a:p>
-            <a:pPr algn="ctr" indent="0" marL="0">
-              <a:buNone/>
-            </a:pPr>
-            <a:r>
-              <a:rPr lang="en-US" sz="1300" b="1" dirty="0">
-                <a:solidFill>
-                  <a:srgbClr val="26201C"/>
-                </a:solidFill>
-                <a:latin typeface="Microsoft YaHei" pitchFamily="34" charset="0"/>
-                <a:ea typeface="Microsoft YaHei" pitchFamily="34" charset="-122"/>
-                <a:cs typeface="Microsoft YaHei" pitchFamily="34" charset="-120"/>
-              </a:rPr>
-              <a:t>pdf</a:t>
-            </a:r>
-            <a:endParaRPr lang="en-US" sz="1300" dirty="0"/>
-          </a:p>
-        </p:txBody>
-      </p:sp>
-      <p:sp>
-        <p:nvSpPr>
-          <p:cNvPr id="18" name="Shape 16"/>
-          <p:cNvSpPr/>
-          <p:nvPr/>
-        </p:nvSpPr>
-        <p:spPr>
-          <a:xfrm>
-            <a:off x="6675120" y="1783080"/>
-            <a:ext cx="1078992" cy="566928"/>
           </a:xfrm>
           <a:prstGeom prst="roundRect">
             <a:avLst>
@@ -9936,47 +9936,47 @@
         </p:nvSpPr>
         <p:spPr>
           <a:xfrm>
-            <a:off x="6748272" y="1783080"/>
+            <a:off x="6016752" y="1783080"/>
+            <a:ext cx="786384" cy="566928"/>
+          </a:xfrm>
+          <a:prstGeom prst="rect">
+            <a:avLst/>
+          </a:prstGeom>
+          <a:noFill/>
+          <a:ln/>
+        </p:spPr>
+        <p:txBody>
+          <a:bodyPr wrap="square" lIns="0" tIns="0" rIns="0" bIns="0" rtlCol="0" anchor="ctr"/>
+          <a:lstStyle/>
+          <a:p>
+            <a:pPr algn="ctr" indent="0" marL="0">
+              <a:buNone/>
+            </a:pPr>
+            <a:r>
+              <a:rPr lang="en-US" sz="1300" b="1" dirty="0">
+                <a:solidFill>
+                  <a:srgbClr val="26201C"/>
+                </a:solidFill>
+                <a:latin typeface="Microsoft YaHei" pitchFamily="34" charset="0"/>
+                <a:ea typeface="Microsoft YaHei" pitchFamily="34" charset="-122"/>
+                <a:cs typeface="Microsoft YaHei" pitchFamily="34" charset="-120"/>
+              </a:rPr>
+              <a:t>pdf</a:t>
+            </a:r>
+            <a:endParaRPr lang="en-US" sz="1300" dirty="0"/>
+          </a:p>
+        </p:txBody>
+      </p:sp>
+      <p:sp>
+        <p:nvSpPr>
+          <p:cNvPr id="20" name="Shape 18"/>
+          <p:cNvSpPr/>
+          <p:nvPr/>
+        </p:nvSpPr>
+        <p:spPr>
+          <a:xfrm>
+            <a:off x="7040880" y="1783080"/>
             <a:ext cx="932688" cy="566928"/>
-          </a:xfrm>
-          <a:prstGeom prst="rect">
-            <a:avLst/>
-          </a:prstGeom>
-          <a:noFill/>
-          <a:ln/>
-        </p:spPr>
-        <p:txBody>
-          <a:bodyPr wrap="square" lIns="0" tIns="0" rIns="0" bIns="0" rtlCol="0" anchor="ctr"/>
-          <a:lstStyle/>
-          <a:p>
-            <a:pPr algn="ctr" indent="0" marL="0">
-              <a:buNone/>
-            </a:pPr>
-            <a:r>
-              <a:rPr lang="en-US" sz="1300" b="1" dirty="0">
-                <a:solidFill>
-                  <a:srgbClr val="26201C"/>
-                </a:solidFill>
-                <a:latin typeface="Microsoft YaHei" pitchFamily="34" charset="0"/>
-                <a:ea typeface="Microsoft YaHei" pitchFamily="34" charset="-122"/>
-                <a:cs typeface="Microsoft YaHei" pitchFamily="34" charset="-120"/>
-              </a:rPr>
-              <a:t>md</a:t>
-            </a:r>
-            <a:endParaRPr lang="en-US" sz="1300" dirty="0"/>
-          </a:p>
-        </p:txBody>
-      </p:sp>
-      <p:sp>
-        <p:nvSpPr>
-          <p:cNvPr id="20" name="Shape 18"/>
-          <p:cNvSpPr/>
-          <p:nvPr/>
-        </p:nvSpPr>
-        <p:spPr>
-          <a:xfrm>
-            <a:off x="7918704" y="1783080"/>
-            <a:ext cx="1078992" cy="566928"/>
           </a:xfrm>
           <a:prstGeom prst="roundRect">
             <a:avLst>
@@ -9997,47 +9997,47 @@
         </p:nvSpPr>
         <p:spPr>
           <a:xfrm>
-            <a:off x="7991856" y="1783080"/>
+            <a:off x="7114032" y="1783080"/>
+            <a:ext cx="786384" cy="566928"/>
+          </a:xfrm>
+          <a:prstGeom prst="rect">
+            <a:avLst/>
+          </a:prstGeom>
+          <a:noFill/>
+          <a:ln/>
+        </p:spPr>
+        <p:txBody>
+          <a:bodyPr wrap="square" lIns="0" tIns="0" rIns="0" bIns="0" rtlCol="0" anchor="ctr"/>
+          <a:lstStyle/>
+          <a:p>
+            <a:pPr algn="ctr" indent="0" marL="0">
+              <a:buNone/>
+            </a:pPr>
+            <a:r>
+              <a:rPr lang="en-US" sz="1300" b="1" dirty="0">
+                <a:solidFill>
+                  <a:srgbClr val="26201C"/>
+                </a:solidFill>
+                <a:latin typeface="Microsoft YaHei" pitchFamily="34" charset="0"/>
+                <a:ea typeface="Microsoft YaHei" pitchFamily="34" charset="-122"/>
+                <a:cs typeface="Microsoft YaHei" pitchFamily="34" charset="-120"/>
+              </a:rPr>
+              <a:t>md</a:t>
+            </a:r>
+            <a:endParaRPr lang="en-US" sz="1300" dirty="0"/>
+          </a:p>
+        </p:txBody>
+      </p:sp>
+      <p:sp>
+        <p:nvSpPr>
+          <p:cNvPr id="22" name="Shape 20"/>
+          <p:cNvSpPr/>
+          <p:nvPr/>
+        </p:nvSpPr>
+        <p:spPr>
+          <a:xfrm>
+            <a:off x="8138160" y="1783080"/>
             <a:ext cx="932688" cy="566928"/>
-          </a:xfrm>
-          <a:prstGeom prst="rect">
-            <a:avLst/>
-          </a:prstGeom>
-          <a:noFill/>
-          <a:ln/>
-        </p:spPr>
-        <p:txBody>
-          <a:bodyPr wrap="square" lIns="0" tIns="0" rIns="0" bIns="0" rtlCol="0" anchor="ctr"/>
-          <a:lstStyle/>
-          <a:p>
-            <a:pPr algn="ctr" indent="0" marL="0">
-              <a:buNone/>
-            </a:pPr>
-            <a:r>
-              <a:rPr lang="en-US" sz="1300" b="1" dirty="0">
-                <a:solidFill>
-                  <a:srgbClr val="26201C"/>
-                </a:solidFill>
-                <a:latin typeface="Microsoft YaHei" pitchFamily="34" charset="0"/>
-                <a:ea typeface="Microsoft YaHei" pitchFamily="34" charset="-122"/>
-                <a:cs typeface="Microsoft YaHei" pitchFamily="34" charset="-120"/>
-              </a:rPr>
-              <a:t>html</a:t>
-            </a:r>
-            <a:endParaRPr lang="en-US" sz="1300" dirty="0"/>
-          </a:p>
-        </p:txBody>
-      </p:sp>
-      <p:sp>
-        <p:nvSpPr>
-          <p:cNvPr id="22" name="Shape 20"/>
-          <p:cNvSpPr/>
-          <p:nvPr/>
-        </p:nvSpPr>
-        <p:spPr>
-          <a:xfrm>
-            <a:off x="9162288" y="1783080"/>
-            <a:ext cx="2286000" cy="566928"/>
           </a:xfrm>
           <a:prstGeom prst="roundRect">
             <a:avLst>
@@ -10058,7 +10058,68 @@
         </p:nvSpPr>
         <p:spPr>
           <a:xfrm>
+            <a:off x="8211312" y="1783080"/>
+            <a:ext cx="786384" cy="566928"/>
+          </a:xfrm>
+          <a:prstGeom prst="rect">
+            <a:avLst/>
+          </a:prstGeom>
+          <a:noFill/>
+          <a:ln/>
+        </p:spPr>
+        <p:txBody>
+          <a:bodyPr wrap="square" lIns="0" tIns="0" rIns="0" bIns="0" rtlCol="0" anchor="ctr"/>
+          <a:lstStyle/>
+          <a:p>
+            <a:pPr algn="ctr" indent="0" marL="0">
+              <a:buNone/>
+            </a:pPr>
+            <a:r>
+              <a:rPr lang="en-US" sz="1300" b="1" dirty="0">
+                <a:solidFill>
+                  <a:srgbClr val="9E2B25"/>
+                </a:solidFill>
+                <a:latin typeface="Microsoft YaHei" pitchFamily="34" charset="0"/>
+                <a:ea typeface="Microsoft YaHei" pitchFamily="34" charset="-122"/>
+                <a:cs typeface="Microsoft YaHei" pitchFamily="34" charset="-120"/>
+              </a:rPr>
+              <a:t>html</a:t>
+            </a:r>
+            <a:endParaRPr lang="en-US" sz="1300" dirty="0"/>
+          </a:p>
+        </p:txBody>
+      </p:sp>
+      <p:sp>
+        <p:nvSpPr>
+          <p:cNvPr id="24" name="Shape 22"/>
+          <p:cNvSpPr/>
+          <p:nvPr/>
+        </p:nvSpPr>
+        <p:spPr>
+          <a:xfrm>
             <a:off x="9235440" y="1783080"/>
+            <a:ext cx="2286000" cy="566928"/>
+          </a:xfrm>
+          <a:prstGeom prst="roundRect">
+            <a:avLst>
+              <a:gd name="adj" fmla="val 9677"/>
+            </a:avLst>
+          </a:prstGeom>
+          <a:solidFill>
+            <a:srgbClr val="F8F4EE"/>
+          </a:solidFill>
+          <a:ln/>
+        </p:spPr>
+      </p:sp>
+      <p:sp>
+        <p:nvSpPr>
+          <p:cNvPr id="25" name="Text 23"/>
+          <p:cNvSpPr/>
+          <p:nvPr/>
+        </p:nvSpPr>
+        <p:spPr>
+          <a:xfrm>
+            <a:off x="9308592" y="1783080"/>
             <a:ext cx="2139696" cy="566928"/>
           </a:xfrm>
           <a:prstGeom prst="rect">
@@ -10077,7 +10138,7 @@
             <a:r>
               <a:rPr lang="en-US" sz="1300" b="1" dirty="0">
                 <a:solidFill>
-                  <a:srgbClr val="9E2B25"/>
+                  <a:srgbClr val="26201C"/>
                 </a:solidFill>
                 <a:latin typeface="Microsoft YaHei" pitchFamily="34" charset="0"/>
                 <a:ea typeface="Microsoft YaHei" pitchFamily="34" charset="-122"/>
@@ -10091,7 +10152,7 @@
       </p:sp>
       <p:sp>
         <p:nvSpPr>
-          <p:cNvPr id="24" name="Text 22"/>
+          <p:cNvPr id="26" name="Text 24"/>
           <p:cNvSpPr/>
           <p:nvPr/>
         </p:nvSpPr>
@@ -10122,7 +10183,7 @@
                 <a:ea typeface="Microsoft YaHei" pitchFamily="34" charset="-122"/>
                 <a:cs typeface="Microsoft YaHei" pitchFamily="34" charset="-120"/>
               </a:rPr>
-              <a:t>文档 7 种格式直读（markdown / htm 等同族扩展名均支持）　·　图片 4 类走 OCR（Tesseract 5 + chi_sim，可选功能）</a:t>
+              <a:t>文档 8 种格式直读（.wps 按内容嗅探路由，装 WPS 机器 COM 保真）　·　图片 4 类走内置 OCR（Tesseract + chi_sim 随安装包分发）</a:t>
             </a:r>
             <a:endParaRPr lang="en-US" sz="1250" dirty="0"/>
           </a:p>
@@ -10130,7 +10191,7 @@
       </p:sp>
       <p:sp>
         <p:nvSpPr>
-          <p:cNvPr id="25" name="Shape 23"/>
+          <p:cNvPr id="27" name="Shape 25"/>
           <p:cNvSpPr/>
           <p:nvPr/>
         </p:nvSpPr>
@@ -10150,7 +10211,7 @@
       </p:sp>
       <p:sp>
         <p:nvSpPr>
-          <p:cNvPr id="26" name="Text 24"/>
+          <p:cNvPr id="28" name="Text 26"/>
           <p:cNvSpPr/>
           <p:nvPr/>
         </p:nvSpPr>
@@ -10209,7 +10270,7 @@
       </p:sp>
       <p:sp>
         <p:nvSpPr>
-          <p:cNvPr id="27" name="Shape 25"/>
+          <p:cNvPr id="29" name="Shape 27"/>
           <p:cNvSpPr/>
           <p:nvPr/>
         </p:nvSpPr>
@@ -10229,7 +10290,7 @@
       </p:sp>
       <p:sp>
         <p:nvSpPr>
-          <p:cNvPr id="28" name="Text 26"/>
+          <p:cNvPr id="30" name="Text 28"/>
           <p:cNvSpPr/>
           <p:nvPr/>
         </p:nvSpPr>
@@ -10288,7 +10349,7 @@
       </p:sp>
       <p:sp>
         <p:nvSpPr>
-          <p:cNvPr id="29" name="Shape 27"/>
+          <p:cNvPr id="31" name="Shape 29"/>
           <p:cNvSpPr/>
           <p:nvPr/>
         </p:nvSpPr>
@@ -10308,7 +10369,7 @@
       </p:sp>
       <p:sp>
         <p:nvSpPr>
-          <p:cNvPr id="30" name="Text 28"/>
+          <p:cNvPr id="32" name="Text 30"/>
           <p:cNvSpPr/>
           <p:nvPr/>
         </p:nvSpPr>
@@ -10367,7 +10428,7 @@
       </p:sp>
       <p:sp>
         <p:nvSpPr>
-          <p:cNvPr id="31" name="Shape 29"/>
+          <p:cNvPr id="33" name="Shape 31"/>
           <p:cNvSpPr/>
           <p:nvPr/>
         </p:nvSpPr>
@@ -10387,7 +10448,7 @@
       </p:sp>
       <p:sp>
         <p:nvSpPr>
-          <p:cNvPr id="32" name="Text 30"/>
+          <p:cNvPr id="34" name="Text 32"/>
           <p:cNvSpPr/>
           <p:nvPr/>
         </p:nvSpPr>
@@ -10438,7 +10499,7 @@
                 <a:ea typeface="Microsoft YaHei" pitchFamily="34" charset="-122"/>
                 <a:cs typeface="Microsoft YaHei" pitchFamily="34" charset="-120"/>
               </a:rPr>
-              <a:t>　扫描版 PDF 无文字层且缺 OCR 中文包时，返回可操作的安装指引而非静默空白</a:t>
+              <a:t>　扫描版 PDF 无文字层时自动走内置 OCR；中文包随安装包内置，缺包场景（源码运行）返回可操作指引而非静默空白</a:t>
             </a:r>
             <a:endParaRPr lang="en-US" sz="1350" dirty="0"/>
           </a:p>
@@ -10446,7 +10507,7 @@
       </p:sp>
       <p:sp>
         <p:nvSpPr>
-          <p:cNvPr id="33" name="Shape 31"/>
+          <p:cNvPr id="35" name="Shape 33"/>
           <p:cNvSpPr/>
           <p:nvPr/>
         </p:nvSpPr>
@@ -10466,7 +10527,7 @@
       </p:sp>
       <p:sp>
         <p:nvSpPr>
-          <p:cNvPr id="34" name="Text 32"/>
+          <p:cNvPr id="36" name="Text 34"/>
           <p:cNvSpPr/>
           <p:nvPr/>
         </p:nvSpPr>
@@ -16307,7 +16368,7 @@
                 <a:ea typeface="Microsoft YaHei" pitchFamily="34" charset="-122"/>
                 <a:cs typeface="Microsoft YaHei" pitchFamily="34" charset="-120"/>
               </a:rPr>
-              <a:t>7 种文档格式 · OCR 回退 · .doc 四级降级 · 资料库管理</a:t>
+              <a:t>8 种文档格式 · OCR 内置 · .doc 四级降级 · 资料库管理</a:t>
             </a:r>
             <a:endParaRPr lang="en-US" sz="1650" dirty="0"/>
           </a:p>
@@ -16779,7 +16840,7 @@
                 <a:ea typeface="Microsoft YaHei" pitchFamily="34" charset="-122"/>
                 <a:cs typeface="Microsoft YaHei" pitchFamily="34" charset="-120"/>
               </a:rPr>
-              <a:t>双平台 · 打包矩阵 · CI/CD · 87 项测试与性能验收</a:t>
+              <a:t>双平台 · 打包矩阵 · CI/CD · 465 项测试与性能验收</a:t>
             </a:r>
             <a:endParaRPr lang="en-US" sz="1650" dirty="0"/>
           </a:p>
@@ -18173,7 +18234,7 @@
                 <a:ea typeface="Microsoft YaHei" pitchFamily="34" charset="-122"/>
                 <a:cs typeface="Microsoft YaHei" pitchFamily="34" charset="-120"/>
               </a:rPr>
-              <a:t>纠错引擎：三级流水线，像老编辑一样过稿</a:t>
+              <a:t>纠错引擎：三级流水线 + 可选 L4/L5 神经增强包</a:t>
             </a:r>
             <a:endParaRPr lang="en-US" sz="2600" dirty="0"/>
           </a:p>
@@ -27333,7 +27394,7 @@
                 <a:ea typeface="Microsoft YaHei" pitchFamily="34" charset="-122"/>
                 <a:cs typeface="Microsoft YaHei" pitchFamily="34" charset="-120"/>
               </a:rPr>
-              <a:t>一屏看懂：40220 条纠错对 · 12.3 万词典 · 17 个功能模块</a:t>
+              <a:t>一屏看懂：40220 条纠错对 · 12.3 万词典 · 24 个功能模块</a:t>
             </a:r>
             <a:endParaRPr lang="en-US" sz="1350" dirty="0"/>
           </a:p>
@@ -33073,7 +33134,7 @@
                 <a:ea typeface="Microsoft YaHei" pitchFamily="34" charset="-122"/>
                 <a:cs typeface="Microsoft YaHei" pitchFamily="34" charset="-120"/>
               </a:rPr>
-              <a:t>4 类安装包自动构建，GitHub Actions 全自动发布</a:t>
+              <a:t>2 个离线安装包自动构建，GitHub Actions 全自动发布</a:t>
             </a:r>
             <a:endParaRPr lang="en-US" sz="1350" dirty="0"/>
           </a:p>
@@ -33132,7 +33193,7 @@
                 <a:ea typeface="Microsoft YaHei" pitchFamily="34" charset="-122"/>
                 <a:cs typeface="Microsoft YaHei" pitchFamily="34" charset="-120"/>
               </a:rPr>
-              <a:t>87 项测试 + 端到端自检脚本</a:t>
+              <a:t>465 项测试 + 18 步端到端自检</a:t>
             </a:r>
             <a:endParaRPr lang="en-US" sz="1350" dirty="0"/>
           </a:p>
@@ -33567,7 +33628,7 @@
                 <a:ea typeface="Microsoft YaHei" pitchFamily="34" charset="-122"/>
                 <a:cs typeface="Microsoft YaHei" pitchFamily="34" charset="-120"/>
               </a:rPr>
-              <a:t>目录版 dist\gwtool\gwtool.exe（启动 ≤5 秒）</a:t>
+              <a:t>Inno Setup 安装包（免管理员权限，装完即用）</a:t>
             </a:r>
             <a:endParaRPr lang="en-US" sz="1200" dirty="0"/>
           </a:p>
@@ -33587,7 +33648,7 @@
                 <a:ea typeface="Microsoft YaHei" pitchFamily="34" charset="-122"/>
                 <a:cs typeface="Microsoft YaHei" pitchFamily="34" charset="-120"/>
               </a:rPr>
-              <a:t>便携版 zip：免安装压缩包</a:t>
+              <a:t>Tesseract OCR + 中文包内置，离线开箱即用</a:t>
             </a:r>
             <a:endParaRPr lang="en-US" sz="1200" dirty="0"/>
           </a:p>
@@ -33607,7 +33668,7 @@
                 <a:ea typeface="Microsoft YaHei" pitchFamily="34" charset="-122"/>
                 <a:cs typeface="Microsoft YaHei" pitchFamily="34" charset="-120"/>
               </a:rPr>
-              <a:t>Inno Setup 安装包（无需管理员权限）</a:t>
+              <a:t>便携模式 --portable：数据随程序走，U 盘可用</a:t>
             </a:r>
             <a:endParaRPr lang="en-US" sz="1200" dirty="0"/>
           </a:p>
@@ -33735,7 +33796,7 @@
                 <a:ea typeface="Microsoft YaHei" pitchFamily="34" charset="-122"/>
                 <a:cs typeface="Microsoft YaHei" pitchFamily="34" charset="-120"/>
               </a:rPr>
-              <a:t>原生 ARM64 runner 打包（非模拟）</a:t>
+              <a:t>原生 ARM64 runner 打包（非交叉编译模拟）</a:t>
             </a:r>
             <a:endParaRPr lang="en-US" sz="1200" dirty="0"/>
           </a:p>
@@ -33775,7 +33836,7 @@
                 <a:ea typeface="Microsoft YaHei" pitchFamily="34" charset="-122"/>
                 <a:cs typeface="Microsoft YaHei" pitchFamily="34" charset="-120"/>
               </a:rPr>
-              <a:t>makeself 自解压 .run 安装包</a:t>
+              <a:t>Tesseract 与中文包内置（glibc 与麒麟对齐）</a:t>
             </a:r>
             <a:endParaRPr lang="en-US" sz="1200" dirty="0"/>
           </a:p>
@@ -33795,7 +33856,7 @@
                 <a:ea typeface="Microsoft YaHei" pitchFamily="34" charset="-122"/>
                 <a:cs typeface="Microsoft YaHei" pitchFamily="34" charset="-120"/>
               </a:rPr>
-              <a:t>离线 wheels：有网机预下载，内网纯离线装</a:t>
+              <a:t>启动器预检缺库，给出确切 apt 安装命令</a:t>
             </a:r>
             <a:endParaRPr lang="en-US" sz="1200" dirty="0"/>
           </a:p>
@@ -34256,7 +34317,7 @@
                 <a:ea typeface="Microsoft YaHei" pitchFamily="34" charset="-122"/>
                 <a:cs typeface="Microsoft YaHei" pitchFamily="34" charset="-120"/>
               </a:rPr>
-              <a:t>打包矩阵：一份 spec，四类产物</a:t>
+              <a:t>打包矩阵：一份 spec，两大离线安装包</a:t>
             </a:r>
             <a:endParaRPr lang="en-US" sz="2600" dirty="0"/>
           </a:p>
@@ -34462,8 +34523,8 @@
         </p:nvSpPr>
         <p:spPr>
           <a:xfrm>
-            <a:off x="1819656" y="3474720"/>
-            <a:ext cx="8549640" cy="0"/>
+            <a:off x="3200400" y="3474720"/>
+            <a:ext cx="5715000" cy="0"/>
           </a:xfrm>
           <a:prstGeom prst="line">
             <a:avLst/>
@@ -34485,7 +34546,7 @@
         </p:nvSpPr>
         <p:spPr>
           <a:xfrm>
-            <a:off x="1819656" y="3474720"/>
+            <a:off x="3200400" y="3474720"/>
             <a:ext cx="0" cy="182880"/>
           </a:xfrm>
           <a:prstGeom prst="line">
@@ -34510,7 +34571,7 @@
         <p:spPr>
           <a:xfrm>
             <a:off x="457200" y="3657600"/>
-            <a:ext cx="2724912" cy="1371600"/>
+            <a:ext cx="5532120" cy="1371600"/>
           </a:xfrm>
           <a:prstGeom prst="roundRect">
             <a:avLst>
@@ -34536,8 +34597,8 @@
         </p:nvSpPr>
         <p:spPr>
           <a:xfrm>
-            <a:off x="640080" y="3785616"/>
-            <a:ext cx="2377440" cy="1143000"/>
+            <a:off x="658368" y="3785616"/>
+            <a:ext cx="5120640" cy="1143000"/>
           </a:xfrm>
           <a:prstGeom prst="rect">
             <a:avLst/>
@@ -34564,7 +34625,7 @@
                 <a:ea typeface="Microsoft YaHei" pitchFamily="34" charset="-122"/>
                 <a:cs typeface="Microsoft YaHei" pitchFamily="34" charset="-120"/>
               </a:rPr>
-              <a:t>Windows 目录版</a:t>
+              <a:t>Windows x64 安装包</a:t>
             </a:r>
             <a:endParaRPr lang="en-US" sz="1350" dirty="0"/>
           </a:p>
@@ -34584,7 +34645,7 @@
                 <a:ea typeface="Microsoft YaHei" pitchFamily="34" charset="-122"/>
                 <a:cs typeface="Microsoft YaHei" pitchFamily="34" charset="-120"/>
               </a:rPr>
-              <a:t>gwtool.exe 启动最快，配便携 zip 分发</a:t>
+              <a:t>gwtool_setup_win64.exe · Inno Setup LZMA2 固实压缩 · Tesseract OCR 与中文包内置 · 装完即启动，全程零网络</a:t>
             </a:r>
             <a:endParaRPr lang="en-US" sz="1350" dirty="0"/>
           </a:p>
@@ -34598,7 +34659,7 @@
         </p:nvSpPr>
         <p:spPr>
           <a:xfrm>
-            <a:off x="4690872" y="3474720"/>
+            <a:off x="8915400" y="3474720"/>
             <a:ext cx="0" cy="182880"/>
           </a:xfrm>
           <a:prstGeom prst="line">
@@ -34622,8 +34683,8 @@
         </p:nvSpPr>
         <p:spPr>
           <a:xfrm>
-            <a:off x="3328416" y="3657600"/>
-            <a:ext cx="2724912" cy="1371600"/>
+            <a:off x="6172200" y="3657600"/>
+            <a:ext cx="5532120" cy="1371600"/>
           </a:xfrm>
           <a:prstGeom prst="roundRect">
             <a:avLst>
@@ -34649,8 +34710,8 @@
         </p:nvSpPr>
         <p:spPr>
           <a:xfrm>
-            <a:off x="3511296" y="3785616"/>
-            <a:ext cx="2377440" cy="1143000"/>
+            <a:off x="6373368" y="3785616"/>
+            <a:ext cx="5120640" cy="1143000"/>
           </a:xfrm>
           <a:prstGeom prst="rect">
             <a:avLst/>
@@ -34677,7 +34738,7 @@
                 <a:ea typeface="Microsoft YaHei" pitchFamily="34" charset="-122"/>
                 <a:cs typeface="Microsoft YaHei" pitchFamily="34" charset="-120"/>
               </a:rPr>
-              <a:t>Windows 安装包</a:t>
+              <a:t>麒麟 ARM64 deb 包</a:t>
             </a:r>
             <a:endParaRPr lang="en-US" sz="1350" dirty="0"/>
           </a:p>
@@ -34697,7 +34758,7 @@
                 <a:ea typeface="Microsoft YaHei" pitchFamily="34" charset="-122"/>
                 <a:cs typeface="Microsoft YaHei" pitchFamily="34" charset="-120"/>
               </a:rPr>
-              <a:t>Inno Setup · lzma2 固实压缩 · 装完可启动</a:t>
+              <a:t>gwtool_&lt;版本&gt;_linux_arm64.deb · dpkg-deb 组装 · desktop 入口 + Qt 运行库依赖声明 · OCR 内置，glibc 对齐麒麟 V10</a:t>
             </a:r>
             <a:endParaRPr lang="en-US" sz="1350" dirty="0"/>
           </a:p>
@@ -34705,233 +34766,7 @@
       </p:sp>
       <p:sp>
         <p:nvSpPr>
-          <p:cNvPr id="18" name="Shape 16"/>
-          <p:cNvSpPr/>
-          <p:nvPr/>
-        </p:nvSpPr>
-        <p:spPr>
-          <a:xfrm>
-            <a:off x="7562088" y="3474720"/>
-            <a:ext cx="0" cy="182880"/>
-          </a:xfrm>
-          <a:prstGeom prst="line">
-            <a:avLst/>
-          </a:prstGeom>
-          <a:noFill/>
-          <a:ln w="15875">
-            <a:solidFill>
-              <a:srgbClr val="B9A79A"/>
-            </a:solidFill>
-            <a:prstDash val="solid"/>
-            <a:tailEnd type="triangle"/>
-          </a:ln>
-        </p:spPr>
-      </p:sp>
-      <p:sp>
-        <p:nvSpPr>
-          <p:cNvPr id="19" name="Shape 17"/>
-          <p:cNvSpPr/>
-          <p:nvPr/>
-        </p:nvSpPr>
-        <p:spPr>
-          <a:xfrm>
-            <a:off x="6199632" y="3657600"/>
-            <a:ext cx="2724912" cy="1371600"/>
-          </a:xfrm>
-          <a:prstGeom prst="roundRect">
-            <a:avLst>
-              <a:gd name="adj" fmla="val 5333"/>
-            </a:avLst>
-          </a:prstGeom>
-          <a:solidFill>
-            <a:srgbClr val="F8F4EE"/>
-          </a:solidFill>
-          <a:ln w="12700">
-            <a:solidFill>
-              <a:srgbClr val="E7DFD5"/>
-            </a:solidFill>
-            <a:prstDash val="solid"/>
-          </a:ln>
-        </p:spPr>
-      </p:sp>
-      <p:sp>
-        <p:nvSpPr>
-          <p:cNvPr id="20" name="Text 18"/>
-          <p:cNvSpPr/>
-          <p:nvPr/>
-        </p:nvSpPr>
-        <p:spPr>
-          <a:xfrm>
-            <a:off x="6382512" y="3785616"/>
-            <a:ext cx="2377440" cy="1143000"/>
-          </a:xfrm>
-          <a:prstGeom prst="rect">
-            <a:avLst/>
-          </a:prstGeom>
-          <a:noFill/>
-          <a:ln/>
-        </p:spPr>
-        <p:txBody>
-          <a:bodyPr wrap="square" lIns="0" tIns="0" rIns="0" bIns="0" rtlCol="0" anchor="ctr"/>
-          <a:lstStyle/>
-          <a:p>
-            <a:pPr indent="0" marL="0">
-              <a:lnSpc>
-                <a:spcPct val="125000"/>
-              </a:lnSpc>
-              <a:buNone/>
-            </a:pPr>
-            <a:r>
-              <a:rPr lang="en-US" sz="1350" b="1" dirty="0">
-                <a:solidFill>
-                  <a:srgbClr val="9E2B25"/>
-                </a:solidFill>
-                <a:latin typeface="Microsoft YaHei" pitchFamily="34" charset="0"/>
-                <a:ea typeface="Microsoft YaHei" pitchFamily="34" charset="-122"/>
-                <a:cs typeface="Microsoft YaHei" pitchFamily="34" charset="-120"/>
-              </a:rPr>
-              <a:t>ARM64 deb 包</a:t>
-            </a:r>
-            <a:endParaRPr lang="en-US" sz="1350" dirty="0"/>
-          </a:p>
-          <a:p>
-            <a:pPr indent="0" marL="0">
-              <a:lnSpc>
-                <a:spcPct val="125000"/>
-              </a:lnSpc>
-              <a:buNone/>
-            </a:pPr>
-            <a:r>
-              <a:rPr lang="en-US" sz="1150" dirty="0">
-                <a:solidFill>
-                  <a:srgbClr val="8C8178"/>
-                </a:solidFill>
-                <a:latin typeface="Microsoft YaHei" pitchFamily="34" charset="0"/>
-                <a:ea typeface="Microsoft YaHei" pitchFamily="34" charset="-122"/>
-                <a:cs typeface="Microsoft YaHei" pitchFamily="34" charset="-120"/>
-              </a:rPr>
-              <a:t>内置 desktop 文件，声明 Qt 运行库依赖</a:t>
-            </a:r>
-            <a:endParaRPr lang="en-US" sz="1350" dirty="0"/>
-          </a:p>
-        </p:txBody>
-      </p:sp>
-      <p:sp>
-        <p:nvSpPr>
-          <p:cNvPr id="21" name="Shape 19"/>
-          <p:cNvSpPr/>
-          <p:nvPr/>
-        </p:nvSpPr>
-        <p:spPr>
-          <a:xfrm>
-            <a:off x="10433304" y="3474720"/>
-            <a:ext cx="0" cy="182880"/>
-          </a:xfrm>
-          <a:prstGeom prst="line">
-            <a:avLst/>
-          </a:prstGeom>
-          <a:noFill/>
-          <a:ln w="15875">
-            <a:solidFill>
-              <a:srgbClr val="B9A79A"/>
-            </a:solidFill>
-            <a:prstDash val="solid"/>
-            <a:tailEnd type="triangle"/>
-          </a:ln>
-        </p:spPr>
-      </p:sp>
-      <p:sp>
-        <p:nvSpPr>
-          <p:cNvPr id="22" name="Shape 20"/>
-          <p:cNvSpPr/>
-          <p:nvPr/>
-        </p:nvSpPr>
-        <p:spPr>
-          <a:xfrm>
-            <a:off x="9070848" y="3657600"/>
-            <a:ext cx="2724912" cy="1371600"/>
-          </a:xfrm>
-          <a:prstGeom prst="roundRect">
-            <a:avLst>
-              <a:gd name="adj" fmla="val 5333"/>
-            </a:avLst>
-          </a:prstGeom>
-          <a:solidFill>
-            <a:srgbClr val="F8F4EE"/>
-          </a:solidFill>
-          <a:ln w="12700">
-            <a:solidFill>
-              <a:srgbClr val="E7DFD5"/>
-            </a:solidFill>
-            <a:prstDash val="solid"/>
-          </a:ln>
-        </p:spPr>
-      </p:sp>
-      <p:sp>
-        <p:nvSpPr>
-          <p:cNvPr id="23" name="Text 21"/>
-          <p:cNvSpPr/>
-          <p:nvPr/>
-        </p:nvSpPr>
-        <p:spPr>
-          <a:xfrm>
-            <a:off x="9253728" y="3785616"/>
-            <a:ext cx="2377440" cy="1143000"/>
-          </a:xfrm>
-          <a:prstGeom prst="rect">
-            <a:avLst/>
-          </a:prstGeom>
-          <a:noFill/>
-          <a:ln/>
-        </p:spPr>
-        <p:txBody>
-          <a:bodyPr wrap="square" lIns="0" tIns="0" rIns="0" bIns="0" rtlCol="0" anchor="ctr"/>
-          <a:lstStyle/>
-          <a:p>
-            <a:pPr indent="0" marL="0">
-              <a:lnSpc>
-                <a:spcPct val="125000"/>
-              </a:lnSpc>
-              <a:buNone/>
-            </a:pPr>
-            <a:r>
-              <a:rPr lang="en-US" sz="1350" b="1" dirty="0">
-                <a:solidFill>
-                  <a:srgbClr val="9E2B25"/>
-                </a:solidFill>
-                <a:latin typeface="Microsoft YaHei" pitchFamily="34" charset="0"/>
-                <a:ea typeface="Microsoft YaHei" pitchFamily="34" charset="-122"/>
-                <a:cs typeface="Microsoft YaHei" pitchFamily="34" charset="-120"/>
-              </a:rPr>
-              <a:t>ARM64 tar.gz / .run</a:t>
-            </a:r>
-            <a:endParaRPr lang="en-US" sz="1350" dirty="0"/>
-          </a:p>
-          <a:p>
-            <a:pPr indent="0" marL="0">
-              <a:lnSpc>
-                <a:spcPct val="125000"/>
-              </a:lnSpc>
-              <a:buNone/>
-            </a:pPr>
-            <a:r>
-              <a:rPr lang="en-US" sz="1150" dirty="0">
-                <a:solidFill>
-                  <a:srgbClr val="8C8178"/>
-                </a:solidFill>
-                <a:latin typeface="Microsoft YaHei" pitchFamily="34" charset="0"/>
-                <a:ea typeface="Microsoft YaHei" pitchFamily="34" charset="-122"/>
-                <a:cs typeface="Microsoft YaHei" pitchFamily="34" charset="-120"/>
-              </a:rPr>
-              <a:t>免 root 解压即用；makeself 自解压安装</a:t>
-            </a:r>
-            <a:endParaRPr lang="en-US" sz="1350" dirty="0"/>
-          </a:p>
-        </p:txBody>
-      </p:sp>
-      <p:sp>
-        <p:nvSpPr>
-          <p:cNvPr id="24" name="Text 22"/>
+          <p:cNvPr id="18" name="Text 16"/>
           <p:cNvSpPr/>
           <p:nvPr/>
         </p:nvSpPr>
@@ -34982,7 +34817,7 @@
                 <a:ea typeface="Microsoft YaHei" pitchFamily="34" charset="-122"/>
                 <a:cs typeface="Microsoft YaHei" pitchFamily="34" charset="-120"/>
               </a:rPr>
-              <a:t>install_context_menu.bat 写当前用户注册表（无需管理员）挂右键菜单；gwtool.desktop 注册 6 类文档“打开方式”；OCR 安装引导在安装包初始化时弹窗提示。</a:t>
+              <a:t>install_context_menu.bat 写当前用户注册表（无需管理员）挂右键菜单；gwtool.desktop 注册 6 类文档“打开方式”；OCR 引擎与中文包已内置，两个安装包均离线安装、开箱即用。</a:t>
             </a:r>
             <a:endParaRPr lang="en-US" sz="1250" dirty="0"/>
           </a:p>
@@ -35153,7 +34988,7 @@
                 <a:ea typeface="Microsoft YaHei" pitchFamily="34" charset="-122"/>
                 <a:cs typeface="Microsoft YaHei" pitchFamily="34" charset="-120"/>
               </a:rPr>
-              <a:t>CI/CD：打一个 tag，四类安装包自动发布</a:t>
+              <a:t>CI/CD：打一个 tag，两大离线安装包自动发布</a:t>
             </a:r>
             <a:endParaRPr lang="en-US" sz="2600" dirty="0"/>
           </a:p>
@@ -35512,7 +35347,7 @@
                 <a:ea typeface="Microsoft YaHei" pitchFamily="34" charset="-122"/>
                 <a:cs typeface="Microsoft YaHei" pitchFamily="34" charset="-120"/>
               </a:rPr>
-              <a:t>pytest 全量 87 用例（offscreen + 300s 超时）</a:t>
+              <a:t>pytest 全量 465 用例 + 18 步端到端自检</a:t>
             </a:r>
             <a:endParaRPr lang="en-US" sz="1150" dirty="0"/>
           </a:p>
@@ -35532,7 +35367,7 @@
                 <a:ea typeface="Microsoft YaHei" pitchFamily="34" charset="-122"/>
                 <a:cs typeface="Microsoft YaHei" pitchFamily="34" charset="-120"/>
               </a:rPr>
-              <a:t>PyInstaller 按 spec 打包</a:t>
+              <a:t>PyInstaller 按 spec 打包 + Tesseract/中文包内置</a:t>
             </a:r>
             <a:endParaRPr lang="en-US" sz="1150" dirty="0"/>
           </a:p>
@@ -35552,7 +35387,7 @@
                 <a:ea typeface="Microsoft YaHei" pitchFamily="34" charset="-122"/>
                 <a:cs typeface="Microsoft YaHei" pitchFamily="34" charset="-120"/>
               </a:rPr>
-              <a:t>便携 zip + ISCC 安装包（版本号取自代码）</a:t>
+              <a:t>smoke_dist 冒烟校验 → ISCC 安装包（版本号取自代码）</a:t>
             </a:r>
             <a:endParaRPr lang="en-US" sz="1150" dirty="0"/>
           </a:p>
@@ -35704,7 +35539,7 @@
                 <a:ea typeface="Microsoft YaHei" pitchFamily="34" charset="-122"/>
                 <a:cs typeface="Microsoft YaHei" pitchFamily="34" charset="-120"/>
               </a:rPr>
-              <a:t>apt 装 Qt offscreen 运行库</a:t>
+              <a:t>Debian 11 容器（glibc 2.31 对齐麒麟 V10）</a:t>
             </a:r>
             <a:endParaRPr lang="en-US" sz="1150" dirty="0"/>
           </a:p>
@@ -35724,7 +35559,7 @@
                 <a:ea typeface="Microsoft YaHei" pitchFamily="34" charset="-122"/>
                 <a:cs typeface="Microsoft YaHei" pitchFamily="34" charset="-120"/>
               </a:rPr>
-              <a:t>同一 spec 打包 + dpkg-deb 组装</a:t>
+              <a:t>同一 spec 打包 + OCR 集成 + 运行库自检</a:t>
             </a:r>
             <a:endParaRPr lang="en-US" sz="1150" dirty="0"/>
           </a:p>
@@ -35744,7 +35579,7 @@
                 <a:ea typeface="Microsoft YaHei" pitchFamily="34" charset="-122"/>
                 <a:cs typeface="Microsoft YaHei" pitchFamily="34" charset="-120"/>
               </a:rPr>
-              <a:t>deb 声明依赖，推荐 tesseract 中文包</a:t>
+              <a:t>smoke_dist 冒烟校验 → dpkg-deb 组装 .deb</a:t>
             </a:r>
             <a:endParaRPr lang="en-US" sz="1150" dirty="0"/>
           </a:p>
@@ -35876,7 +35711,7 @@
                 <a:ea typeface="Microsoft YaHei" pitchFamily="34" charset="-122"/>
                 <a:cs typeface="Microsoft YaHei" pitchFamily="34" charset="-120"/>
               </a:rPr>
-              <a:t>依赖前两个 Job 全绿</a:t>
+              <a:t>依赖前两个 Job 全绿（含打包与冒烟）</a:t>
             </a:r>
             <a:endParaRPr lang="en-US" sz="1150" dirty="0"/>
           </a:p>
@@ -35896,7 +35731,7 @@
                 <a:ea typeface="Microsoft YaHei" pitchFamily="34" charset="-122"/>
                 <a:cs typeface="Microsoft YaHei" pitchFamily="34" charset="-120"/>
               </a:rPr>
-              <a:t>gh release create 自动建发布</a:t>
+              <a:t>推 v* 标签触发 / 手动 workflow_dispatch</a:t>
             </a:r>
             <a:endParaRPr lang="en-US" sz="1150" dirty="0"/>
           </a:p>
@@ -35916,7 +35751,7 @@
                 <a:ea typeface="Microsoft YaHei" pitchFamily="34" charset="-122"/>
                 <a:cs typeface="Microsoft YaHei" pitchFamily="34" charset="-120"/>
               </a:rPr>
-              <a:t>附 4 类安装包 + 自动 Release Notes</a:t>
+              <a:t>gh release create 自动建发布</a:t>
             </a:r>
             <a:endParaRPr lang="en-US" sz="1150" dirty="0"/>
           </a:p>
@@ -35936,7 +35771,7 @@
                 <a:ea typeface="Microsoft YaHei" pitchFamily="34" charset="-122"/>
                 <a:cs typeface="Microsoft YaHei" pitchFamily="34" charset="-120"/>
               </a:rPr>
-              <a:t>标题“公文汇编助手 v TAG”</a:t>
+              <a:t>附 2 个安装包 + 自动 Release Notes</a:t>
             </a:r>
             <a:endParaRPr lang="en-US" sz="1150" dirty="0"/>
           </a:p>
@@ -36131,7 +35966,7 @@
                 <a:ea typeface="Microsoft YaHei" pitchFamily="34" charset="-122"/>
                 <a:cs typeface="Microsoft YaHei" pitchFamily="34" charset="-120"/>
               </a:rPr>
-              <a:t>质量保障：87 项测试，性能指标写进断言</a:t>
+              <a:t>质量保障：465 项测试，性能指标写进断言</a:t>
             </a:r>
             <a:endParaRPr lang="en-US" sz="2600" dirty="0"/>
           </a:p>
@@ -36248,7 +36083,7 @@
                 <a:ea typeface="Microsoft YaHei" pitchFamily="34" charset="-122"/>
                 <a:cs typeface="Microsoft YaHei" pitchFamily="34" charset="-120"/>
               </a:rPr>
-              <a:t>测试分布（pytest，按文件）</a:t>
+              <a:t>测试分布（pytest，按文件 · 前 9）</a:t>
             </a:r>
             <a:endParaRPr lang="en-US" sz="1350" dirty="0"/>
           </a:p>
@@ -36287,7 +36122,7 @@
                 <a:ea typeface="Microsoft YaHei" pitchFamily="34" charset="-122"/>
                 <a:cs typeface="Microsoft YaHei" pitchFamily="34" charset="-120"/>
               </a:rPr>
-              <a:t>test_features</a:t>
+              <a:t>test_corrector_l5</a:t>
             </a:r>
             <a:endParaRPr lang="en-US" sz="1100" dirty="0"/>
           </a:p>
@@ -36346,7 +36181,7 @@
                 <a:ea typeface="Microsoft YaHei" pitchFamily="34" charset="-122"/>
                 <a:cs typeface="Microsoft YaHei" pitchFamily="34" charset="-120"/>
               </a:rPr>
-              <a:t>24</a:t>
+              <a:t>46</a:t>
             </a:r>
             <a:endParaRPr lang="en-US" sz="1150" dirty="0"/>
           </a:p>
@@ -36385,7 +36220,7 @@
                 <a:ea typeface="Microsoft YaHei" pitchFamily="34" charset="-122"/>
                 <a:cs typeface="Microsoft YaHei" pitchFamily="34" charset="-120"/>
               </a:rPr>
-              <a:t>test_corrector</a:t>
+              <a:t>test_features</a:t>
             </a:r>
             <a:endParaRPr lang="en-US" sz="1100" dirty="0"/>
           </a:p>
@@ -36400,7 +36235,7 @@
         <p:spPr>
           <a:xfrm>
             <a:off x="2880360" y="2665476"/>
-            <a:ext cx="1487805" cy="210312"/>
+            <a:ext cx="1693628" cy="210312"/>
           </a:xfrm>
           <a:prstGeom prst="rect">
             <a:avLst/>
@@ -36419,7 +36254,7 @@
         </p:nvSpPr>
         <p:spPr>
           <a:xfrm>
-            <a:off x="4441317" y="2615184"/>
+            <a:off x="4647140" y="2615184"/>
             <a:ext cx="548640" cy="310896"/>
           </a:xfrm>
           <a:prstGeom prst="rect">
@@ -36444,7 +36279,7 @@
                 <a:ea typeface="Microsoft YaHei" pitchFamily="34" charset="-122"/>
                 <a:cs typeface="Microsoft YaHei" pitchFamily="34" charset="-120"/>
               </a:rPr>
-              <a:t>11</a:t>
+              <a:t>24</a:t>
             </a:r>
             <a:endParaRPr lang="en-US" sz="1150" dirty="0"/>
           </a:p>
@@ -36483,7 +36318,7 @@
                 <a:ea typeface="Microsoft YaHei" pitchFamily="34" charset="-122"/>
                 <a:cs typeface="Microsoft YaHei" pitchFamily="34" charset="-120"/>
               </a:rPr>
-              <a:t>test_p2p3_features</a:t>
+              <a:t>test_attachments</a:t>
             </a:r>
             <a:endParaRPr lang="en-US" sz="1100" dirty="0"/>
           </a:p>
@@ -36498,7 +36333,7 @@
         <p:spPr>
           <a:xfrm>
             <a:off x="2880360" y="3067812"/>
-            <a:ext cx="1487805" cy="210312"/>
+            <a:ext cx="1411357" cy="210312"/>
           </a:xfrm>
           <a:prstGeom prst="rect">
             <a:avLst/>
@@ -36517,7 +36352,7 @@
         </p:nvSpPr>
         <p:spPr>
           <a:xfrm>
-            <a:off x="4441317" y="3017520"/>
+            <a:off x="4364869" y="3017520"/>
             <a:ext cx="548640" cy="310896"/>
           </a:xfrm>
           <a:prstGeom prst="rect">
@@ -36542,7 +36377,7 @@
                 <a:ea typeface="Microsoft YaHei" pitchFamily="34" charset="-122"/>
                 <a:cs typeface="Microsoft YaHei" pitchFamily="34" charset="-120"/>
               </a:rPr>
-              <a:t>11</a:t>
+              <a:t>20</a:t>
             </a:r>
             <a:endParaRPr lang="en-US" sz="1150" dirty="0"/>
           </a:p>
@@ -36581,7 +36416,7 @@
                 <a:ea typeface="Microsoft YaHei" pitchFamily="34" charset="-122"/>
                 <a:cs typeface="Microsoft YaHei" pitchFamily="34" charset="-120"/>
               </a:rPr>
-              <a:t>test_parsers</a:t>
+              <a:t>test_corrector_l4</a:t>
             </a:r>
             <a:endParaRPr lang="en-US" sz="1100" dirty="0"/>
           </a:p>
@@ -36596,7 +36431,7 @@
         <p:spPr>
           <a:xfrm>
             <a:off x="2880360" y="3470148"/>
-            <a:ext cx="1217295" cy="210312"/>
+            <a:ext cx="1340789" cy="210312"/>
           </a:xfrm>
           <a:prstGeom prst="rect">
             <a:avLst/>
@@ -36615,7 +36450,7 @@
         </p:nvSpPr>
         <p:spPr>
           <a:xfrm>
-            <a:off x="4170807" y="3419856"/>
+            <a:off x="4294301" y="3419856"/>
             <a:ext cx="548640" cy="310896"/>
           </a:xfrm>
           <a:prstGeom prst="rect">
@@ -36640,7 +36475,7 @@
                 <a:ea typeface="Microsoft YaHei" pitchFamily="34" charset="-122"/>
                 <a:cs typeface="Microsoft YaHei" pitchFamily="34" charset="-120"/>
               </a:rPr>
-              <a:t>9</a:t>
+              <a:t>19</a:t>
             </a:r>
             <a:endParaRPr lang="en-US" sz="1150" dirty="0"/>
           </a:p>
@@ -36679,7 +36514,7 @@
                 <a:ea typeface="Microsoft YaHei" pitchFamily="34" charset="-122"/>
                 <a:cs typeface="Microsoft YaHei" pitchFamily="34" charset="-120"/>
               </a:rPr>
-              <a:t>test_p1_features</a:t>
+              <a:t>test_correction_highlighter</a:t>
             </a:r>
             <a:endParaRPr lang="en-US" sz="1100" dirty="0"/>
           </a:p>
@@ -36694,7 +36529,7 @@
         <p:spPr>
           <a:xfrm>
             <a:off x="2880360" y="3872484"/>
-            <a:ext cx="1217295" cy="210312"/>
+            <a:ext cx="1340789" cy="210312"/>
           </a:xfrm>
           <a:prstGeom prst="rect">
             <a:avLst/>
@@ -36713,7 +36548,7 @@
         </p:nvSpPr>
         <p:spPr>
           <a:xfrm>
-            <a:off x="4170807" y="3822192"/>
+            <a:off x="4294301" y="3822192"/>
             <a:ext cx="548640" cy="310896"/>
           </a:xfrm>
           <a:prstGeom prst="rect">
@@ -36738,7 +36573,7 @@
                 <a:ea typeface="Microsoft YaHei" pitchFamily="34" charset="-122"/>
                 <a:cs typeface="Microsoft YaHei" pitchFamily="34" charset="-120"/>
               </a:rPr>
-              <a:t>9</a:t>
+              <a:t>19</a:t>
             </a:r>
             <a:endParaRPr lang="en-US" sz="1150" dirty="0"/>
           </a:p>
@@ -36777,7 +36612,7 @@
                 <a:ea typeface="Microsoft YaHei" pitchFamily="34" charset="-122"/>
                 <a:cs typeface="Microsoft YaHei" pitchFamily="34" charset="-120"/>
               </a:rPr>
-              <a:t>test_data_search</a:t>
+              <a:t>test_backup_limits</a:t>
             </a:r>
             <a:endParaRPr lang="en-US" sz="1100" dirty="0"/>
           </a:p>
@@ -36792,7 +36627,7 @@
         <p:spPr>
           <a:xfrm>
             <a:off x="2880360" y="4274820"/>
-            <a:ext cx="1082040" cy="210312"/>
+            <a:ext cx="1340789" cy="210312"/>
           </a:xfrm>
           <a:prstGeom prst="rect">
             <a:avLst/>
@@ -36811,7 +36646,7 @@
         </p:nvSpPr>
         <p:spPr>
           <a:xfrm>
-            <a:off x="4035552" y="4224528"/>
+            <a:off x="4294301" y="4224528"/>
             <a:ext cx="548640" cy="310896"/>
           </a:xfrm>
           <a:prstGeom prst="rect">
@@ -36836,7 +36671,7 @@
                 <a:ea typeface="Microsoft YaHei" pitchFamily="34" charset="-122"/>
                 <a:cs typeface="Microsoft YaHei" pitchFamily="34" charset="-120"/>
               </a:rPr>
-              <a:t>8</a:t>
+              <a:t>19</a:t>
             </a:r>
             <a:endParaRPr lang="en-US" sz="1150" dirty="0"/>
           </a:p>
@@ -36875,7 +36710,7 @@
                 <a:ea typeface="Microsoft YaHei" pitchFamily="34" charset="-122"/>
                 <a:cs typeface="Microsoft YaHei" pitchFamily="34" charset="-120"/>
               </a:rPr>
-              <a:t>test_compile_pdf</a:t>
+              <a:t>test_stage3_extras</a:t>
             </a:r>
             <a:endParaRPr lang="en-US" sz="1100" dirty="0"/>
           </a:p>
@@ -36890,7 +36725,7 @@
         <p:spPr>
           <a:xfrm>
             <a:off x="2880360" y="4677156"/>
-            <a:ext cx="811530" cy="210312"/>
+            <a:ext cx="1340789" cy="210312"/>
           </a:xfrm>
           <a:prstGeom prst="rect">
             <a:avLst/>
@@ -36909,7 +36744,7 @@
         </p:nvSpPr>
         <p:spPr>
           <a:xfrm>
-            <a:off x="3765042" y="4626864"/>
+            <a:off x="4294301" y="4626864"/>
             <a:ext cx="548640" cy="310896"/>
           </a:xfrm>
           <a:prstGeom prst="rect">
@@ -36934,7 +36769,7 @@
                 <a:ea typeface="Microsoft YaHei" pitchFamily="34" charset="-122"/>
                 <a:cs typeface="Microsoft YaHei" pitchFamily="34" charset="-120"/>
               </a:rPr>
-              <a:t>6</a:t>
+              <a:t>19</a:t>
             </a:r>
             <a:endParaRPr lang="en-US" sz="1150" dirty="0"/>
           </a:p>
@@ -36973,7 +36808,7 @@
                 <a:ea typeface="Microsoft YaHei" pitchFamily="34" charset="-122"/>
                 <a:cs typeface="Microsoft YaHei" pitchFamily="34" charset="-120"/>
               </a:rPr>
-              <a:t>test_ui_guard</a:t>
+              <a:t>test_batch_correct</a:t>
             </a:r>
             <a:endParaRPr lang="en-US" sz="1100" dirty="0"/>
           </a:p>
@@ -36988,7 +36823,7 @@
         <p:spPr>
           <a:xfrm>
             <a:off x="2880360" y="5079492"/>
-            <a:ext cx="676275" cy="210312"/>
+            <a:ext cx="1199653" cy="210312"/>
           </a:xfrm>
           <a:prstGeom prst="rect">
             <a:avLst/>
@@ -37007,7 +36842,7 @@
         </p:nvSpPr>
         <p:spPr>
           <a:xfrm>
-            <a:off x="3629787" y="5029200"/>
+            <a:off x="4153165" y="5029200"/>
             <a:ext cx="548640" cy="310896"/>
           </a:xfrm>
           <a:prstGeom prst="rect">
@@ -37032,7 +36867,7 @@
                 <a:ea typeface="Microsoft YaHei" pitchFamily="34" charset="-122"/>
                 <a:cs typeface="Microsoft YaHei" pitchFamily="34" charset="-120"/>
               </a:rPr>
-              <a:t>5</a:t>
+              <a:t>17</a:t>
             </a:r>
             <a:endParaRPr lang="en-US" sz="1150" dirty="0"/>
           </a:p>
@@ -37071,7 +36906,7 @@
                 <a:ea typeface="Microsoft YaHei" pitchFamily="34" charset="-122"/>
                 <a:cs typeface="Microsoft YaHei" pitchFamily="34" charset="-120"/>
               </a:rPr>
-              <a:t>test_app_smoke</a:t>
+              <a:t>test_registry</a:t>
             </a:r>
             <a:endParaRPr lang="en-US" sz="1100" dirty="0"/>
           </a:p>
@@ -37086,7 +36921,7 @@
         <p:spPr>
           <a:xfrm>
             <a:off x="2880360" y="5481828"/>
-            <a:ext cx="541020" cy="210312"/>
+            <a:ext cx="1199653" cy="210312"/>
           </a:xfrm>
           <a:prstGeom prst="rect">
             <a:avLst/>
@@ -37105,7 +36940,7 @@
         </p:nvSpPr>
         <p:spPr>
           <a:xfrm>
-            <a:off x="3494532" y="5431536"/>
+            <a:off x="4153165" y="5431536"/>
             <a:ext cx="548640" cy="310896"/>
           </a:xfrm>
           <a:prstGeom prst="rect">
@@ -37130,7 +36965,7 @@
                 <a:ea typeface="Microsoft YaHei" pitchFamily="34" charset="-122"/>
                 <a:cs typeface="Microsoft YaHei" pitchFamily="34" charset="-120"/>
               </a:rPr>
-              <a:t>4</a:t>
+              <a:t>17</a:t>
             </a:r>
             <a:endParaRPr lang="en-US" sz="1150" dirty="0"/>
           </a:p>
@@ -37169,7 +37004,7 @@
                 <a:ea typeface="Microsoft YaHei" pitchFamily="34" charset="-122"/>
                 <a:cs typeface="Microsoft YaHei" pitchFamily="34" charset="-120"/>
               </a:rPr>
-              <a:t>合计 87 用例 · 每次提交 ruff E9+F821 静态门槛（拦截“忘导入即崩溃”）</a:t>
+              <a:t>合计 465 用例 · 32 个测试文件 · 每次提交 ruff E9+F821 静态门槛（拦截“忘导入即崩溃”）</a:t>
             </a:r>
             <a:endParaRPr lang="en-US" sz="1150" dirty="0"/>
           </a:p>
@@ -37712,7 +37547,7 @@
                 <a:ea typeface="Microsoft YaHei" pitchFamily="34" charset="-122"/>
                 <a:cs typeface="Microsoft YaHei" pitchFamily="34" charset="-120"/>
               </a:rPr>
-              <a:t>9 步全 PASS</a:t>
+              <a:t>18 步全 PASS</a:t>
             </a:r>
             <a:endParaRPr lang="en-US" sz="1500" dirty="0"/>
           </a:p>
@@ -37855,7 +37690,7 @@
                 <a:ea typeface="Microsoft YaHei" pitchFamily="34" charset="-122"/>
                 <a:cs typeface="Microsoft YaHei" pitchFamily="34" charset="-120"/>
               </a:rPr>
-              <a:t>另有 e2e_check.py：模拟真实数据目录走通 9 大流程，逐项 PASS/FAIL</a:t>
+              <a:t>另有 e2e_check.py：模拟真实数据目录走通 18 大流程，逐项 PASS/FAIL</a:t>
             </a:r>
             <a:endParaRPr lang="en-US" sz="1100" dirty="0"/>
           </a:p>
@@ -38445,7 +38280,7 @@
                 <a:ea typeface="Microsoft YaHei" pitchFamily="34" charset="-122"/>
                 <a:cs typeface="Microsoft YaHei" pitchFamily="34" charset="-120"/>
               </a:rPr>
-              <a:t>7 种文档格式批量导入，分类标签 + 全文检索，随手可查</a:t>
+              <a:t>8 种文档格式批量导入，分类标签 + 全文检索，随手可查</a:t>
             </a:r>
             <a:endParaRPr lang="en-US" sz="1550" dirty="0"/>
           </a:p>
@@ -38961,7 +38796,7 @@
                 <a:ea typeface="Microsoft YaHei" pitchFamily="34" charset="-122"/>
                 <a:cs typeface="Microsoft YaHei" pitchFamily="34" charset="-120"/>
               </a:rPr>
-              <a:t>公文汇编助手 · 单机离线版 v1.2.0</a:t>
+              <a:t>公文汇编助手 · 单机离线版 v1.5.1</a:t>
             </a:r>
             <a:endParaRPr lang="en-US" sz="1200" dirty="0"/>
           </a:p>
@@ -39306,7 +39141,7 @@
                 <a:ea typeface="Microsoft YaHei" pitchFamily="34" charset="-122"/>
                 <a:cs typeface="Microsoft YaHei" pitchFamily="34" charset="-120"/>
               </a:rPr>
-              <a:t>9 步端到端自检，部署后一键验货</a:t>
+              <a:t>18 步端到端自检，部署后一键验货</a:t>
             </a:r>
             <a:endParaRPr lang="en-US" sz="1400" dirty="0"/>
           </a:p>
@@ -40133,7 +39968,7 @@
                 <a:ea typeface="Microsoft YaHei" pitchFamily="34" charset="-122"/>
                 <a:cs typeface="Microsoft YaHei" pitchFamily="34" charset="-120"/>
               </a:rPr>
-              <a:t>7+4</a:t>
+              <a:t>8+4</a:t>
             </a:r>
             <a:endParaRPr lang="en-US" sz="4400" dirty="0"/>
           </a:p>
@@ -40195,7 +40030,7 @@
                 <a:ea typeface="Microsoft YaHei" pitchFamily="34" charset="-122"/>
                 <a:cs typeface="Microsoft YaHei" pitchFamily="34" charset="-120"/>
               </a:rPr>
-              <a:t>文档 7 种 + 图片 4 类（OCR）</a:t>
+              <a:t>文档 8 种 + 图片 4 类（内置 OCR）</a:t>
             </a:r>
             <a:endParaRPr lang="en-US" sz="1400" dirty="0"/>
           </a:p>
@@ -40940,7 +40775,7 @@
                 <a:ea typeface="Microsoft YaHei" pitchFamily="34" charset="-122"/>
                 <a:cs typeface="Microsoft YaHei" pitchFamily="34" charset="-120"/>
               </a:rPr>
-              <a:t>功能全景：六大能力域，17 个功能模块</a:t>
+              <a:t>功能全景：六大能力域，24 个功能模块</a:t>
             </a:r>
             <a:endParaRPr lang="en-US" sz="2600" dirty="0"/>
           </a:p>
@@ -41901,7 +41736,7 @@
                 <a:ea typeface="Microsoft YaHei" pitchFamily="34" charset="-122"/>
                 <a:cs typeface="Microsoft YaHei" pitchFamily="34" charset="-120"/>
               </a:rPr>
-              <a:t>17 个功能模块</a:t>
+              <a:t>24 个功能模块</a:t>
             </a:r>
             <a:endParaRPr lang="en-US" sz="1700" dirty="0"/>
           </a:p>
@@ -44481,7 +44316,7 @@
                 <a:ea typeface="Microsoft YaHei" pitchFamily="34" charset="-122"/>
                 <a:cs typeface="Microsoft YaHei" pitchFamily="34" charset="-120"/>
               </a:rPr>
-              <a:t>parsers 六格式解析</a:t>
+              <a:t>parsers 多格式解析</a:t>
             </a:r>
             <a:endParaRPr lang="en-US" sz="1200" dirty="0"/>
           </a:p>

--- a/公文汇编助手-系统介绍.pptx
+++ b/公文汇编助手-系统介绍.pptx
@@ -4440,7 +4440,7 @@
                 <a:ea typeface="Microsoft YaHei" pitchFamily="34" charset="-122"/>
                 <a:cs typeface="Microsoft YaHei" pitchFamily="34" charset="-120"/>
               </a:rPr>
-              <a:t>GWTOOL · 单机离线版 v1.5.1</a:t>
+              <a:t>GWTOOL · 单机离线版 v1.5.2</a:t>
             </a:r>
             <a:endParaRPr lang="en-US" sz="1300" dirty="0"/>
           </a:p>
@@ -38796,7 +38796,7 @@
                 <a:ea typeface="Microsoft YaHei" pitchFamily="34" charset="-122"/>
                 <a:cs typeface="Microsoft YaHei" pitchFamily="34" charset="-120"/>
               </a:rPr>
-              <a:t>公文汇编助手 · 单机离线版 v1.5.1</a:t>
+              <a:t>公文汇编助手 · 单机离线版 v1.5.2</a:t>
             </a:r>
             <a:endParaRPr lang="en-US" sz="1200" dirty="0"/>
           </a:p>

--- a/公文汇编助手-系统介绍.pptx
+++ b/公文汇编助手-系统介绍.pptx
@@ -45,9 +45,10 @@
     <p:sldId id="293" r:id="rId39"/>
     <p:sldId id="294" r:id="rId40"/>
     <p:sldId id="295" r:id="rId41"/>
+    <p:sldId id="296" r:id="rId42"/>
   </p:sldIdLst>
   <p:notesMasterIdLst>
-    <p:notesMasterId r:id="rId42"/>
+    <p:notesMasterId r:id="rId43"/>
   </p:notesMasterIdLst>
   <p:sldSz cx="12192000" cy="6858000"/>
   <p:notesSz cx="6858000" cy="12192000"/>
@@ -3557,6 +3558,94 @@
             <a:fld id="{F7021451-1387-4CA6-816F-3879F97B5CBC}" type="slidenum">
               <a:rPr lang="en-US"/>
               <a:t>40</a:t>
+            </a:fld>
+            <a:endParaRPr lang="en-US"/>
+          </a:p>
+        </p:txBody>
+      </p:sp>
+    </p:spTree>
+    <p:extLst>
+      <p:ext uri="{BB962C8B-B14F-4D97-AF65-F5344CB8AC3E}">
+        <p14:creationId xmlns:p14="http://schemas.microsoft.com/office/powerpoint/2010/main" val="1024086991"/>
+      </p:ext>
+    </p:extLst>
+  </p:cSld>
+  <p:clrMapOvr>
+    <a:masterClrMapping/>
+  </p:clrMapOvr>
+</p:notes>
+</file>
+
+<file path=ppt/notesSlides/notesSlide41.xml><?xml version="1.0" encoding="utf-8"?>
+<p:notes xmlns:a="http://schemas.openxmlformats.org/drawingml/2006/main" xmlns:r="http://schemas.openxmlformats.org/officeDocument/2006/relationships" xmlns:p="http://schemas.openxmlformats.org/presentationml/2006/main">
+  <p:cSld>
+    <p:spTree>
+      <p:nvGrpSpPr>
+        <p:cNvPr id="1" name=""/>
+        <p:cNvGrpSpPr/>
+        <p:nvPr/>
+      </p:nvGrpSpPr>
+      <p:grpSpPr>
+        <a:xfrm>
+          <a:off x="0" y="0"/>
+          <a:ext cx="0" cy="0"/>
+          <a:chOff x="0" y="0"/>
+          <a:chExt cx="0" cy="0"/>
+        </a:xfrm>
+      </p:grpSpPr>
+      <p:sp>
+        <p:nvSpPr>
+          <p:cNvPr id="2" name="Slide Image Placeholder 1"/>
+          <p:cNvSpPr>
+            <a:spLocks noGrp="1" noRot="1" noChangeAspect="1"/>
+          </p:cNvSpPr>
+          <p:nvPr>
+            <p:ph type="sldImg"/>
+          </p:nvPr>
+        </p:nvSpPr>
+        <p:spPr/>
+      </p:sp>
+      <p:sp>
+        <p:nvSpPr>
+          <p:cNvPr id="3" name="Notes Placeholder 2"/>
+          <p:cNvSpPr>
+            <a:spLocks noGrp="1"/>
+          </p:cNvSpPr>
+          <p:nvPr>
+            <p:ph type="body" idx="1"/>
+          </p:nvPr>
+        </p:nvSpPr>
+        <p:spPr/>
+        <p:txBody>
+          <a:bodyPr/>
+          <a:lstStyle/>
+          <a:p>
+            <a:r>
+              <a:rPr lang="en-US" dirty="0"/>
+              <a:t/>
+            </a:r>
+            <a:endParaRPr lang="en-US" dirty="0"/>
+          </a:p>
+        </p:txBody>
+      </p:sp>
+      <p:sp>
+        <p:nvSpPr>
+          <p:cNvPr id="4" name="Slide Number Placeholder 3"/>
+          <p:cNvSpPr>
+            <a:spLocks noGrp="1"/>
+          </p:cNvSpPr>
+          <p:nvPr>
+            <p:ph type="sldNum" sz="quarter" idx="10"/>
+          </p:nvPr>
+        </p:nvSpPr>
+        <p:spPr/>
+        <p:txBody>
+          <a:bodyPr/>
+          <a:lstStyle/>
+          <a:p>
+            <a:fld id="{F7021451-1387-4CA6-816F-3879F97B5CBC}" type="slidenum">
+              <a:rPr lang="en-US"/>
+              <a:t>41</a:t>
             </a:fld>
             <a:endParaRPr lang="en-US"/>
           </a:p>
@@ -4440,7 +4529,7 @@
                 <a:ea typeface="Microsoft YaHei" pitchFamily="34" charset="-122"/>
                 <a:cs typeface="Microsoft YaHei" pitchFamily="34" charset="-120"/>
               </a:rPr>
-              <a:t>GWTOOL · 单机离线版 v1.5.2</a:t>
+              <a:t>GWTOOL · 单机离线版 v1.6.0</a:t>
             </a:r>
             <a:endParaRPr lang="en-US" sz="1300" dirty="0"/>
           </a:p>
@@ -4782,7 +4871,7 @@
                 <a:ea typeface="Microsoft YaHei" pitchFamily="34" charset="-122"/>
                 <a:cs typeface="Microsoft YaHei" pitchFamily="34" charset="-120"/>
               </a:rPr>
-              <a:t>465 项自动化测试</a:t>
+              <a:t>1118 项自动化测试</a:t>
             </a:r>
             <a:endParaRPr lang="en-US" sz="1250" dirty="0"/>
           </a:p>
@@ -5099,7 +5188,7 @@
                 <a:ea typeface="Microsoft YaHei" pitchFamily="34" charset="-122"/>
                 <a:cs typeface="Microsoft YaHei" pitchFamily="34" charset="-120"/>
               </a:rPr>
-              <a:t>数据层：9 张业务表，一“室”管全部档案</a:t>
+              <a:t>数据层：12 张业务表，一“室”管全部档案</a:t>
             </a:r>
             <a:endParaRPr lang="en-US" sz="2600" dirty="0"/>
           </a:p>
@@ -5216,7 +5305,7 @@
                 <a:ea typeface="Microsoft YaHei" pitchFamily="34" charset="-122"/>
                 <a:cs typeface="Microsoft YaHei" pitchFamily="34" charset="-120"/>
               </a:rPr>
-              <a:t>业务表（schema.py · 版本 v2）</a:t>
+              <a:t>业务表（schema.py · 版本 v4）</a:t>
             </a:r>
             <a:endParaRPr lang="en-US" sz="1400" dirty="0"/>
           </a:p>
@@ -5230,12 +5319,12 @@
         </p:nvSpPr>
         <p:spPr>
           <a:xfrm>
-            <a:off x="457200" y="2176272"/>
-            <a:ext cx="1682496" cy="530352"/>
+            <a:off x="457200" y="2103120"/>
+            <a:ext cx="1682496" cy="457200"/>
           </a:xfrm>
           <a:prstGeom prst="roundRect">
             <a:avLst>
-              <a:gd name="adj" fmla="val 10345"/>
+              <a:gd name="adj" fmla="val 12000"/>
             </a:avLst>
           </a:prstGeom>
           <a:solidFill>
@@ -5252,8 +5341,8 @@
         </p:nvSpPr>
         <p:spPr>
           <a:xfrm>
-            <a:off x="530352" y="2176272"/>
-            <a:ext cx="1536192" cy="530352"/>
+            <a:off x="530352" y="2103120"/>
+            <a:ext cx="1536192" cy="457200"/>
           </a:xfrm>
           <a:prstGeom prst="rect">
             <a:avLst/>
@@ -5280,8 +5369,8 @@
         </p:nvSpPr>
         <p:spPr>
           <a:xfrm>
-            <a:off x="548640" y="2217420"/>
-            <a:ext cx="1517904" cy="457200"/>
+            <a:off x="548640" y="2135124"/>
+            <a:ext cx="1517904" cy="402336"/>
           </a:xfrm>
           <a:prstGeom prst="rect">
             <a:avLst/>
@@ -5300,7 +5389,7 @@
               <a:buNone/>
             </a:pPr>
             <a:r>
-              <a:rPr lang="en-US" sz="1150" b="1" dirty="0">
+              <a:rPr lang="en-US" sz="1050" b="1" dirty="0">
                 <a:solidFill>
                   <a:srgbClr val="9E2B25"/>
                 </a:solidFill>
@@ -5310,7 +5399,7 @@
               </a:rPr>
               <a:t>documents</a:t>
             </a:r>
-            <a:endParaRPr lang="en-US" sz="1150" dirty="0"/>
+            <a:endParaRPr lang="en-US" sz="1050" dirty="0"/>
           </a:p>
           <a:p>
             <a:pPr algn="ctr" indent="0" marL="0">
@@ -5320,7 +5409,7 @@
               <a:buNone/>
             </a:pPr>
             <a:r>
-              <a:rPr lang="en-US" sz="1050" dirty="0">
+              <a:rPr lang="en-US" sz="1000" dirty="0">
                 <a:solidFill>
                   <a:srgbClr val="8C8178"/>
                 </a:solidFill>
@@ -5330,7 +5419,7 @@
               </a:rPr>
               <a:t>文档</a:t>
             </a:r>
-            <a:endParaRPr lang="en-US" sz="1150" dirty="0"/>
+            <a:endParaRPr lang="en-US" sz="1050" dirty="0"/>
           </a:p>
         </p:txBody>
       </p:sp>
@@ -5342,12 +5431,12 @@
         </p:nvSpPr>
         <p:spPr>
           <a:xfrm>
-            <a:off x="2267712" y="2176272"/>
-            <a:ext cx="1682496" cy="530352"/>
+            <a:off x="2267712" y="2103120"/>
+            <a:ext cx="1682496" cy="457200"/>
           </a:xfrm>
           <a:prstGeom prst="roundRect">
             <a:avLst>
-              <a:gd name="adj" fmla="val 10345"/>
+              <a:gd name="adj" fmla="val 12000"/>
             </a:avLst>
           </a:prstGeom>
           <a:solidFill>
@@ -5364,8 +5453,8 @@
         </p:nvSpPr>
         <p:spPr>
           <a:xfrm>
-            <a:off x="2340864" y="2176272"/>
-            <a:ext cx="1536192" cy="530352"/>
+            <a:off x="2340864" y="2103120"/>
+            <a:ext cx="1536192" cy="457200"/>
           </a:xfrm>
           <a:prstGeom prst="rect">
             <a:avLst/>
@@ -5392,8 +5481,8 @@
         </p:nvSpPr>
         <p:spPr>
           <a:xfrm>
-            <a:off x="2359152" y="2217420"/>
-            <a:ext cx="1517904" cy="457200"/>
+            <a:off x="2359152" y="2135124"/>
+            <a:ext cx="1517904" cy="402336"/>
           </a:xfrm>
           <a:prstGeom prst="rect">
             <a:avLst/>
@@ -5412,7 +5501,7 @@
               <a:buNone/>
             </a:pPr>
             <a:r>
-              <a:rPr lang="en-US" sz="1150" b="1" dirty="0">
+              <a:rPr lang="en-US" sz="1050" b="1" dirty="0">
                 <a:solidFill>
                   <a:srgbClr val="9E2B25"/>
                 </a:solidFill>
@@ -5422,7 +5511,7 @@
               </a:rPr>
               <a:t>categories</a:t>
             </a:r>
-            <a:endParaRPr lang="en-US" sz="1150" dirty="0"/>
+            <a:endParaRPr lang="en-US" sz="1050" dirty="0"/>
           </a:p>
           <a:p>
             <a:pPr algn="ctr" indent="0" marL="0">
@@ -5432,7 +5521,7 @@
               <a:buNone/>
             </a:pPr>
             <a:r>
-              <a:rPr lang="en-US" sz="1050" dirty="0">
+              <a:rPr lang="en-US" sz="1000" dirty="0">
                 <a:solidFill>
                   <a:srgbClr val="8C8178"/>
                 </a:solidFill>
@@ -5442,7 +5531,7 @@
               </a:rPr>
               <a:t>分类树</a:t>
             </a:r>
-            <a:endParaRPr lang="en-US" sz="1150" dirty="0"/>
+            <a:endParaRPr lang="en-US" sz="1050" dirty="0"/>
           </a:p>
         </p:txBody>
       </p:sp>
@@ -5454,12 +5543,12 @@
         </p:nvSpPr>
         <p:spPr>
           <a:xfrm>
-            <a:off x="4078224" y="2176272"/>
-            <a:ext cx="1682496" cy="530352"/>
+            <a:off x="4078224" y="2103120"/>
+            <a:ext cx="1682496" cy="457200"/>
           </a:xfrm>
           <a:prstGeom prst="roundRect">
             <a:avLst>
-              <a:gd name="adj" fmla="val 10345"/>
+              <a:gd name="adj" fmla="val 12000"/>
             </a:avLst>
           </a:prstGeom>
           <a:solidFill>
@@ -5476,8 +5565,8 @@
         </p:nvSpPr>
         <p:spPr>
           <a:xfrm>
-            <a:off x="4151376" y="2176272"/>
-            <a:ext cx="1536192" cy="530352"/>
+            <a:off x="4151376" y="2103120"/>
+            <a:ext cx="1536192" cy="457200"/>
           </a:xfrm>
           <a:prstGeom prst="rect">
             <a:avLst/>
@@ -5504,8 +5593,8 @@
         </p:nvSpPr>
         <p:spPr>
           <a:xfrm>
-            <a:off x="4169664" y="2217420"/>
-            <a:ext cx="1517904" cy="457200"/>
+            <a:off x="4169664" y="2135124"/>
+            <a:ext cx="1517904" cy="402336"/>
           </a:xfrm>
           <a:prstGeom prst="rect">
             <a:avLst/>
@@ -5524,7 +5613,7 @@
               <a:buNone/>
             </a:pPr>
             <a:r>
-              <a:rPr lang="en-US" sz="1150" b="1" dirty="0">
+              <a:rPr lang="en-US" sz="1050" b="1" dirty="0">
                 <a:solidFill>
                   <a:srgbClr val="9E2B25"/>
                 </a:solidFill>
@@ -5534,7 +5623,7 @@
               </a:rPr>
               <a:t>dictionary</a:t>
             </a:r>
-            <a:endParaRPr lang="en-US" sz="1150" dirty="0"/>
+            <a:endParaRPr lang="en-US" sz="1050" dirty="0"/>
           </a:p>
           <a:p>
             <a:pPr algn="ctr" indent="0" marL="0">
@@ -5544,7 +5633,7 @@
               <a:buNone/>
             </a:pPr>
             <a:r>
-              <a:rPr lang="en-US" sz="1050" dirty="0">
+              <a:rPr lang="en-US" sz="1000" dirty="0">
                 <a:solidFill>
                   <a:srgbClr val="8C8178"/>
                 </a:solidFill>
@@ -5554,7 +5643,7 @@
               </a:rPr>
               <a:t>词典</a:t>
             </a:r>
-            <a:endParaRPr lang="en-US" sz="1150" dirty="0"/>
+            <a:endParaRPr lang="en-US" sz="1050" dirty="0"/>
           </a:p>
         </p:txBody>
       </p:sp>
@@ -5566,12 +5655,12 @@
         </p:nvSpPr>
         <p:spPr>
           <a:xfrm>
-            <a:off x="457200" y="2834640"/>
-            <a:ext cx="1682496" cy="530352"/>
+            <a:off x="457200" y="2633472"/>
+            <a:ext cx="1682496" cy="457200"/>
           </a:xfrm>
           <a:prstGeom prst="roundRect">
             <a:avLst>
-              <a:gd name="adj" fmla="val 10345"/>
+              <a:gd name="adj" fmla="val 12000"/>
             </a:avLst>
           </a:prstGeom>
           <a:solidFill>
@@ -5588,8 +5677,8 @@
         </p:nvSpPr>
         <p:spPr>
           <a:xfrm>
-            <a:off x="530352" y="2834640"/>
-            <a:ext cx="1536192" cy="530352"/>
+            <a:off x="530352" y="2633472"/>
+            <a:ext cx="1536192" cy="457200"/>
           </a:xfrm>
           <a:prstGeom prst="rect">
             <a:avLst/>
@@ -5616,8 +5705,8 @@
         </p:nvSpPr>
         <p:spPr>
           <a:xfrm>
-            <a:off x="548640" y="2875788"/>
-            <a:ext cx="1517904" cy="457200"/>
+            <a:off x="548640" y="2665476"/>
+            <a:ext cx="1517904" cy="402336"/>
           </a:xfrm>
           <a:prstGeom prst="rect">
             <a:avLst/>
@@ -5636,7 +5725,7 @@
               <a:buNone/>
             </a:pPr>
             <a:r>
-              <a:rPr lang="en-US" sz="1150" b="1" dirty="0">
+              <a:rPr lang="en-US" sz="1050" b="1" dirty="0">
                 <a:solidFill>
                   <a:srgbClr val="9E2B25"/>
                 </a:solidFill>
@@ -5646,7 +5735,7 @@
               </a:rPr>
               <a:t>error_pairs</a:t>
             </a:r>
-            <a:endParaRPr lang="en-US" sz="1150" dirty="0"/>
+            <a:endParaRPr lang="en-US" sz="1050" dirty="0"/>
           </a:p>
           <a:p>
             <a:pPr algn="ctr" indent="0" marL="0">
@@ -5656,7 +5745,7 @@
               <a:buNone/>
             </a:pPr>
             <a:r>
-              <a:rPr lang="en-US" sz="1050" dirty="0">
+              <a:rPr lang="en-US" sz="1000" dirty="0">
                 <a:solidFill>
                   <a:srgbClr val="8C8178"/>
                 </a:solidFill>
@@ -5666,7 +5755,7 @@
               </a:rPr>
               <a:t>纠错对</a:t>
             </a:r>
-            <a:endParaRPr lang="en-US" sz="1150" dirty="0"/>
+            <a:endParaRPr lang="en-US" sz="1050" dirty="0"/>
           </a:p>
         </p:txBody>
       </p:sp>
@@ -5678,12 +5767,12 @@
         </p:nvSpPr>
         <p:spPr>
           <a:xfrm>
-            <a:off x="2267712" y="2834640"/>
-            <a:ext cx="1682496" cy="530352"/>
+            <a:off x="2267712" y="2633472"/>
+            <a:ext cx="1682496" cy="457200"/>
           </a:xfrm>
           <a:prstGeom prst="roundRect">
             <a:avLst>
-              <a:gd name="adj" fmla="val 10345"/>
+              <a:gd name="adj" fmla="val 12000"/>
             </a:avLst>
           </a:prstGeom>
           <a:solidFill>
@@ -5700,8 +5789,8 @@
         </p:nvSpPr>
         <p:spPr>
           <a:xfrm>
-            <a:off x="2340864" y="2834640"/>
-            <a:ext cx="1536192" cy="530352"/>
+            <a:off x="2340864" y="2633472"/>
+            <a:ext cx="1536192" cy="457200"/>
           </a:xfrm>
           <a:prstGeom prst="rect">
             <a:avLst/>
@@ -5728,8 +5817,8 @@
         </p:nvSpPr>
         <p:spPr>
           <a:xfrm>
-            <a:off x="2359152" y="2875788"/>
-            <a:ext cx="1517904" cy="457200"/>
+            <a:off x="2359152" y="2665476"/>
+            <a:ext cx="1517904" cy="402336"/>
           </a:xfrm>
           <a:prstGeom prst="rect">
             <a:avLst/>
@@ -5748,7 +5837,7 @@
               <a:buNone/>
             </a:pPr>
             <a:r>
-              <a:rPr lang="en-US" sz="1150" b="1" dirty="0">
+              <a:rPr lang="en-US" sz="1050" b="1" dirty="0">
                 <a:solidFill>
                   <a:srgbClr val="9E2B25"/>
                 </a:solidFill>
@@ -5758,7 +5847,7 @@
               </a:rPr>
               <a:t>user_phrases</a:t>
             </a:r>
-            <a:endParaRPr lang="en-US" sz="1150" dirty="0"/>
+            <a:endParaRPr lang="en-US" sz="1050" dirty="0"/>
           </a:p>
           <a:p>
             <a:pPr algn="ctr" indent="0" marL="0">
@@ -5768,7 +5857,7 @@
               <a:buNone/>
             </a:pPr>
             <a:r>
-              <a:rPr lang="en-US" sz="1050" dirty="0">
+              <a:rPr lang="en-US" sz="1000" dirty="0">
                 <a:solidFill>
                   <a:srgbClr val="8C8178"/>
                 </a:solidFill>
@@ -5778,7 +5867,7 @@
               </a:rPr>
               <a:t>常用句式</a:t>
             </a:r>
-            <a:endParaRPr lang="en-US" sz="1150" dirty="0"/>
+            <a:endParaRPr lang="en-US" sz="1050" dirty="0"/>
           </a:p>
         </p:txBody>
       </p:sp>
@@ -5790,12 +5879,12 @@
         </p:nvSpPr>
         <p:spPr>
           <a:xfrm>
-            <a:off x="4078224" y="2834640"/>
-            <a:ext cx="1682496" cy="530352"/>
+            <a:off x="4078224" y="2633472"/>
+            <a:ext cx="1682496" cy="457200"/>
           </a:xfrm>
           <a:prstGeom prst="roundRect">
             <a:avLst>
-              <a:gd name="adj" fmla="val 10345"/>
+              <a:gd name="adj" fmla="val 12000"/>
             </a:avLst>
           </a:prstGeom>
           <a:solidFill>
@@ -5812,8 +5901,8 @@
         </p:nvSpPr>
         <p:spPr>
           <a:xfrm>
-            <a:off x="4151376" y="2834640"/>
-            <a:ext cx="1536192" cy="530352"/>
+            <a:off x="4151376" y="2633472"/>
+            <a:ext cx="1536192" cy="457200"/>
           </a:xfrm>
           <a:prstGeom prst="rect">
             <a:avLst/>
@@ -5840,8 +5929,8 @@
         </p:nvSpPr>
         <p:spPr>
           <a:xfrm>
-            <a:off x="4169664" y="2875788"/>
-            <a:ext cx="1517904" cy="457200"/>
+            <a:off x="4169664" y="2665476"/>
+            <a:ext cx="1517904" cy="402336"/>
           </a:xfrm>
           <a:prstGeom prst="rect">
             <a:avLst/>
@@ -5860,7 +5949,7 @@
               <a:buNone/>
             </a:pPr>
             <a:r>
-              <a:rPr lang="en-US" sz="1150" b="1" dirty="0">
+              <a:rPr lang="en-US" sz="1050" b="1" dirty="0">
                 <a:solidFill>
                   <a:srgbClr val="9E2B25"/>
                 </a:solidFill>
@@ -5870,7 +5959,7 @@
               </a:rPr>
               <a:t>templates</a:t>
             </a:r>
-            <a:endParaRPr lang="en-US" sz="1150" dirty="0"/>
+            <a:endParaRPr lang="en-US" sz="1050" dirty="0"/>
           </a:p>
           <a:p>
             <a:pPr algn="ctr" indent="0" marL="0">
@@ -5880,7 +5969,7 @@
               <a:buNone/>
             </a:pPr>
             <a:r>
-              <a:rPr lang="en-US" sz="1050" dirty="0">
+              <a:rPr lang="en-US" sz="1000" dirty="0">
                 <a:solidFill>
                   <a:srgbClr val="8C8178"/>
                 </a:solidFill>
@@ -5890,7 +5979,7 @@
               </a:rPr>
               <a:t>排版模板</a:t>
             </a:r>
-            <a:endParaRPr lang="en-US" sz="1150" dirty="0"/>
+            <a:endParaRPr lang="en-US" sz="1050" dirty="0"/>
           </a:p>
         </p:txBody>
       </p:sp>
@@ -5902,12 +5991,12 @@
         </p:nvSpPr>
         <p:spPr>
           <a:xfrm>
-            <a:off x="457200" y="3493008"/>
-            <a:ext cx="1682496" cy="530352"/>
+            <a:off x="457200" y="3163824"/>
+            <a:ext cx="1682496" cy="457200"/>
           </a:xfrm>
           <a:prstGeom prst="roundRect">
             <a:avLst>
-              <a:gd name="adj" fmla="val 10345"/>
+              <a:gd name="adj" fmla="val 12000"/>
             </a:avLst>
           </a:prstGeom>
           <a:solidFill>
@@ -5924,8 +6013,8 @@
         </p:nvSpPr>
         <p:spPr>
           <a:xfrm>
-            <a:off x="530352" y="3493008"/>
-            <a:ext cx="1536192" cy="530352"/>
+            <a:off x="530352" y="3163824"/>
+            <a:ext cx="1536192" cy="457200"/>
           </a:xfrm>
           <a:prstGeom prst="rect">
             <a:avLst/>
@@ -5952,8 +6041,8 @@
         </p:nvSpPr>
         <p:spPr>
           <a:xfrm>
-            <a:off x="548640" y="3534156"/>
-            <a:ext cx="1517904" cy="457200"/>
+            <a:off x="548640" y="3195828"/>
+            <a:ext cx="1517904" cy="402336"/>
           </a:xfrm>
           <a:prstGeom prst="rect">
             <a:avLst/>
@@ -5972,7 +6061,7 @@
               <a:buNone/>
             </a:pPr>
             <a:r>
-              <a:rPr lang="en-US" sz="1150" b="1" dirty="0">
+              <a:rPr lang="en-US" sz="1050" b="1" dirty="0">
                 <a:solidFill>
                   <a:srgbClr val="9E2B25"/>
                 </a:solidFill>
@@ -5982,7 +6071,7 @@
               </a:rPr>
               <a:t>settings</a:t>
             </a:r>
-            <a:endParaRPr lang="en-US" sz="1150" dirty="0"/>
+            <a:endParaRPr lang="en-US" sz="1050" dirty="0"/>
           </a:p>
           <a:p>
             <a:pPr algn="ctr" indent="0" marL="0">
@@ -5992,7 +6081,7 @@
               <a:buNone/>
             </a:pPr>
             <a:r>
-              <a:rPr lang="en-US" sz="1050" dirty="0">
+              <a:rPr lang="en-US" sz="1000" dirty="0">
                 <a:solidFill>
                   <a:srgbClr val="8C8178"/>
                 </a:solidFill>
@@ -6002,7 +6091,7 @@
               </a:rPr>
               <a:t>键值设置</a:t>
             </a:r>
-            <a:endParaRPr lang="en-US" sz="1150" dirty="0"/>
+            <a:endParaRPr lang="en-US" sz="1050" dirty="0"/>
           </a:p>
         </p:txBody>
       </p:sp>
@@ -6014,12 +6103,12 @@
         </p:nvSpPr>
         <p:spPr>
           <a:xfrm>
-            <a:off x="2267712" y="3493008"/>
-            <a:ext cx="1682496" cy="530352"/>
+            <a:off x="2267712" y="3163824"/>
+            <a:ext cx="1682496" cy="457200"/>
           </a:xfrm>
           <a:prstGeom prst="roundRect">
             <a:avLst>
-              <a:gd name="adj" fmla="val 10345"/>
+              <a:gd name="adj" fmla="val 12000"/>
             </a:avLst>
           </a:prstGeom>
           <a:solidFill>
@@ -6036,8 +6125,8 @@
         </p:nvSpPr>
         <p:spPr>
           <a:xfrm>
-            <a:off x="2340864" y="3493008"/>
-            <a:ext cx="1536192" cy="530352"/>
+            <a:off x="2340864" y="3163824"/>
+            <a:ext cx="1536192" cy="457200"/>
           </a:xfrm>
           <a:prstGeom prst="rect">
             <a:avLst/>
@@ -6064,8 +6153,8 @@
         </p:nvSpPr>
         <p:spPr>
           <a:xfrm>
-            <a:off x="2359152" y="3534156"/>
-            <a:ext cx="1517904" cy="457200"/>
+            <a:off x="2359152" y="3195828"/>
+            <a:ext cx="1517904" cy="402336"/>
           </a:xfrm>
           <a:prstGeom prst="rect">
             <a:avLst/>
@@ -6084,7 +6173,7 @@
               <a:buNone/>
             </a:pPr>
             <a:r>
-              <a:rPr lang="en-US" sz="1150" b="1" dirty="0">
+              <a:rPr lang="en-US" sz="1050" b="1" dirty="0">
                 <a:solidFill>
                   <a:srgbClr val="9E2B25"/>
                 </a:solidFill>
@@ -6094,7 +6183,7 @@
               </a:rPr>
               <a:t>snapshots</a:t>
             </a:r>
-            <a:endParaRPr lang="en-US" sz="1150" dirty="0"/>
+            <a:endParaRPr lang="en-US" sz="1050" dirty="0"/>
           </a:p>
           <a:p>
             <a:pPr algn="ctr" indent="0" marL="0">
@@ -6104,7 +6193,7 @@
               <a:buNone/>
             </a:pPr>
             <a:r>
-              <a:rPr lang="en-US" sz="1050" dirty="0">
+              <a:rPr lang="en-US" sz="1000" dirty="0">
                 <a:solidFill>
                   <a:srgbClr val="8C8178"/>
                 </a:solidFill>
@@ -6114,7 +6203,7 @@
               </a:rPr>
               <a:t>历史快照</a:t>
             </a:r>
-            <a:endParaRPr lang="en-US" sz="1150" dirty="0"/>
+            <a:endParaRPr lang="en-US" sz="1050" dirty="0"/>
           </a:p>
         </p:txBody>
       </p:sp>
@@ -6126,12 +6215,12 @@
         </p:nvSpPr>
         <p:spPr>
           <a:xfrm>
-            <a:off x="4078224" y="3493008"/>
-            <a:ext cx="1682496" cy="530352"/>
+            <a:off x="4078224" y="3163824"/>
+            <a:ext cx="1682496" cy="457200"/>
           </a:xfrm>
           <a:prstGeom prst="roundRect">
             <a:avLst>
-              <a:gd name="adj" fmla="val 10345"/>
+              <a:gd name="adj" fmla="val 12000"/>
             </a:avLst>
           </a:prstGeom>
           <a:solidFill>
@@ -6148,8 +6237,8 @@
         </p:nvSpPr>
         <p:spPr>
           <a:xfrm>
-            <a:off x="4151376" y="3493008"/>
-            <a:ext cx="1536192" cy="530352"/>
+            <a:off x="4151376" y="3163824"/>
+            <a:ext cx="1536192" cy="457200"/>
           </a:xfrm>
           <a:prstGeom prst="rect">
             <a:avLst/>
@@ -6176,8 +6265,8 @@
         </p:nvSpPr>
         <p:spPr>
           <a:xfrm>
-            <a:off x="4169664" y="3534156"/>
-            <a:ext cx="1517904" cy="457200"/>
+            <a:off x="4169664" y="3195828"/>
+            <a:ext cx="1517904" cy="402336"/>
           </a:xfrm>
           <a:prstGeom prst="rect">
             <a:avLst/>
@@ -6196,7 +6285,7 @@
               <a:buNone/>
             </a:pPr>
             <a:r>
-              <a:rPr lang="en-US" sz="1150" b="1" dirty="0">
+              <a:rPr lang="en-US" sz="1050" b="1" dirty="0">
                 <a:solidFill>
                   <a:srgbClr val="9E2B25"/>
                 </a:solidFill>
@@ -6206,7 +6295,7 @@
               </a:rPr>
               <a:t>ignore_words</a:t>
             </a:r>
-            <a:endParaRPr lang="en-US" sz="1150" dirty="0"/>
+            <a:endParaRPr lang="en-US" sz="1050" dirty="0"/>
           </a:p>
           <a:p>
             <a:pPr algn="ctr" indent="0" marL="0">
@@ -6216,7 +6305,7 @@
               <a:buNone/>
             </a:pPr>
             <a:r>
-              <a:rPr lang="en-US" sz="1050" dirty="0">
+              <a:rPr lang="en-US" sz="1000" dirty="0">
                 <a:solidFill>
                   <a:srgbClr val="8C8178"/>
                 </a:solidFill>
@@ -6226,13 +6315,349 @@
               </a:rPr>
               <a:t>忽略名单</a:t>
             </a:r>
-            <a:endParaRPr lang="en-US" sz="1150" dirty="0"/>
-          </a:p>
-        </p:txBody>
-      </p:sp>
-      <p:sp>
-        <p:nvSpPr>
-          <p:cNvPr id="36" name="Text 34"/>
+            <a:endParaRPr lang="en-US" sz="1050" dirty="0"/>
+          </a:p>
+        </p:txBody>
+      </p:sp>
+      <p:sp>
+        <p:nvSpPr>
+          <p:cNvPr id="36" name="Shape 34"/>
+          <p:cNvSpPr/>
+          <p:nvPr/>
+        </p:nvSpPr>
+        <p:spPr>
+          <a:xfrm>
+            <a:off x="457200" y="3694176"/>
+            <a:ext cx="1682496" cy="457200"/>
+          </a:xfrm>
+          <a:prstGeom prst="roundRect">
+            <a:avLst>
+              <a:gd name="adj" fmla="val 12000"/>
+            </a:avLst>
+          </a:prstGeom>
+          <a:solidFill>
+            <a:srgbClr val="F8F4EE"/>
+          </a:solidFill>
+          <a:ln/>
+        </p:spPr>
+      </p:sp>
+      <p:sp>
+        <p:nvSpPr>
+          <p:cNvPr id="37" name="Text 35"/>
+          <p:cNvSpPr/>
+          <p:nvPr/>
+        </p:nvSpPr>
+        <p:spPr>
+          <a:xfrm>
+            <a:off x="530352" y="3694176"/>
+            <a:ext cx="1536192" cy="457200"/>
+          </a:xfrm>
+          <a:prstGeom prst="rect">
+            <a:avLst/>
+          </a:prstGeom>
+          <a:noFill/>
+          <a:ln/>
+        </p:spPr>
+        <p:txBody>
+          <a:bodyPr wrap="square" lIns="0" tIns="0" rIns="0" bIns="0" rtlCol="0" anchor="ctr"/>
+          <a:lstStyle/>
+          <a:p>
+            <a:pPr algn="ctr" indent="0" marL="0">
+              <a:buNone/>
+            </a:pPr>
+            <a:endParaRPr lang="en-US" sz="1250" dirty="0"/>
+          </a:p>
+        </p:txBody>
+      </p:sp>
+      <p:sp>
+        <p:nvSpPr>
+          <p:cNvPr id="38" name="Text 36"/>
+          <p:cNvSpPr/>
+          <p:nvPr/>
+        </p:nvSpPr>
+        <p:spPr>
+          <a:xfrm>
+            <a:off x="548640" y="3726180"/>
+            <a:ext cx="1517904" cy="402336"/>
+          </a:xfrm>
+          <a:prstGeom prst="rect">
+            <a:avLst/>
+          </a:prstGeom>
+          <a:noFill/>
+          <a:ln/>
+        </p:spPr>
+        <p:txBody>
+          <a:bodyPr wrap="square" lIns="0" tIns="0" rIns="0" bIns="0" rtlCol="0" anchor="ctr"/>
+          <a:lstStyle/>
+          <a:p>
+            <a:pPr algn="ctr" indent="0" marL="0">
+              <a:lnSpc>
+                <a:spcPct val="100000"/>
+              </a:lnSpc>
+              <a:buNone/>
+            </a:pPr>
+            <a:r>
+              <a:rPr lang="en-US" sz="1050" b="1" dirty="0">
+                <a:solidFill>
+                  <a:srgbClr val="9E2B25"/>
+                </a:solidFill>
+                <a:latin typeface="Microsoft YaHei" pitchFamily="34" charset="0"/>
+                <a:ea typeface="Microsoft YaHei" pitchFamily="34" charset="-122"/>
+                <a:cs typeface="Microsoft YaHei" pitchFamily="34" charset="-120"/>
+              </a:rPr>
+              <a:t>attachments</a:t>
+            </a:r>
+            <a:endParaRPr lang="en-US" sz="1050" dirty="0"/>
+          </a:p>
+          <a:p>
+            <a:pPr algn="ctr" indent="0" marL="0">
+              <a:lnSpc>
+                <a:spcPct val="100000"/>
+              </a:lnSpc>
+              <a:buNone/>
+            </a:pPr>
+            <a:r>
+              <a:rPr lang="en-US" sz="1000" dirty="0">
+                <a:solidFill>
+                  <a:srgbClr val="8C8178"/>
+                </a:solidFill>
+                <a:latin typeface="Microsoft YaHei" pitchFamily="34" charset="0"/>
+                <a:ea typeface="Microsoft YaHei" pitchFamily="34" charset="-122"/>
+                <a:cs typeface="Microsoft YaHei" pitchFamily="34" charset="-120"/>
+              </a:rPr>
+              <a:t>附件</a:t>
+            </a:r>
+            <a:endParaRPr lang="en-US" sz="1050" dirty="0"/>
+          </a:p>
+        </p:txBody>
+      </p:sp>
+      <p:sp>
+        <p:nvSpPr>
+          <p:cNvPr id="39" name="Shape 37"/>
+          <p:cNvSpPr/>
+          <p:nvPr/>
+        </p:nvSpPr>
+        <p:spPr>
+          <a:xfrm>
+            <a:off x="2267712" y="3694176"/>
+            <a:ext cx="1682496" cy="457200"/>
+          </a:xfrm>
+          <a:prstGeom prst="roundRect">
+            <a:avLst>
+              <a:gd name="adj" fmla="val 12000"/>
+            </a:avLst>
+          </a:prstGeom>
+          <a:solidFill>
+            <a:srgbClr val="F8F4EE"/>
+          </a:solidFill>
+          <a:ln/>
+        </p:spPr>
+      </p:sp>
+      <p:sp>
+        <p:nvSpPr>
+          <p:cNvPr id="40" name="Text 38"/>
+          <p:cNvSpPr/>
+          <p:nvPr/>
+        </p:nvSpPr>
+        <p:spPr>
+          <a:xfrm>
+            <a:off x="2340864" y="3694176"/>
+            <a:ext cx="1536192" cy="457200"/>
+          </a:xfrm>
+          <a:prstGeom prst="rect">
+            <a:avLst/>
+          </a:prstGeom>
+          <a:noFill/>
+          <a:ln/>
+        </p:spPr>
+        <p:txBody>
+          <a:bodyPr wrap="square" lIns="0" tIns="0" rIns="0" bIns="0" rtlCol="0" anchor="ctr"/>
+          <a:lstStyle/>
+          <a:p>
+            <a:pPr algn="ctr" indent="0" marL="0">
+              <a:buNone/>
+            </a:pPr>
+            <a:endParaRPr lang="en-US" sz="1250" dirty="0"/>
+          </a:p>
+        </p:txBody>
+      </p:sp>
+      <p:sp>
+        <p:nvSpPr>
+          <p:cNvPr id="41" name="Text 39"/>
+          <p:cNvSpPr/>
+          <p:nvPr/>
+        </p:nvSpPr>
+        <p:spPr>
+          <a:xfrm>
+            <a:off x="2359152" y="3726180"/>
+            <a:ext cx="1517904" cy="402336"/>
+          </a:xfrm>
+          <a:prstGeom prst="rect">
+            <a:avLst/>
+          </a:prstGeom>
+          <a:noFill/>
+          <a:ln/>
+        </p:spPr>
+        <p:txBody>
+          <a:bodyPr wrap="square" lIns="0" tIns="0" rIns="0" bIns="0" rtlCol="0" anchor="ctr"/>
+          <a:lstStyle/>
+          <a:p>
+            <a:pPr algn="ctr" indent="0" marL="0">
+              <a:lnSpc>
+                <a:spcPct val="100000"/>
+              </a:lnSpc>
+              <a:buNone/>
+            </a:pPr>
+            <a:r>
+              <a:rPr lang="en-US" sz="1050" b="1" dirty="0">
+                <a:solidFill>
+                  <a:srgbClr val="9E2B25"/>
+                </a:solidFill>
+                <a:latin typeface="Microsoft YaHei" pitchFamily="34" charset="0"/>
+                <a:ea typeface="Microsoft YaHei" pitchFamily="34" charset="-122"/>
+                <a:cs typeface="Microsoft YaHei" pitchFamily="34" charset="-120"/>
+              </a:rPr>
+              <a:t>dispatch_register</a:t>
+            </a:r>
+            <a:endParaRPr lang="en-US" sz="1050" dirty="0"/>
+          </a:p>
+          <a:p>
+            <a:pPr algn="ctr" indent="0" marL="0">
+              <a:lnSpc>
+                <a:spcPct val="100000"/>
+              </a:lnSpc>
+              <a:buNone/>
+            </a:pPr>
+            <a:r>
+              <a:rPr lang="en-US" sz="1000" dirty="0">
+                <a:solidFill>
+                  <a:srgbClr val="8C8178"/>
+                </a:solidFill>
+                <a:latin typeface="Microsoft YaHei" pitchFamily="34" charset="0"/>
+                <a:ea typeface="Microsoft YaHei" pitchFamily="34" charset="-122"/>
+                <a:cs typeface="Microsoft YaHei" pitchFamily="34" charset="-120"/>
+              </a:rPr>
+              <a:t>发文登记</a:t>
+            </a:r>
+            <a:endParaRPr lang="en-US" sz="1050" dirty="0"/>
+          </a:p>
+        </p:txBody>
+      </p:sp>
+      <p:sp>
+        <p:nvSpPr>
+          <p:cNvPr id="42" name="Shape 40"/>
+          <p:cNvSpPr/>
+          <p:nvPr/>
+        </p:nvSpPr>
+        <p:spPr>
+          <a:xfrm>
+            <a:off x="4078224" y="3694176"/>
+            <a:ext cx="1682496" cy="457200"/>
+          </a:xfrm>
+          <a:prstGeom prst="roundRect">
+            <a:avLst>
+              <a:gd name="adj" fmla="val 12000"/>
+            </a:avLst>
+          </a:prstGeom>
+          <a:solidFill>
+            <a:srgbClr val="F8F4EE"/>
+          </a:solidFill>
+          <a:ln/>
+        </p:spPr>
+      </p:sp>
+      <p:sp>
+        <p:nvSpPr>
+          <p:cNvPr id="43" name="Text 41"/>
+          <p:cNvSpPr/>
+          <p:nvPr/>
+        </p:nvSpPr>
+        <p:spPr>
+          <a:xfrm>
+            <a:off x="4151376" y="3694176"/>
+            <a:ext cx="1536192" cy="457200"/>
+          </a:xfrm>
+          <a:prstGeom prst="rect">
+            <a:avLst/>
+          </a:prstGeom>
+          <a:noFill/>
+          <a:ln/>
+        </p:spPr>
+        <p:txBody>
+          <a:bodyPr wrap="square" lIns="0" tIns="0" rIns="0" bIns="0" rtlCol="0" anchor="ctr"/>
+          <a:lstStyle/>
+          <a:p>
+            <a:pPr algn="ctr" indent="0" marL="0">
+              <a:buNone/>
+            </a:pPr>
+            <a:endParaRPr lang="en-US" sz="1250" dirty="0"/>
+          </a:p>
+        </p:txBody>
+      </p:sp>
+      <p:sp>
+        <p:nvSpPr>
+          <p:cNvPr id="44" name="Text 42"/>
+          <p:cNvSpPr/>
+          <p:nvPr/>
+        </p:nvSpPr>
+        <p:spPr>
+          <a:xfrm>
+            <a:off x="4169664" y="3726180"/>
+            <a:ext cx="1517904" cy="402336"/>
+          </a:xfrm>
+          <a:prstGeom prst="rect">
+            <a:avLst/>
+          </a:prstGeom>
+          <a:noFill/>
+          <a:ln/>
+        </p:spPr>
+        <p:txBody>
+          <a:bodyPr wrap="square" lIns="0" tIns="0" rIns="0" bIns="0" rtlCol="0" anchor="ctr"/>
+          <a:lstStyle/>
+          <a:p>
+            <a:pPr algn="ctr" indent="0" marL="0">
+              <a:lnSpc>
+                <a:spcPct val="100000"/>
+              </a:lnSpc>
+              <a:buNone/>
+            </a:pPr>
+            <a:r>
+              <a:rPr lang="en-US" sz="1050" b="1" dirty="0">
+                <a:solidFill>
+                  <a:srgbClr val="9E2B25"/>
+                </a:solidFill>
+                <a:latin typeface="Microsoft YaHei" pitchFamily="34" charset="0"/>
+                <a:ea typeface="Microsoft YaHei" pitchFamily="34" charset="-122"/>
+                <a:cs typeface="Microsoft YaHei" pitchFamily="34" charset="-120"/>
+              </a:rPr>
+              <a:t>receive_register</a:t>
+            </a:r>
+            <a:endParaRPr lang="en-US" sz="1050" dirty="0"/>
+          </a:p>
+          <a:p>
+            <a:pPr algn="ctr" indent="0" marL="0">
+              <a:lnSpc>
+                <a:spcPct val="100000"/>
+              </a:lnSpc>
+              <a:buNone/>
+            </a:pPr>
+            <a:r>
+              <a:rPr lang="en-US" sz="1000" dirty="0">
+                <a:solidFill>
+                  <a:srgbClr val="8C8178"/>
+                </a:solidFill>
+                <a:latin typeface="Microsoft YaHei" pitchFamily="34" charset="0"/>
+                <a:ea typeface="Microsoft YaHei" pitchFamily="34" charset="-122"/>
+                <a:cs typeface="Microsoft YaHei" pitchFamily="34" charset="-120"/>
+              </a:rPr>
+              <a:t>收文登记</a:t>
+            </a:r>
+            <a:endParaRPr lang="en-US" sz="1050" dirty="0"/>
+          </a:p>
+        </p:txBody>
+      </p:sp>
+      <p:sp>
+        <p:nvSpPr>
+          <p:cNvPr id="45" name="Text 43"/>
           <p:cNvSpPr/>
           <p:nvPr/>
         </p:nvSpPr>
@@ -6291,7 +6716,7 @@
       </p:sp>
       <p:sp>
         <p:nvSpPr>
-          <p:cNvPr id="37" name="Shape 35"/>
+          <p:cNvPr id="46" name="Shape 44"/>
           <p:cNvSpPr/>
           <p:nvPr/>
         </p:nvSpPr>
@@ -6318,7 +6743,7 @@
       </p:sp>
       <p:sp>
         <p:nvSpPr>
-          <p:cNvPr id="38" name="Text 36"/>
+          <p:cNvPr id="47" name="Text 45"/>
           <p:cNvSpPr/>
           <p:nvPr/>
         </p:nvSpPr>
@@ -6357,7 +6782,7 @@
       </p:sp>
       <p:sp>
         <p:nvSpPr>
-          <p:cNvPr id="39" name="Shape 37"/>
+          <p:cNvPr id="48" name="Shape 46"/>
           <p:cNvSpPr/>
           <p:nvPr/>
         </p:nvSpPr>
@@ -6377,7 +6802,7 @@
       </p:sp>
       <p:sp>
         <p:nvSpPr>
-          <p:cNvPr id="40" name="Text 38"/>
+          <p:cNvPr id="49" name="Text 47"/>
           <p:cNvSpPr/>
           <p:nvPr/>
         </p:nvSpPr>
@@ -6436,7 +6861,7 @@
       </p:sp>
       <p:sp>
         <p:nvSpPr>
-          <p:cNvPr id="41" name="Shape 39"/>
+          <p:cNvPr id="50" name="Shape 48"/>
           <p:cNvSpPr/>
           <p:nvPr/>
         </p:nvSpPr>
@@ -6456,7 +6881,7 @@
       </p:sp>
       <p:sp>
         <p:nvSpPr>
-          <p:cNvPr id="42" name="Text 40"/>
+          <p:cNvPr id="51" name="Text 49"/>
           <p:cNvSpPr/>
           <p:nvPr/>
         </p:nvSpPr>
@@ -6515,7 +6940,7 @@
       </p:sp>
       <p:sp>
         <p:nvSpPr>
-          <p:cNvPr id="43" name="Shape 41"/>
+          <p:cNvPr id="52" name="Shape 50"/>
           <p:cNvSpPr/>
           <p:nvPr/>
         </p:nvSpPr>
@@ -6535,7 +6960,7 @@
       </p:sp>
       <p:sp>
         <p:nvSpPr>
-          <p:cNvPr id="44" name="Text 42"/>
+          <p:cNvPr id="53" name="Text 51"/>
           <p:cNvSpPr/>
           <p:nvPr/>
         </p:nvSpPr>
@@ -6594,7 +7019,7 @@
       </p:sp>
       <p:sp>
         <p:nvSpPr>
-          <p:cNvPr id="45" name="Shape 43"/>
+          <p:cNvPr id="54" name="Shape 52"/>
           <p:cNvSpPr/>
           <p:nvPr/>
         </p:nvSpPr>
@@ -6614,7 +7039,7 @@
       </p:sp>
       <p:sp>
         <p:nvSpPr>
-          <p:cNvPr id="46" name="Text 44"/>
+          <p:cNvPr id="55" name="Text 53"/>
           <p:cNvSpPr/>
           <p:nvPr/>
         </p:nvSpPr>
@@ -6673,7 +7098,7 @@
       </p:sp>
       <p:sp>
         <p:nvSpPr>
-          <p:cNvPr id="47" name="Shape 45"/>
+          <p:cNvPr id="56" name="Shape 54"/>
           <p:cNvSpPr/>
           <p:nvPr/>
         </p:nvSpPr>
@@ -6693,7 +7118,7 @@
       </p:sp>
       <p:sp>
         <p:nvSpPr>
-          <p:cNvPr id="48" name="Text 46"/>
+          <p:cNvPr id="57" name="Text 55"/>
           <p:cNvSpPr/>
           <p:nvPr/>
         </p:nvSpPr>
@@ -6752,7 +7177,7 @@
       </p:sp>
       <p:sp>
         <p:nvSpPr>
-          <p:cNvPr id="49" name="Shape 47"/>
+          <p:cNvPr id="58" name="Shape 56"/>
           <p:cNvSpPr/>
           <p:nvPr/>
         </p:nvSpPr>
@@ -6772,7 +7197,7 @@
       </p:sp>
       <p:sp>
         <p:nvSpPr>
-          <p:cNvPr id="50" name="Text 48"/>
+          <p:cNvPr id="59" name="Text 57"/>
           <p:cNvSpPr/>
           <p:nvPr/>
         </p:nvSpPr>
@@ -16840,7 +17265,7 @@
                 <a:ea typeface="Microsoft YaHei" pitchFamily="34" charset="-122"/>
                 <a:cs typeface="Microsoft YaHei" pitchFamily="34" charset="-120"/>
               </a:rPr>
-              <a:t>双平台 · 打包矩阵 · CI/CD · 465 项测试与性能验收</a:t>
+              <a:t>双平台 · 打包矩阵 · CI/CD · 1118 项测试与性能验收</a:t>
             </a:r>
             <a:endParaRPr lang="en-US" sz="1650" dirty="0"/>
           </a:p>
@@ -33193,7 +33618,7 @@
                 <a:ea typeface="Microsoft YaHei" pitchFamily="34" charset="-122"/>
                 <a:cs typeface="Microsoft YaHei" pitchFamily="34" charset="-120"/>
               </a:rPr>
-              <a:t>465 项测试 + 18 步端到端自检</a:t>
+              <a:t>1118 项测试 + 20 步端到端自检</a:t>
             </a:r>
             <a:endParaRPr lang="en-US" sz="1350" dirty="0"/>
           </a:p>
@@ -35347,7 +35772,7 @@
                 <a:ea typeface="Microsoft YaHei" pitchFamily="34" charset="-122"/>
                 <a:cs typeface="Microsoft YaHei" pitchFamily="34" charset="-120"/>
               </a:rPr>
-              <a:t>pytest 全量 465 用例 + 18 步端到端自检</a:t>
+              <a:t>pytest 全量 1118 用例 + 20 步端到端自检</a:t>
             </a:r>
             <a:endParaRPr lang="en-US" sz="1150" dirty="0"/>
           </a:p>
@@ -35966,7 +36391,7 @@
                 <a:ea typeface="Microsoft YaHei" pitchFamily="34" charset="-122"/>
                 <a:cs typeface="Microsoft YaHei" pitchFamily="34" charset="-120"/>
               </a:rPr>
-              <a:t>质量保障：465 项测试，性能指标写进断言</a:t>
+              <a:t>质量保障：1118 项测试，性能指标写进断言</a:t>
             </a:r>
             <a:endParaRPr lang="en-US" sz="2600" dirty="0"/>
           </a:p>
@@ -37004,7 +37429,7 @@
                 <a:ea typeface="Microsoft YaHei" pitchFamily="34" charset="-122"/>
                 <a:cs typeface="Microsoft YaHei" pitchFamily="34" charset="-120"/>
               </a:rPr>
-              <a:t>合计 465 用例 · 32 个测试文件 · 每次提交 ruff E9+F821 静态门槛（拦截“忘导入即崩溃”）</a:t>
+              <a:t>合计 1118 用例 · 61 个测试文件 · 每次提交 ruff E9+F821 静态门槛（拦截“忘导入即崩溃”）</a:t>
             </a:r>
             <a:endParaRPr lang="en-US" sz="1150" dirty="0"/>
           </a:p>
@@ -37690,7 +38115,7 @@
                 <a:ea typeface="Microsoft YaHei" pitchFamily="34" charset="-122"/>
                 <a:cs typeface="Microsoft YaHei" pitchFamily="34" charset="-120"/>
               </a:rPr>
-              <a:t>另有 e2e_check.py：模拟真实数据目录走通 18 大流程，逐项 PASS/FAIL</a:t>
+              <a:t>另有 e2e_check.py：模拟真实数据目录走通 20 大流程，逐项 PASS/FAIL</a:t>
             </a:r>
             <a:endParaRPr lang="en-US" sz="1100" dirty="0"/>
           </a:p>
@@ -38684,6 +39109,909 @@
     <p:bg>
       <p:bgPr>
         <a:solidFill>
+          <a:srgbClr val="FFFFFF"/>
+        </a:solidFill>
+      </p:bgPr>
+    </p:bg>
+    <p:spTree>
+      <p:nvGrpSpPr>
+        <p:cNvPr id="1" name=""/>
+        <p:cNvGrpSpPr/>
+        <p:nvPr/>
+      </p:nvGrpSpPr>
+      <p:grpSpPr>
+        <a:xfrm>
+          <a:off x="0" y="0"/>
+          <a:ext cx="0" cy="0"/>
+          <a:chOff x="0" y="0"/>
+          <a:chExt cx="0" cy="0"/>
+        </a:xfrm>
+      </p:grpSpPr>
+      <p:sp>
+        <p:nvSpPr>
+          <p:cNvPr id="2" name="Shape 0"/>
+          <p:cNvSpPr/>
+          <p:nvPr/>
+        </p:nvSpPr>
+        <p:spPr>
+          <a:xfrm>
+            <a:off x="457200" y="384048"/>
+            <a:ext cx="347472" cy="347472"/>
+          </a:xfrm>
+          <a:prstGeom prst="roundRect">
+            <a:avLst>
+              <a:gd name="adj" fmla="val 10000"/>
+            </a:avLst>
+          </a:prstGeom>
+          <a:solidFill>
+            <a:srgbClr val="9E2B25"/>
+          </a:solidFill>
+          <a:ln/>
+        </p:spPr>
+      </p:sp>
+      <p:sp>
+        <p:nvSpPr>
+          <p:cNvPr id="3" name="Text 1"/>
+          <p:cNvSpPr/>
+          <p:nvPr/>
+        </p:nvSpPr>
+        <p:spPr>
+          <a:xfrm>
+            <a:off x="457200" y="373624"/>
+            <a:ext cx="347472" cy="347472"/>
+          </a:xfrm>
+          <a:prstGeom prst="rect">
+            <a:avLst/>
+          </a:prstGeom>
+          <a:noFill/>
+          <a:ln/>
+        </p:spPr>
+        <p:txBody>
+          <a:bodyPr wrap="square" lIns="0" tIns="0" rIns="0" bIns="0" rtlCol="0" anchor="ctr"/>
+          <a:lstStyle/>
+          <a:p>
+            <a:pPr algn="ctr" indent="0" marL="0">
+              <a:buNone/>
+            </a:pPr>
+            <a:r>
+              <a:rPr lang="en-US" sz="1400" b="1" dirty="0">
+                <a:solidFill>
+                  <a:srgbClr val="FFFFFF"/>
+                </a:solidFill>
+                <a:latin typeface="Microsoft YaHei" pitchFamily="34" charset="0"/>
+                <a:ea typeface="Microsoft YaHei" pitchFamily="34" charset="-122"/>
+                <a:cs typeface="Microsoft YaHei" pitchFamily="34" charset="-120"/>
+              </a:rPr>
+              <a:t>文</a:t>
+            </a:r>
+            <a:endParaRPr lang="en-US" sz="1400" dirty="0"/>
+          </a:p>
+        </p:txBody>
+      </p:sp>
+      <p:sp>
+        <p:nvSpPr>
+          <p:cNvPr id="4" name="Text 2"/>
+          <p:cNvSpPr/>
+          <p:nvPr/>
+        </p:nvSpPr>
+        <p:spPr>
+          <a:xfrm>
+            <a:off x="914400" y="384048"/>
+            <a:ext cx="7315200" cy="347472"/>
+          </a:xfrm>
+          <a:prstGeom prst="rect">
+            <a:avLst/>
+          </a:prstGeom>
+          <a:noFill/>
+          <a:ln/>
+        </p:spPr>
+        <p:txBody>
+          <a:bodyPr wrap="square" lIns="0" tIns="0" rIns="0" bIns="0" rtlCol="0" anchor="ctr"/>
+          <a:lstStyle/>
+          <a:p>
+            <a:pPr indent="0" marL="0">
+              <a:buNone/>
+            </a:pPr>
+            <a:r>
+              <a:rPr lang="en-US" sz="1200" b="1" spc="200" kern="0" dirty="0">
+                <a:solidFill>
+                  <a:srgbClr val="9E2B25"/>
+                </a:solidFill>
+                <a:latin typeface="Microsoft YaHei" pitchFamily="34" charset="0"/>
+                <a:ea typeface="Microsoft YaHei" pitchFamily="34" charset="-122"/>
+                <a:cs typeface="Microsoft YaHei" pitchFamily="34" charset="-120"/>
+              </a:rPr>
+              <a:t>07 交付、质量与生态</a:t>
+            </a:r>
+            <a:endParaRPr lang="en-US" sz="1200" dirty="0"/>
+          </a:p>
+        </p:txBody>
+      </p:sp>
+      <p:sp>
+        <p:nvSpPr>
+          <p:cNvPr id="5" name="Text 3"/>
+          <p:cNvSpPr/>
+          <p:nvPr/>
+        </p:nvSpPr>
+        <p:spPr>
+          <a:xfrm>
+            <a:off x="457200" y="841248"/>
+            <a:ext cx="11274552" cy="566928"/>
+          </a:xfrm>
+          <a:prstGeom prst="rect">
+            <a:avLst/>
+          </a:prstGeom>
+          <a:noFill/>
+          <a:ln/>
+        </p:spPr>
+        <p:txBody>
+          <a:bodyPr wrap="square" lIns="0" tIns="0" rIns="0" bIns="0" rtlCol="0" anchor="ctr"/>
+          <a:lstStyle/>
+          <a:p>
+            <a:pPr indent="0" marL="0">
+              <a:buNone/>
+            </a:pPr>
+            <a:r>
+              <a:rPr lang="en-US" sz="2600" b="1" dirty="0">
+                <a:solidFill>
+                  <a:srgbClr val="26201C"/>
+                </a:solidFill>
+                <a:latin typeface="Microsoft YaHei" pitchFamily="34" charset="0"/>
+                <a:ea typeface="Microsoft YaHei" pitchFamily="34" charset="-122"/>
+                <a:cs typeface="Microsoft YaHei" pitchFamily="34" charset="-120"/>
+              </a:rPr>
+              <a:t>v1.6.0 新增：把公文管理的另一半补齐</a:t>
+            </a:r>
+            <a:endParaRPr lang="en-US" sz="2600" dirty="0"/>
+          </a:p>
+        </p:txBody>
+      </p:sp>
+      <p:sp>
+        <p:nvSpPr>
+          <p:cNvPr id="6" name="Text 4"/>
+          <p:cNvSpPr/>
+          <p:nvPr/>
+        </p:nvSpPr>
+        <p:spPr>
+          <a:xfrm>
+            <a:off x="11137392" y="6382512"/>
+            <a:ext cx="594360" cy="292608"/>
+          </a:xfrm>
+          <a:prstGeom prst="rect">
+            <a:avLst/>
+          </a:prstGeom>
+          <a:noFill/>
+          <a:ln/>
+        </p:spPr>
+        <p:txBody>
+          <a:bodyPr wrap="square" lIns="0" tIns="0" rIns="0" bIns="0" rtlCol="0" anchor="ctr"/>
+          <a:lstStyle/>
+          <a:p>
+            <a:pPr algn="r" indent="0" marL="0">
+              <a:buNone/>
+            </a:pPr>
+            <a:r>
+              <a:rPr lang="en-US" sz="1200" dirty="0">
+                <a:solidFill>
+                  <a:srgbClr val="8C8178"/>
+                </a:solidFill>
+                <a:latin typeface="Microsoft YaHei" pitchFamily="34" charset="0"/>
+                <a:ea typeface="Microsoft YaHei" pitchFamily="34" charset="-122"/>
+                <a:cs typeface="Microsoft YaHei" pitchFamily="34" charset="-120"/>
+              </a:rPr>
+              <a:t>40</a:t>
+            </a:r>
+            <a:endParaRPr lang="en-US" sz="1200" dirty="0"/>
+          </a:p>
+        </p:txBody>
+      </p:sp>
+      <p:sp>
+        <p:nvSpPr>
+          <p:cNvPr id="7" name="Text 5"/>
+          <p:cNvSpPr/>
+          <p:nvPr/>
+        </p:nvSpPr>
+        <p:spPr>
+          <a:xfrm>
+            <a:off x="457200" y="6382512"/>
+            <a:ext cx="2926080" cy="292608"/>
+          </a:xfrm>
+          <a:prstGeom prst="rect">
+            <a:avLst/>
+          </a:prstGeom>
+          <a:noFill/>
+          <a:ln/>
+        </p:spPr>
+        <p:txBody>
+          <a:bodyPr wrap="square" lIns="0" tIns="0" rIns="0" bIns="0" rtlCol="0" anchor="ctr"/>
+          <a:lstStyle/>
+          <a:p>
+            <a:pPr indent="0" marL="0">
+              <a:buNone/>
+            </a:pPr>
+            <a:r>
+              <a:rPr lang="en-US" sz="1200" dirty="0">
+                <a:solidFill>
+                  <a:srgbClr val="8C8178"/>
+                </a:solidFill>
+                <a:latin typeface="Microsoft YaHei" pitchFamily="34" charset="0"/>
+                <a:ea typeface="Microsoft YaHei" pitchFamily="34" charset="-122"/>
+                <a:cs typeface="Microsoft YaHei" pitchFamily="34" charset="-120"/>
+              </a:rPr>
+              <a:t>公文汇编助手 · 系统介绍</a:t>
+            </a:r>
+            <a:endParaRPr lang="en-US" sz="1200" dirty="0"/>
+          </a:p>
+        </p:txBody>
+      </p:sp>
+      <p:sp>
+        <p:nvSpPr>
+          <p:cNvPr id="8" name="Shape 6"/>
+          <p:cNvSpPr/>
+          <p:nvPr/>
+        </p:nvSpPr>
+        <p:spPr>
+          <a:xfrm>
+            <a:off x="457200" y="1691640"/>
+            <a:ext cx="5394960" cy="1444752"/>
+          </a:xfrm>
+          <a:prstGeom prst="roundRect">
+            <a:avLst>
+              <a:gd name="adj" fmla="val 5063"/>
+            </a:avLst>
+          </a:prstGeom>
+          <a:solidFill>
+            <a:srgbClr val="F8F4EE"/>
+          </a:solidFill>
+          <a:ln w="12700">
+            <a:solidFill>
+              <a:srgbClr val="E7DFD5"/>
+            </a:solidFill>
+            <a:prstDash val="solid"/>
+          </a:ln>
+        </p:spPr>
+      </p:sp>
+      <p:sp>
+        <p:nvSpPr>
+          <p:cNvPr id="9" name="Shape 7"/>
+          <p:cNvSpPr/>
+          <p:nvPr/>
+        </p:nvSpPr>
+        <p:spPr>
+          <a:xfrm>
+            <a:off x="457200" y="1691640"/>
+            <a:ext cx="82296" cy="1444752"/>
+          </a:xfrm>
+          <a:prstGeom prst="rect">
+            <a:avLst/>
+          </a:prstGeom>
+          <a:solidFill>
+            <a:srgbClr val="9E2B25"/>
+          </a:solidFill>
+          <a:ln/>
+        </p:spPr>
+      </p:sp>
+      <p:sp>
+        <p:nvSpPr>
+          <p:cNvPr id="10" name="Text 8"/>
+          <p:cNvSpPr/>
+          <p:nvPr/>
+        </p:nvSpPr>
+        <p:spPr>
+          <a:xfrm>
+            <a:off x="713232" y="1819656"/>
+            <a:ext cx="4919472" cy="1188720"/>
+          </a:xfrm>
+          <a:prstGeom prst="rect">
+            <a:avLst/>
+          </a:prstGeom>
+          <a:noFill/>
+          <a:ln/>
+        </p:spPr>
+        <p:txBody>
+          <a:bodyPr wrap="square" lIns="0" tIns="0" rIns="0" bIns="0" rtlCol="0" anchor="ctr"/>
+          <a:lstStyle/>
+          <a:p>
+            <a:pPr indent="0" marL="0">
+              <a:lnSpc>
+                <a:spcPct val="120000"/>
+              </a:lnSpc>
+              <a:buNone/>
+            </a:pPr>
+            <a:r>
+              <a:rPr lang="en-US" sz="1450" b="1" dirty="0">
+                <a:solidFill>
+                  <a:srgbClr val="9E2B25"/>
+                </a:solidFill>
+                <a:latin typeface="Microsoft YaHei" pitchFamily="34" charset="0"/>
+                <a:ea typeface="Microsoft YaHei" pitchFamily="34" charset="-122"/>
+                <a:cs typeface="Microsoft YaHei" pitchFamily="34" charset="-120"/>
+              </a:rPr>
+              <a:t>收文登记台账</a:t>
+            </a:r>
+            <a:endParaRPr lang="en-US" sz="1450" dirty="0"/>
+          </a:p>
+          <a:p>
+            <a:pPr indent="0" marL="0">
+              <a:lnSpc>
+                <a:spcPct val="120000"/>
+              </a:lnSpc>
+              <a:buNone/>
+            </a:pPr>
+            <a:r>
+              <a:rPr lang="en-US" sz="1150" dirty="0">
+                <a:solidFill>
+                  <a:srgbClr val="26201C"/>
+                </a:solidFill>
+                <a:latin typeface="Microsoft YaHei" pitchFamily="34" charset="0"/>
+                <a:ea typeface="Microsoft YaHei" pitchFamily="34" charset="-122"/>
+                <a:cs typeface="Microsoft YaHei" pitchFamily="34" charset="-120"/>
+              </a:rPr>
+              <a:t>签收 → 拟办 → 批办 → 承办 → 办结 → 归档 全流程登记：来文机关、来文字号、拟办意见、领导批示、承办部门与办理时限全要素；可按机关/文种/状态/年度组合筛选并统计</a:t>
+            </a:r>
+            <a:endParaRPr lang="en-US" sz="1450" dirty="0"/>
+          </a:p>
+        </p:txBody>
+      </p:sp>
+      <p:sp>
+        <p:nvSpPr>
+          <p:cNvPr id="11" name="Shape 9"/>
+          <p:cNvSpPr/>
+          <p:nvPr/>
+        </p:nvSpPr>
+        <p:spPr>
+          <a:xfrm>
+            <a:off x="6327648" y="1691640"/>
+            <a:ext cx="5394960" cy="1444752"/>
+          </a:xfrm>
+          <a:prstGeom prst="roundRect">
+            <a:avLst>
+              <a:gd name="adj" fmla="val 5063"/>
+            </a:avLst>
+          </a:prstGeom>
+          <a:solidFill>
+            <a:srgbClr val="F8F4EE"/>
+          </a:solidFill>
+          <a:ln w="12700">
+            <a:solidFill>
+              <a:srgbClr val="E7DFD5"/>
+            </a:solidFill>
+            <a:prstDash val="solid"/>
+          </a:ln>
+        </p:spPr>
+      </p:sp>
+      <p:sp>
+        <p:nvSpPr>
+          <p:cNvPr id="12" name="Shape 10"/>
+          <p:cNvSpPr/>
+          <p:nvPr/>
+        </p:nvSpPr>
+        <p:spPr>
+          <a:xfrm>
+            <a:off x="6327648" y="1691640"/>
+            <a:ext cx="82296" cy="1444752"/>
+          </a:xfrm>
+          <a:prstGeom prst="rect">
+            <a:avLst/>
+          </a:prstGeom>
+          <a:solidFill>
+            <a:srgbClr val="9E2B25"/>
+          </a:solidFill>
+          <a:ln/>
+        </p:spPr>
+      </p:sp>
+      <p:sp>
+        <p:nvSpPr>
+          <p:cNvPr id="13" name="Text 11"/>
+          <p:cNvSpPr/>
+          <p:nvPr/>
+        </p:nvSpPr>
+        <p:spPr>
+          <a:xfrm>
+            <a:off x="6583680" y="1819656"/>
+            <a:ext cx="4919472" cy="1188720"/>
+          </a:xfrm>
+          <a:prstGeom prst="rect">
+            <a:avLst/>
+          </a:prstGeom>
+          <a:noFill/>
+          <a:ln/>
+        </p:spPr>
+        <p:txBody>
+          <a:bodyPr wrap="square" lIns="0" tIns="0" rIns="0" bIns="0" rtlCol="0" anchor="ctr"/>
+          <a:lstStyle/>
+          <a:p>
+            <a:pPr indent="0" marL="0">
+              <a:lnSpc>
+                <a:spcPct val="120000"/>
+              </a:lnSpc>
+              <a:buNone/>
+            </a:pPr>
+            <a:r>
+              <a:rPr lang="en-US" sz="1450" b="1" dirty="0">
+                <a:solidFill>
+                  <a:srgbClr val="9E2B25"/>
+                </a:solidFill>
+                <a:latin typeface="Microsoft YaHei" pitchFamily="34" charset="0"/>
+                <a:ea typeface="Microsoft YaHei" pitchFamily="34" charset="-122"/>
+                <a:cs typeface="Microsoft YaHei" pitchFamily="34" charset="-120"/>
+              </a:rPr>
+              <a:t>办理时限督办</a:t>
+            </a:r>
+            <a:endParaRPr lang="en-US" sz="1450" dirty="0"/>
+          </a:p>
+          <a:p>
+            <a:pPr indent="0" marL="0">
+              <a:lnSpc>
+                <a:spcPct val="120000"/>
+              </a:lnSpc>
+              <a:buNone/>
+            </a:pPr>
+            <a:r>
+              <a:rPr lang="en-US" sz="1150" dirty="0">
+                <a:solidFill>
+                  <a:srgbClr val="26201C"/>
+                </a:solidFill>
+                <a:latin typeface="Microsoft YaHei" pitchFamily="34" charset="0"/>
+                <a:ea typeface="Microsoft YaHei" pitchFamily="34" charset="-122"/>
+                <a:cs typeface="Microsoft YaHei" pitchFamily="34" charset="-120"/>
+              </a:rPr>
+              <a:t>填了“应办结日期”的件自动纳入督办：启动时扫描已逾期与 2 日内到期的，状态栏常显角标、点开即见清单。刻意不做后台常驻轮询 —— 那会伤续航，而公文以“天”为粒度</a:t>
+            </a:r>
+            <a:endParaRPr lang="en-US" sz="1450" dirty="0"/>
+          </a:p>
+        </p:txBody>
+      </p:sp>
+      <p:sp>
+        <p:nvSpPr>
+          <p:cNvPr id="14" name="Shape 12"/>
+          <p:cNvSpPr/>
+          <p:nvPr/>
+        </p:nvSpPr>
+        <p:spPr>
+          <a:xfrm>
+            <a:off x="457200" y="3273552"/>
+            <a:ext cx="5394960" cy="1444752"/>
+          </a:xfrm>
+          <a:prstGeom prst="roundRect">
+            <a:avLst>
+              <a:gd name="adj" fmla="val 5063"/>
+            </a:avLst>
+          </a:prstGeom>
+          <a:solidFill>
+            <a:srgbClr val="F8F4EE"/>
+          </a:solidFill>
+          <a:ln w="12700">
+            <a:solidFill>
+              <a:srgbClr val="E7DFD5"/>
+            </a:solidFill>
+            <a:prstDash val="solid"/>
+          </a:ln>
+        </p:spPr>
+      </p:sp>
+      <p:sp>
+        <p:nvSpPr>
+          <p:cNvPr id="15" name="Shape 13"/>
+          <p:cNvSpPr/>
+          <p:nvPr/>
+        </p:nvSpPr>
+        <p:spPr>
+          <a:xfrm>
+            <a:off x="457200" y="3273552"/>
+            <a:ext cx="82296" cy="1444752"/>
+          </a:xfrm>
+          <a:prstGeom prst="rect">
+            <a:avLst/>
+          </a:prstGeom>
+          <a:solidFill>
+            <a:srgbClr val="9E2B25"/>
+          </a:solidFill>
+          <a:ln/>
+        </p:spPr>
+      </p:sp>
+      <p:sp>
+        <p:nvSpPr>
+          <p:cNvPr id="16" name="Text 14"/>
+          <p:cNvSpPr/>
+          <p:nvPr/>
+        </p:nvSpPr>
+        <p:spPr>
+          <a:xfrm>
+            <a:off x="713232" y="3401568"/>
+            <a:ext cx="4919472" cy="1188720"/>
+          </a:xfrm>
+          <a:prstGeom prst="rect">
+            <a:avLst/>
+          </a:prstGeom>
+          <a:noFill/>
+          <a:ln/>
+        </p:spPr>
+        <p:txBody>
+          <a:bodyPr wrap="square" lIns="0" tIns="0" rIns="0" bIns="0" rtlCol="0" anchor="ctr"/>
+          <a:lstStyle/>
+          <a:p>
+            <a:pPr indent="0" marL="0">
+              <a:lnSpc>
+                <a:spcPct val="120000"/>
+              </a:lnSpc>
+              <a:buNone/>
+            </a:pPr>
+            <a:r>
+              <a:rPr lang="en-US" sz="1450" b="1" dirty="0">
+                <a:solidFill>
+                  <a:srgbClr val="9E2B25"/>
+                </a:solidFill>
+                <a:latin typeface="Microsoft YaHei" pitchFamily="34" charset="0"/>
+                <a:ea typeface="Microsoft YaHei" pitchFamily="34" charset="-122"/>
+                <a:cs typeface="Microsoft YaHei" pitchFamily="34" charset="-120"/>
+              </a:rPr>
+              <a:t>归档与移交清单</a:t>
+            </a:r>
+            <a:endParaRPr lang="en-US" sz="1450" dirty="0"/>
+          </a:p>
+          <a:p>
+            <a:pPr indent="0" marL="0">
+              <a:lnSpc>
+                <a:spcPct val="120000"/>
+              </a:lnSpc>
+              <a:buNone/>
+            </a:pPr>
+            <a:r>
+              <a:rPr lang="en-US" sz="1150" dirty="0">
+                <a:solidFill>
+                  <a:srgbClr val="26201C"/>
+                </a:solidFill>
+                <a:latin typeface="Microsoft YaHei" pitchFamily="34" charset="0"/>
+                <a:ea typeface="Microsoft YaHei" pitchFamily="34" charset="-122"/>
+                <a:cs typeface="Microsoft YaHei" pitchFamily="34" charset="-120"/>
+              </a:rPr>
+              <a:t>已办结收文批量编档号、标注保管期限（永久/30年/10年），并生成可签字盖章随卷的《归档移交清单》。在办件不允许归档 —— 那会造成“卷内缺件”，比不归档更难收拾</a:t>
+            </a:r>
+            <a:endParaRPr lang="en-US" sz="1450" dirty="0"/>
+          </a:p>
+        </p:txBody>
+      </p:sp>
+      <p:sp>
+        <p:nvSpPr>
+          <p:cNvPr id="17" name="Shape 15"/>
+          <p:cNvSpPr/>
+          <p:nvPr/>
+        </p:nvSpPr>
+        <p:spPr>
+          <a:xfrm>
+            <a:off x="6327648" y="3273552"/>
+            <a:ext cx="5394960" cy="1444752"/>
+          </a:xfrm>
+          <a:prstGeom prst="roundRect">
+            <a:avLst>
+              <a:gd name="adj" fmla="val 5063"/>
+            </a:avLst>
+          </a:prstGeom>
+          <a:solidFill>
+            <a:srgbClr val="F8F4EE"/>
+          </a:solidFill>
+          <a:ln w="12700">
+            <a:solidFill>
+              <a:srgbClr val="E7DFD5"/>
+            </a:solidFill>
+            <a:prstDash val="solid"/>
+          </a:ln>
+        </p:spPr>
+      </p:sp>
+      <p:sp>
+        <p:nvSpPr>
+          <p:cNvPr id="18" name="Shape 16"/>
+          <p:cNvSpPr/>
+          <p:nvPr/>
+        </p:nvSpPr>
+        <p:spPr>
+          <a:xfrm>
+            <a:off x="6327648" y="3273552"/>
+            <a:ext cx="82296" cy="1444752"/>
+          </a:xfrm>
+          <a:prstGeom prst="rect">
+            <a:avLst/>
+          </a:prstGeom>
+          <a:solidFill>
+            <a:srgbClr val="9E2B25"/>
+          </a:solidFill>
+          <a:ln/>
+        </p:spPr>
+      </p:sp>
+      <p:sp>
+        <p:nvSpPr>
+          <p:cNvPr id="19" name="Text 17"/>
+          <p:cNvSpPr/>
+          <p:nvPr/>
+        </p:nvSpPr>
+        <p:spPr>
+          <a:xfrm>
+            <a:off x="6583680" y="3401568"/>
+            <a:ext cx="4919472" cy="1188720"/>
+          </a:xfrm>
+          <a:prstGeom prst="rect">
+            <a:avLst/>
+          </a:prstGeom>
+          <a:noFill/>
+          <a:ln/>
+        </p:spPr>
+        <p:txBody>
+          <a:bodyPr wrap="square" lIns="0" tIns="0" rIns="0" bIns="0" rtlCol="0" anchor="ctr"/>
+          <a:lstStyle/>
+          <a:p>
+            <a:pPr indent="0" marL="0">
+              <a:lnSpc>
+                <a:spcPct val="120000"/>
+              </a:lnSpc>
+              <a:buNone/>
+            </a:pPr>
+            <a:r>
+              <a:rPr lang="en-US" sz="1450" b="1" dirty="0">
+                <a:solidFill>
+                  <a:srgbClr val="9E2B25"/>
+                </a:solidFill>
+                <a:latin typeface="Microsoft YaHei" pitchFamily="34" charset="0"/>
+                <a:ea typeface="Microsoft YaHei" pitchFamily="34" charset="-122"/>
+                <a:cs typeface="Microsoft YaHei" pitchFamily="34" charset="-120"/>
+              </a:rPr>
+              <a:t>Excel 导出（零新依赖）</a:t>
+            </a:r>
+            <a:endParaRPr lang="en-US" sz="1450" dirty="0"/>
+          </a:p>
+          <a:p>
+            <a:pPr indent="0" marL="0">
+              <a:lnSpc>
+                <a:spcPct val="120000"/>
+              </a:lnSpc>
+              <a:buNone/>
+            </a:pPr>
+            <a:r>
+              <a:rPr lang="en-US" sz="1150" dirty="0">
+                <a:solidFill>
+                  <a:srgbClr val="26201C"/>
+                </a:solidFill>
+                <a:latin typeface="Microsoft YaHei" pitchFamily="34" charset="0"/>
+                <a:ea typeface="Microsoft YaHei" pitchFamily="34" charset="-122"/>
+                <a:cs typeface="Microsoft YaHei" pitchFamily="34" charset="-120"/>
+              </a:rPr>
+              <a:t>台账、统计报表、体检整改清单均可导出 xlsx。xlsx 本质是 ZIP + XML，用标准库手写即可完成，不为此引入任何第三方依赖，安装包体积零增长</a:t>
+            </a:r>
+            <a:endParaRPr lang="en-US" sz="1450" dirty="0"/>
+          </a:p>
+        </p:txBody>
+      </p:sp>
+      <p:sp>
+        <p:nvSpPr>
+          <p:cNvPr id="20" name="Shape 18"/>
+          <p:cNvSpPr/>
+          <p:nvPr/>
+        </p:nvSpPr>
+        <p:spPr>
+          <a:xfrm>
+            <a:off x="457200" y="4855464"/>
+            <a:ext cx="5394960" cy="1444752"/>
+          </a:xfrm>
+          <a:prstGeom prst="roundRect">
+            <a:avLst>
+              <a:gd name="adj" fmla="val 5063"/>
+            </a:avLst>
+          </a:prstGeom>
+          <a:solidFill>
+            <a:srgbClr val="F8F4EE"/>
+          </a:solidFill>
+          <a:ln w="12700">
+            <a:solidFill>
+              <a:srgbClr val="E7DFD5"/>
+            </a:solidFill>
+            <a:prstDash val="solid"/>
+          </a:ln>
+        </p:spPr>
+      </p:sp>
+      <p:sp>
+        <p:nvSpPr>
+          <p:cNvPr id="21" name="Shape 19"/>
+          <p:cNvSpPr/>
+          <p:nvPr/>
+        </p:nvSpPr>
+        <p:spPr>
+          <a:xfrm>
+            <a:off x="457200" y="4855464"/>
+            <a:ext cx="82296" cy="1444752"/>
+          </a:xfrm>
+          <a:prstGeom prst="rect">
+            <a:avLst/>
+          </a:prstGeom>
+          <a:solidFill>
+            <a:srgbClr val="9E2B25"/>
+          </a:solidFill>
+          <a:ln/>
+        </p:spPr>
+      </p:sp>
+      <p:sp>
+        <p:nvSpPr>
+          <p:cNvPr id="22" name="Text 20"/>
+          <p:cNvSpPr/>
+          <p:nvPr/>
+        </p:nvSpPr>
+        <p:spPr>
+          <a:xfrm>
+            <a:off x="713232" y="4983480"/>
+            <a:ext cx="4919472" cy="1188720"/>
+          </a:xfrm>
+          <a:prstGeom prst="rect">
+            <a:avLst/>
+          </a:prstGeom>
+          <a:noFill/>
+          <a:ln/>
+        </p:spPr>
+        <p:txBody>
+          <a:bodyPr wrap="square" lIns="0" tIns="0" rIns="0" bIns="0" rtlCol="0" anchor="ctr"/>
+          <a:lstStyle/>
+          <a:p>
+            <a:pPr indent="0" marL="0">
+              <a:lnSpc>
+                <a:spcPct val="120000"/>
+              </a:lnSpc>
+              <a:buNone/>
+            </a:pPr>
+            <a:r>
+              <a:rPr lang="en-US" sz="1450" b="1" dirty="0">
+                <a:solidFill>
+                  <a:srgbClr val="9E2B25"/>
+                </a:solidFill>
+                <a:latin typeface="Microsoft YaHei" pitchFamily="34" charset="0"/>
+                <a:ea typeface="Microsoft YaHei" pitchFamily="34" charset="-122"/>
+                <a:cs typeface="Microsoft YaHei" pitchFamily="34" charset="-120"/>
+              </a:rPr>
+              <a:t>运维可诊断</a:t>
+            </a:r>
+            <a:endParaRPr lang="en-US" sz="1450" dirty="0"/>
+          </a:p>
+          <a:p>
+            <a:pPr indent="0" marL="0">
+              <a:lnSpc>
+                <a:spcPct val="120000"/>
+              </a:lnSpc>
+              <a:buNone/>
+            </a:pPr>
+            <a:r>
+              <a:rPr lang="en-US" sz="1150" dirty="0">
+                <a:solidFill>
+                  <a:srgbClr val="26201C"/>
+                </a:solidFill>
+                <a:latin typeface="Microsoft YaHei" pitchFamily="34" charset="0"/>
+                <a:ea typeface="Microsoft YaHei" pitchFamily="34" charset="-122"/>
+                <a:cs typeface="Microsoft YaHei" pitchFamily="34" charset="-120"/>
+              </a:rPr>
+              <a:t>运行期诊断日志（有界轮转、队列异步、不记正文）+ 启动库完整性自检（正常时完全静默）+ 一键碎片整理 + 诊断包（只含版本与计数，绝不含公文正文）</a:t>
+            </a:r>
+            <a:endParaRPr lang="en-US" sz="1450" dirty="0"/>
+          </a:p>
+        </p:txBody>
+      </p:sp>
+      <p:sp>
+        <p:nvSpPr>
+          <p:cNvPr id="23" name="Shape 21"/>
+          <p:cNvSpPr/>
+          <p:nvPr/>
+        </p:nvSpPr>
+        <p:spPr>
+          <a:xfrm>
+            <a:off x="6327648" y="4855464"/>
+            <a:ext cx="5394960" cy="1444752"/>
+          </a:xfrm>
+          <a:prstGeom prst="roundRect">
+            <a:avLst>
+              <a:gd name="adj" fmla="val 5063"/>
+            </a:avLst>
+          </a:prstGeom>
+          <a:solidFill>
+            <a:srgbClr val="F8F4EE"/>
+          </a:solidFill>
+          <a:ln w="12700">
+            <a:solidFill>
+              <a:srgbClr val="E7DFD5"/>
+            </a:solidFill>
+            <a:prstDash val="solid"/>
+          </a:ln>
+        </p:spPr>
+      </p:sp>
+      <p:sp>
+        <p:nvSpPr>
+          <p:cNvPr id="24" name="Shape 22"/>
+          <p:cNvSpPr/>
+          <p:nvPr/>
+        </p:nvSpPr>
+        <p:spPr>
+          <a:xfrm>
+            <a:off x="6327648" y="4855464"/>
+            <a:ext cx="82296" cy="1444752"/>
+          </a:xfrm>
+          <a:prstGeom prst="rect">
+            <a:avLst/>
+          </a:prstGeom>
+          <a:solidFill>
+            <a:srgbClr val="9E2B25"/>
+          </a:solidFill>
+          <a:ln/>
+        </p:spPr>
+      </p:sp>
+      <p:sp>
+        <p:nvSpPr>
+          <p:cNvPr id="25" name="Text 23"/>
+          <p:cNvSpPr/>
+          <p:nvPr/>
+        </p:nvSpPr>
+        <p:spPr>
+          <a:xfrm>
+            <a:off x="6583680" y="4983480"/>
+            <a:ext cx="4919472" cy="1188720"/>
+          </a:xfrm>
+          <a:prstGeom prst="rect">
+            <a:avLst/>
+          </a:prstGeom>
+          <a:noFill/>
+          <a:ln/>
+        </p:spPr>
+        <p:txBody>
+          <a:bodyPr wrap="square" lIns="0" tIns="0" rIns="0" bIns="0" rtlCol="0" anchor="ctr"/>
+          <a:lstStyle/>
+          <a:p>
+            <a:pPr indent="0" marL="0">
+              <a:lnSpc>
+                <a:spcPct val="120000"/>
+              </a:lnSpc>
+              <a:buNone/>
+            </a:pPr>
+            <a:r>
+              <a:rPr lang="en-US" sz="1450" b="1" dirty="0">
+                <a:solidFill>
+                  <a:srgbClr val="9E2B25"/>
+                </a:solidFill>
+                <a:latin typeface="Microsoft YaHei" pitchFamily="34" charset="0"/>
+                <a:ea typeface="Microsoft YaHei" pitchFamily="34" charset="-122"/>
+                <a:cs typeface="Microsoft YaHei" pitchFamily="34" charset="-120"/>
+              </a:rPr>
+              <a:t>体检与移交增强</a:t>
+            </a:r>
+            <a:endParaRPr lang="en-US" sz="1450" dirty="0"/>
+          </a:p>
+          <a:p>
+            <a:pPr indent="0" marL="0">
+              <a:lnSpc>
+                <a:spcPct val="120000"/>
+              </a:lnSpc>
+              <a:buNone/>
+            </a:pPr>
+            <a:r>
+              <a:rPr lang="en-US" sz="1150" dirty="0">
+                <a:solidFill>
+                  <a:srgbClr val="26201C"/>
+                </a:solidFill>
+                <a:latin typeface="Microsoft YaHei" pitchFamily="34" charset="0"/>
+                <a:ea typeface="Microsoft YaHei" pitchFamily="34" charset="-122"/>
+                <a:cs typeface="Microsoft YaHei" pitchFamily="34" charset="-120"/>
+              </a:rPr>
+              <a:t>格式体检新增引文规范、数字用法、文内一致性、公文文风四类；汇编可附材料来源清单；资料可按分类/时段导出为移交包（含每份文档的 sha256 校验清单）</a:t>
+            </a:r>
+            <a:endParaRPr lang="en-US" sz="1450" dirty="0"/>
+          </a:p>
+        </p:txBody>
+      </p:sp>
+    </p:spTree>
+  </p:cSld>
+  <p:clrMapOvr>
+    <a:masterClrMapping/>
+  </p:clrMapOvr>
+</p:sld>
+</file>
+
+<file path=ppt/slides/slide41.xml><?xml version="1.0" encoding="utf-8"?>
+<p:sld xmlns:a="http://schemas.openxmlformats.org/drawingml/2006/main" xmlns:r="http://schemas.openxmlformats.org/officeDocument/2006/relationships" xmlns:p="http://schemas.openxmlformats.org/presentationml/2006/main">
+  <p:cSld name="Slide 41">
+    <p:bg>
+      <p:bgPr>
+        <a:solidFill>
           <a:srgbClr val="1F1917"/>
         </a:solidFill>
       </p:bgPr>
@@ -38796,7 +40124,7 @@
                 <a:ea typeface="Microsoft YaHei" pitchFamily="34" charset="-122"/>
                 <a:cs typeface="Microsoft YaHei" pitchFamily="34" charset="-120"/>
               </a:rPr>
-              <a:t>公文汇编助手 · 单机离线版 v1.5.2</a:t>
+              <a:t>公文汇编助手 · 单机离线版 v1.6.0</a:t>
             </a:r>
             <a:endParaRPr lang="en-US" sz="1200" dirty="0"/>
           </a:p>
@@ -39141,7 +40469,7 @@
                 <a:ea typeface="Microsoft YaHei" pitchFamily="34" charset="-122"/>
                 <a:cs typeface="Microsoft YaHei" pitchFamily="34" charset="-120"/>
               </a:rPr>
-              <a:t>18 步端到端自检，部署后一键验货</a:t>
+              <a:t>20 步端到端自检，部署后一键验货</a:t>
             </a:r>
             <a:endParaRPr lang="en-US" sz="1400" dirty="0"/>
           </a:p>
@@ -40103,7 +41431,7 @@
                 <a:ea typeface="Microsoft YaHei" pitchFamily="34" charset="-122"/>
                 <a:cs typeface="Microsoft YaHei" pitchFamily="34" charset="-120"/>
               </a:rPr>
-              <a:t>87</a:t>
+              <a:t>1118</a:t>
             </a:r>
             <a:endParaRPr lang="en-US" sz="4400" dirty="0"/>
           </a:p>
@@ -40775,7 +42103,7 @@
                 <a:ea typeface="Microsoft YaHei" pitchFamily="34" charset="-122"/>
                 <a:cs typeface="Microsoft YaHei" pitchFamily="34" charset="-120"/>
               </a:rPr>
-              <a:t>功能全景：六大能力域，24 个功能模块</a:t>
+              <a:t>功能全景：六大能力域，32 个功能模块</a:t>
             </a:r>
             <a:endParaRPr lang="en-US" sz="2600" dirty="0"/>
           </a:p>
@@ -41180,7 +42508,7 @@
                 <a:ea typeface="Microsoft YaHei" pitchFamily="34" charset="-122"/>
                 <a:cs typeface="Microsoft YaHei" pitchFamily="34" charset="-120"/>
               </a:rPr>
-              <a:t>文档对比 · 相似查重</a:t>
+              <a:t>引文/数字/一致性/文风 · 对比 · 查重</a:t>
             </a:r>
             <a:endParaRPr lang="en-US" sz="1500" dirty="0"/>
           </a:p>
@@ -41289,7 +42617,7 @@
                 <a:ea typeface="Microsoft YaHei" pitchFamily="34" charset="-122"/>
                 <a:cs typeface="Microsoft YaHei" pitchFamily="34" charset="-120"/>
               </a:rPr>
-              <a:t>A4 PDF · A3 骑马订小册子</a:t>
+              <a:t>A4 PDF · A3 骑马订 · 材料来源清单</a:t>
             </a:r>
             <a:endParaRPr lang="en-US" sz="1500" dirty="0"/>
           </a:p>
@@ -41358,7 +42686,7 @@
                 <a:ea typeface="Microsoft YaHei" pitchFamily="34" charset="-122"/>
                 <a:cs typeface="Microsoft YaHei" pitchFamily="34" charset="-120"/>
               </a:rPr>
-              <a:t>资料管理</a:t>
+              <a:t>资料与台账</a:t>
             </a:r>
             <a:endParaRPr lang="en-US" sz="1500" dirty="0"/>
           </a:p>
@@ -41378,7 +42706,7 @@
                 <a:ea typeface="Microsoft YaHei" pitchFamily="34" charset="-122"/>
                 <a:cs typeface="Microsoft YaHei" pitchFamily="34" charset="-120"/>
               </a:rPr>
-              <a:t>分类树 + 标签 · FTS 全文检索</a:t>
+              <a:t>分类树 + FTS 检索 · 历史快照</a:t>
             </a:r>
             <a:endParaRPr lang="en-US" sz="1500" dirty="0"/>
           </a:p>
@@ -41398,7 +42726,7 @@
                 <a:ea typeface="Microsoft YaHei" pitchFamily="34" charset="-122"/>
                 <a:cs typeface="Microsoft YaHei" pitchFamily="34" charset="-120"/>
               </a:rPr>
-              <a:t>历史快照 30 版 · 排版微调</a:t>
+              <a:t>发文登记 · 收文全流程 · 时限督办 · 归档</a:t>
             </a:r>
             <a:endParaRPr lang="en-US" sz="1500" dirty="0"/>
           </a:p>
@@ -41467,7 +42795,7 @@
                 <a:ea typeface="Microsoft YaHei" pitchFamily="34" charset="-122"/>
                 <a:cs typeface="Microsoft YaHei" pitchFamily="34" charset="-120"/>
               </a:rPr>
-              <a:t>安全保障</a:t>
+              <a:t>安全与运维</a:t>
             </a:r>
             <a:endParaRPr lang="en-US" sz="1500" dirty="0"/>
           </a:p>
@@ -41487,7 +42815,7 @@
                 <a:ea typeface="Microsoft YaHei" pitchFamily="34" charset="-122"/>
                 <a:cs typeface="Microsoft YaHei" pitchFamily="34" charset="-120"/>
               </a:rPr>
-              <a:t>口令锁 · AES 加密备份</a:t>
+              <a:t>口令锁 · AES 加密备份 · 便携模式</a:t>
             </a:r>
             <a:endParaRPr lang="en-US" sz="1500" dirty="0"/>
           </a:p>
@@ -41507,7 +42835,7 @@
                 <a:ea typeface="Microsoft YaHei" pitchFamily="34" charset="-122"/>
                 <a:cs typeface="Microsoft YaHei" pitchFamily="34" charset="-120"/>
               </a:rPr>
-              <a:t>退出/定时自动备份 · 便携模式</a:t>
+              <a:t>诊断日志 · 数据库维护 · 一键诊断包</a:t>
             </a:r>
             <a:endParaRPr lang="en-US" sz="1500" dirty="0"/>
           </a:p>
@@ -41736,7 +43064,7 @@
                 <a:ea typeface="Microsoft YaHei" pitchFamily="34" charset="-122"/>
                 <a:cs typeface="Microsoft YaHei" pitchFamily="34" charset="-120"/>
               </a:rPr>
-              <a:t>24 个功能模块</a:t>
+              <a:t>32 个功能模块</a:t>
             </a:r>
             <a:endParaRPr lang="en-US" sz="1700" dirty="0"/>
           </a:p>
@@ -43698,7 +45026,7 @@
                 <a:ea typeface="Microsoft YaHei" pitchFamily="34" charset="-122"/>
                 <a:cs typeface="Microsoft YaHei" pitchFamily="34" charset="-120"/>
               </a:rPr>
-              <a:t>三层架构：约 8900 行 Python，依赖方向清晰</a:t>
+              <a:t>三层架构：约 20600 行 Python，依赖方向清晰</a:t>
             </a:r>
             <a:endParaRPr lang="en-US" sz="2600" dirty="0"/>
           </a:p>
@@ -44504,7 +45832,7 @@
                 <a:ea typeface="Microsoft YaHei" pitchFamily="34" charset="-122"/>
                 <a:cs typeface="Microsoft YaHei" pitchFamily="34" charset="-120"/>
               </a:rPr>
-              <a:t>9 张业务表 + 3 个 FTS5 虚表</a:t>
+              <a:t>12 张业务表 + 3 个 FTS5 虚表</a:t>
             </a:r>
             <a:endParaRPr lang="en-US" sz="1200" dirty="0"/>
           </a:p>
@@ -44544,7 +45872,7 @@
                 <a:ea typeface="Microsoft YaHei" pitchFamily="34" charset="-122"/>
                 <a:cs typeface="Microsoft YaHei" pitchFamily="34" charset="-120"/>
               </a:rPr>
-              <a:t>schema v2 自动迁移</a:t>
+              <a:t>schema v4 自动迁移</a:t>
             </a:r>
             <a:endParaRPr lang="en-US" sz="1200" dirty="0"/>
           </a:p>

--- a/公文汇编助手-系统介绍.pptx
+++ b/公文汇编助手-系统介绍.pptx
@@ -46,9 +46,11 @@
     <p:sldId id="294" r:id="rId40"/>
     <p:sldId id="295" r:id="rId41"/>
     <p:sldId id="296" r:id="rId42"/>
+    <p:sldId id="297" r:id="rId43"/>
+    <p:sldId id="298" r:id="rId44"/>
   </p:sldIdLst>
   <p:notesMasterIdLst>
-    <p:notesMasterId r:id="rId43"/>
+    <p:notesMasterId r:id="rId45"/>
   </p:notesMasterIdLst>
   <p:sldSz cx="12192000" cy="6858000"/>
   <p:notesSz cx="6858000" cy="12192000"/>
@@ -3646,6 +3648,182 @@
             <a:fld id="{F7021451-1387-4CA6-816F-3879F97B5CBC}" type="slidenum">
               <a:rPr lang="en-US"/>
               <a:t>41</a:t>
+            </a:fld>
+            <a:endParaRPr lang="en-US"/>
+          </a:p>
+        </p:txBody>
+      </p:sp>
+    </p:spTree>
+    <p:extLst>
+      <p:ext uri="{BB962C8B-B14F-4D97-AF65-F5344CB8AC3E}">
+        <p14:creationId xmlns:p14="http://schemas.microsoft.com/office/powerpoint/2010/main" val="1024086991"/>
+      </p:ext>
+    </p:extLst>
+  </p:cSld>
+  <p:clrMapOvr>
+    <a:masterClrMapping/>
+  </p:clrMapOvr>
+</p:notes>
+</file>
+
+<file path=ppt/notesSlides/notesSlide42.xml><?xml version="1.0" encoding="utf-8"?>
+<p:notes xmlns:a="http://schemas.openxmlformats.org/drawingml/2006/main" xmlns:r="http://schemas.openxmlformats.org/officeDocument/2006/relationships" xmlns:p="http://schemas.openxmlformats.org/presentationml/2006/main">
+  <p:cSld>
+    <p:spTree>
+      <p:nvGrpSpPr>
+        <p:cNvPr id="1" name=""/>
+        <p:cNvGrpSpPr/>
+        <p:nvPr/>
+      </p:nvGrpSpPr>
+      <p:grpSpPr>
+        <a:xfrm>
+          <a:off x="0" y="0"/>
+          <a:ext cx="0" cy="0"/>
+          <a:chOff x="0" y="0"/>
+          <a:chExt cx="0" cy="0"/>
+        </a:xfrm>
+      </p:grpSpPr>
+      <p:sp>
+        <p:nvSpPr>
+          <p:cNvPr id="2" name="Slide Image Placeholder 1"/>
+          <p:cNvSpPr>
+            <a:spLocks noGrp="1" noRot="1" noChangeAspect="1"/>
+          </p:cNvSpPr>
+          <p:nvPr>
+            <p:ph type="sldImg"/>
+          </p:nvPr>
+        </p:nvSpPr>
+        <p:spPr/>
+      </p:sp>
+      <p:sp>
+        <p:nvSpPr>
+          <p:cNvPr id="3" name="Notes Placeholder 2"/>
+          <p:cNvSpPr>
+            <a:spLocks noGrp="1"/>
+          </p:cNvSpPr>
+          <p:nvPr>
+            <p:ph type="body" idx="1"/>
+          </p:nvPr>
+        </p:nvSpPr>
+        <p:spPr/>
+        <p:txBody>
+          <a:bodyPr/>
+          <a:lstStyle/>
+          <a:p>
+            <a:r>
+              <a:rPr lang="en-US" dirty="0"/>
+              <a:t/>
+            </a:r>
+            <a:endParaRPr lang="en-US" dirty="0"/>
+          </a:p>
+        </p:txBody>
+      </p:sp>
+      <p:sp>
+        <p:nvSpPr>
+          <p:cNvPr id="4" name="Slide Number Placeholder 3"/>
+          <p:cNvSpPr>
+            <a:spLocks noGrp="1"/>
+          </p:cNvSpPr>
+          <p:nvPr>
+            <p:ph type="sldNum" sz="quarter" idx="10"/>
+          </p:nvPr>
+        </p:nvSpPr>
+        <p:spPr/>
+        <p:txBody>
+          <a:bodyPr/>
+          <a:lstStyle/>
+          <a:p>
+            <a:fld id="{F7021451-1387-4CA6-816F-3879F97B5CBC}" type="slidenum">
+              <a:rPr lang="en-US"/>
+              <a:t>42</a:t>
+            </a:fld>
+            <a:endParaRPr lang="en-US"/>
+          </a:p>
+        </p:txBody>
+      </p:sp>
+    </p:spTree>
+    <p:extLst>
+      <p:ext uri="{BB962C8B-B14F-4D97-AF65-F5344CB8AC3E}">
+        <p14:creationId xmlns:p14="http://schemas.microsoft.com/office/powerpoint/2010/main" val="1024086991"/>
+      </p:ext>
+    </p:extLst>
+  </p:cSld>
+  <p:clrMapOvr>
+    <a:masterClrMapping/>
+  </p:clrMapOvr>
+</p:notes>
+</file>
+
+<file path=ppt/notesSlides/notesSlide43.xml><?xml version="1.0" encoding="utf-8"?>
+<p:notes xmlns:a="http://schemas.openxmlformats.org/drawingml/2006/main" xmlns:r="http://schemas.openxmlformats.org/officeDocument/2006/relationships" xmlns:p="http://schemas.openxmlformats.org/presentationml/2006/main">
+  <p:cSld>
+    <p:spTree>
+      <p:nvGrpSpPr>
+        <p:cNvPr id="1" name=""/>
+        <p:cNvGrpSpPr/>
+        <p:nvPr/>
+      </p:nvGrpSpPr>
+      <p:grpSpPr>
+        <a:xfrm>
+          <a:off x="0" y="0"/>
+          <a:ext cx="0" cy="0"/>
+          <a:chOff x="0" y="0"/>
+          <a:chExt cx="0" cy="0"/>
+        </a:xfrm>
+      </p:grpSpPr>
+      <p:sp>
+        <p:nvSpPr>
+          <p:cNvPr id="2" name="Slide Image Placeholder 1"/>
+          <p:cNvSpPr>
+            <a:spLocks noGrp="1" noRot="1" noChangeAspect="1"/>
+          </p:cNvSpPr>
+          <p:nvPr>
+            <p:ph type="sldImg"/>
+          </p:nvPr>
+        </p:nvSpPr>
+        <p:spPr/>
+      </p:sp>
+      <p:sp>
+        <p:nvSpPr>
+          <p:cNvPr id="3" name="Notes Placeholder 2"/>
+          <p:cNvSpPr>
+            <a:spLocks noGrp="1"/>
+          </p:cNvSpPr>
+          <p:nvPr>
+            <p:ph type="body" idx="1"/>
+          </p:nvPr>
+        </p:nvSpPr>
+        <p:spPr/>
+        <p:txBody>
+          <a:bodyPr/>
+          <a:lstStyle/>
+          <a:p>
+            <a:r>
+              <a:rPr lang="en-US" dirty="0"/>
+              <a:t/>
+            </a:r>
+            <a:endParaRPr lang="en-US" dirty="0"/>
+          </a:p>
+        </p:txBody>
+      </p:sp>
+      <p:sp>
+        <p:nvSpPr>
+          <p:cNvPr id="4" name="Slide Number Placeholder 3"/>
+          <p:cNvSpPr>
+            <a:spLocks noGrp="1"/>
+          </p:cNvSpPr>
+          <p:nvPr>
+            <p:ph type="sldNum" sz="quarter" idx="10"/>
+          </p:nvPr>
+        </p:nvSpPr>
+        <p:spPr/>
+        <p:txBody>
+          <a:bodyPr/>
+          <a:lstStyle/>
+          <a:p>
+            <a:fld id="{F7021451-1387-4CA6-816F-3879F97B5CBC}" type="slidenum">
+              <a:rPr lang="en-US"/>
+              <a:t>43</a:t>
             </a:fld>
             <a:endParaRPr lang="en-US"/>
           </a:p>
@@ -4805,7 +4983,7 @@
                 <a:ea typeface="Microsoft YaHei" pitchFamily="34" charset="-122"/>
                 <a:cs typeface="Microsoft YaHei" pitchFamily="34" charset="-120"/>
               </a:rPr>
-              <a:t>GB/T 9704 公文格式</a:t>
+              <a:t>GJB 5100A 军队公文格式</a:t>
             </a:r>
             <a:endParaRPr lang="en-US" sz="1250" dirty="0"/>
           </a:p>
@@ -4871,7 +5049,7 @@
                 <a:ea typeface="Microsoft YaHei" pitchFamily="34" charset="-122"/>
                 <a:cs typeface="Microsoft YaHei" pitchFamily="34" charset="-120"/>
               </a:rPr>
-              <a:t>1118 项自动化测试</a:t>
+              <a:t>1127 项自动化测试</a:t>
             </a:r>
             <a:endParaRPr lang="en-US" sz="1250" dirty="0"/>
           </a:p>
@@ -13523,7 +13701,7 @@
                 <a:ea typeface="Microsoft YaHei" pitchFamily="34" charset="-122"/>
                 <a:cs typeface="Microsoft YaHei" pitchFamily="34" charset="-120"/>
               </a:rPr>
-              <a:t>15 种法定文种骨架，填要素即成稿</a:t>
+              <a:t>12 种军队机关公文文种骨架，填要素即成稿</a:t>
             </a:r>
             <a:endParaRPr lang="en-US" sz="1350" dirty="0"/>
           </a:p>
@@ -13890,7 +14068,7 @@
                 <a:ea typeface="Microsoft YaHei" pitchFamily="34" charset="-122"/>
                 <a:cs typeface="Microsoft YaHei" pitchFamily="34" charset="-120"/>
               </a:rPr>
-              <a:t>新建公文：15 种法定文种骨架全覆盖</a:t>
+              <a:t>新建公文：12 种军队机关公文文种骨架全覆盖</a:t>
             </a:r>
             <a:endParaRPr lang="en-US" sz="2600" dirty="0"/>
           </a:p>
@@ -14048,7 +14226,7 @@
                 <a:ea typeface="Microsoft YaHei" pitchFamily="34" charset="-122"/>
                 <a:cs typeface="Microsoft YaHei" pitchFamily="34" charset="-120"/>
               </a:rPr>
-              <a:t>决议</a:t>
+              <a:t>命令</a:t>
             </a:r>
             <a:endParaRPr lang="en-US" sz="1100" dirty="0"/>
           </a:p>
@@ -14128,7 +14306,7 @@
                 <a:ea typeface="Microsoft YaHei" pitchFamily="34" charset="-122"/>
                 <a:cs typeface="Microsoft YaHei" pitchFamily="34" charset="-120"/>
               </a:rPr>
-              <a:t>决定</a:t>
+              <a:t>通令</a:t>
             </a:r>
             <a:endParaRPr lang="en-US" sz="1100" dirty="0"/>
           </a:p>
@@ -14208,7 +14386,7 @@
                 <a:ea typeface="Microsoft YaHei" pitchFamily="34" charset="-122"/>
                 <a:cs typeface="Microsoft YaHei" pitchFamily="34" charset="-120"/>
               </a:rPr>
-              <a:t>命令（令）</a:t>
+              <a:t>决定</a:t>
             </a:r>
             <a:endParaRPr lang="en-US" sz="1100" dirty="0"/>
           </a:p>
@@ -14288,7 +14466,7 @@
                 <a:ea typeface="Microsoft YaHei" pitchFamily="34" charset="-122"/>
                 <a:cs typeface="Microsoft YaHei" pitchFamily="34" charset="-120"/>
               </a:rPr>
-              <a:t>公报</a:t>
+              <a:t>指示</a:t>
             </a:r>
             <a:endParaRPr lang="en-US" sz="1100" dirty="0"/>
           </a:p>
@@ -14368,7 +14546,7 @@
                 <a:ea typeface="Microsoft YaHei" pitchFamily="34" charset="-122"/>
                 <a:cs typeface="Microsoft YaHei" pitchFamily="34" charset="-120"/>
               </a:rPr>
-              <a:t>公告</a:t>
+              <a:t>通知</a:t>
             </a:r>
             <a:endParaRPr lang="en-US" sz="1100" dirty="0"/>
           </a:p>
@@ -14448,7 +14626,7 @@
                 <a:ea typeface="Microsoft YaHei" pitchFamily="34" charset="-122"/>
                 <a:cs typeface="Microsoft YaHei" pitchFamily="34" charset="-120"/>
               </a:rPr>
-              <a:t>通告</a:t>
+              <a:t>通报</a:t>
             </a:r>
             <a:endParaRPr lang="en-US" sz="1100" dirty="0"/>
           </a:p>
@@ -14528,7 +14706,7 @@
                 <a:ea typeface="Microsoft YaHei" pitchFamily="34" charset="-122"/>
                 <a:cs typeface="Microsoft YaHei" pitchFamily="34" charset="-120"/>
               </a:rPr>
-              <a:t>意见</a:t>
+              <a:t>报告</a:t>
             </a:r>
             <a:endParaRPr lang="en-US" sz="1100" dirty="0"/>
           </a:p>
@@ -14608,7 +14786,7 @@
                 <a:ea typeface="Microsoft YaHei" pitchFamily="34" charset="-122"/>
                 <a:cs typeface="Microsoft YaHei" pitchFamily="34" charset="-120"/>
               </a:rPr>
-              <a:t>通知</a:t>
+              <a:t>请示</a:t>
             </a:r>
             <a:endParaRPr lang="en-US" sz="1100" dirty="0"/>
           </a:p>
@@ -14688,7 +14866,7 @@
                 <a:ea typeface="Microsoft YaHei" pitchFamily="34" charset="-122"/>
                 <a:cs typeface="Microsoft YaHei" pitchFamily="34" charset="-120"/>
               </a:rPr>
-              <a:t>通报</a:t>
+              <a:t>批复</a:t>
             </a:r>
             <a:endParaRPr lang="en-US" sz="1100" dirty="0"/>
           </a:p>
@@ -14768,7 +14946,7 @@
                 <a:ea typeface="Microsoft YaHei" pitchFamily="34" charset="-122"/>
                 <a:cs typeface="Microsoft YaHei" pitchFamily="34" charset="-120"/>
               </a:rPr>
-              <a:t>报告</a:t>
+              <a:t>函</a:t>
             </a:r>
             <a:endParaRPr lang="en-US" sz="1100" dirty="0"/>
           </a:p>
@@ -14848,7 +15026,7 @@
                 <a:ea typeface="Microsoft YaHei" pitchFamily="34" charset="-122"/>
                 <a:cs typeface="Microsoft YaHei" pitchFamily="34" charset="-120"/>
               </a:rPr>
-              <a:t>请示</a:t>
+              <a:t>通告</a:t>
             </a:r>
             <a:endParaRPr lang="en-US" sz="1100" dirty="0"/>
           </a:p>
@@ -14928,7 +15106,7 @@
                 <a:ea typeface="Microsoft YaHei" pitchFamily="34" charset="-122"/>
                 <a:cs typeface="Microsoft YaHei" pitchFamily="34" charset="-120"/>
               </a:rPr>
-              <a:t>批复</a:t>
+              <a:t>纪要</a:t>
             </a:r>
             <a:endParaRPr lang="en-US" sz="1100" dirty="0"/>
           </a:p>
@@ -14937,246 +15115,6 @@
       <p:sp>
         <p:nvSpPr>
           <p:cNvPr id="32" name="Shape 30"/>
-          <p:cNvSpPr/>
-          <p:nvPr/>
-        </p:nvSpPr>
-        <p:spPr>
-          <a:xfrm>
-            <a:off x="5029200" y="3337560"/>
-            <a:ext cx="2121408" cy="621792"/>
-          </a:xfrm>
-          <a:prstGeom prst="roundRect">
-            <a:avLst>
-              <a:gd name="adj" fmla="val 10294"/>
-            </a:avLst>
-          </a:prstGeom>
-          <a:solidFill>
-            <a:srgbClr val="F8F4EE"/>
-          </a:solidFill>
-          <a:ln w="12700">
-            <a:solidFill>
-              <a:srgbClr val="E7DFD5"/>
-            </a:solidFill>
-            <a:prstDash val="solid"/>
-          </a:ln>
-        </p:spPr>
-      </p:sp>
-      <p:sp>
-        <p:nvSpPr>
-          <p:cNvPr id="33" name="Text 31"/>
-          <p:cNvSpPr/>
-          <p:nvPr/>
-        </p:nvSpPr>
-        <p:spPr>
-          <a:xfrm>
-            <a:off x="5157216" y="3337560"/>
-            <a:ext cx="1920240" cy="621792"/>
-          </a:xfrm>
-          <a:prstGeom prst="rect">
-            <a:avLst/>
-          </a:prstGeom>
-          <a:noFill/>
-          <a:ln/>
-        </p:spPr>
-        <p:txBody>
-          <a:bodyPr wrap="square" lIns="0" tIns="0" rIns="0" bIns="0" rtlCol="0" anchor="ctr"/>
-          <a:lstStyle/>
-          <a:p>
-            <a:pPr indent="0" marL="0">
-              <a:buNone/>
-            </a:pPr>
-            <a:r>
-              <a:rPr lang="en-US" sz="1100" b="1" dirty="0">
-                <a:solidFill>
-                  <a:srgbClr val="C9A227"/>
-                </a:solidFill>
-                <a:latin typeface="Microsoft YaHei" pitchFamily="34" charset="0"/>
-                <a:ea typeface="Microsoft YaHei" pitchFamily="34" charset="-122"/>
-                <a:cs typeface="Microsoft YaHei" pitchFamily="34" charset="-120"/>
-              </a:rPr>
-              <a:t>13  </a:t>
-            </a:r>
-            <a:pPr indent="0" marL="0">
-              <a:buNone/>
-            </a:pPr>
-            <a:r>
-              <a:rPr lang="en-US" sz="1450" b="1" dirty="0">
-                <a:solidFill>
-                  <a:srgbClr val="26201C"/>
-                </a:solidFill>
-                <a:latin typeface="Microsoft YaHei" pitchFamily="34" charset="0"/>
-                <a:ea typeface="Microsoft YaHei" pitchFamily="34" charset="-122"/>
-                <a:cs typeface="Microsoft YaHei" pitchFamily="34" charset="-120"/>
-              </a:rPr>
-              <a:t>议案</a:t>
-            </a:r>
-            <a:endParaRPr lang="en-US" sz="1100" dirty="0"/>
-          </a:p>
-        </p:txBody>
-      </p:sp>
-      <p:sp>
-        <p:nvSpPr>
-          <p:cNvPr id="34" name="Shape 32"/>
-          <p:cNvSpPr/>
-          <p:nvPr/>
-        </p:nvSpPr>
-        <p:spPr>
-          <a:xfrm>
-            <a:off x="7315200" y="3337560"/>
-            <a:ext cx="2121408" cy="621792"/>
-          </a:xfrm>
-          <a:prstGeom prst="roundRect">
-            <a:avLst>
-              <a:gd name="adj" fmla="val 10294"/>
-            </a:avLst>
-          </a:prstGeom>
-          <a:solidFill>
-            <a:srgbClr val="F8F4EE"/>
-          </a:solidFill>
-          <a:ln w="12700">
-            <a:solidFill>
-              <a:srgbClr val="E7DFD5"/>
-            </a:solidFill>
-            <a:prstDash val="solid"/>
-          </a:ln>
-        </p:spPr>
-      </p:sp>
-      <p:sp>
-        <p:nvSpPr>
-          <p:cNvPr id="35" name="Text 33"/>
-          <p:cNvSpPr/>
-          <p:nvPr/>
-        </p:nvSpPr>
-        <p:spPr>
-          <a:xfrm>
-            <a:off x="7443216" y="3337560"/>
-            <a:ext cx="1920240" cy="621792"/>
-          </a:xfrm>
-          <a:prstGeom prst="rect">
-            <a:avLst/>
-          </a:prstGeom>
-          <a:noFill/>
-          <a:ln/>
-        </p:spPr>
-        <p:txBody>
-          <a:bodyPr wrap="square" lIns="0" tIns="0" rIns="0" bIns="0" rtlCol="0" anchor="ctr"/>
-          <a:lstStyle/>
-          <a:p>
-            <a:pPr indent="0" marL="0">
-              <a:buNone/>
-            </a:pPr>
-            <a:r>
-              <a:rPr lang="en-US" sz="1100" b="1" dirty="0">
-                <a:solidFill>
-                  <a:srgbClr val="C9A227"/>
-                </a:solidFill>
-                <a:latin typeface="Microsoft YaHei" pitchFamily="34" charset="0"/>
-                <a:ea typeface="Microsoft YaHei" pitchFamily="34" charset="-122"/>
-                <a:cs typeface="Microsoft YaHei" pitchFamily="34" charset="-120"/>
-              </a:rPr>
-              <a:t>14  </a:t>
-            </a:r>
-            <a:pPr indent="0" marL="0">
-              <a:buNone/>
-            </a:pPr>
-            <a:r>
-              <a:rPr lang="en-US" sz="1450" b="1" dirty="0">
-                <a:solidFill>
-                  <a:srgbClr val="26201C"/>
-                </a:solidFill>
-                <a:latin typeface="Microsoft YaHei" pitchFamily="34" charset="0"/>
-                <a:ea typeface="Microsoft YaHei" pitchFamily="34" charset="-122"/>
-                <a:cs typeface="Microsoft YaHei" pitchFamily="34" charset="-120"/>
-              </a:rPr>
-              <a:t>函</a:t>
-            </a:r>
-            <a:endParaRPr lang="en-US" sz="1100" dirty="0"/>
-          </a:p>
-        </p:txBody>
-      </p:sp>
-      <p:sp>
-        <p:nvSpPr>
-          <p:cNvPr id="36" name="Shape 34"/>
-          <p:cNvSpPr/>
-          <p:nvPr/>
-        </p:nvSpPr>
-        <p:spPr>
-          <a:xfrm>
-            <a:off x="9601200" y="3337560"/>
-            <a:ext cx="2121408" cy="621792"/>
-          </a:xfrm>
-          <a:prstGeom prst="roundRect">
-            <a:avLst>
-              <a:gd name="adj" fmla="val 10294"/>
-            </a:avLst>
-          </a:prstGeom>
-          <a:solidFill>
-            <a:srgbClr val="F8F4EE"/>
-          </a:solidFill>
-          <a:ln w="12700">
-            <a:solidFill>
-              <a:srgbClr val="E7DFD5"/>
-            </a:solidFill>
-            <a:prstDash val="solid"/>
-          </a:ln>
-        </p:spPr>
-      </p:sp>
-      <p:sp>
-        <p:nvSpPr>
-          <p:cNvPr id="37" name="Text 35"/>
-          <p:cNvSpPr/>
-          <p:nvPr/>
-        </p:nvSpPr>
-        <p:spPr>
-          <a:xfrm>
-            <a:off x="9729216" y="3337560"/>
-            <a:ext cx="1920240" cy="621792"/>
-          </a:xfrm>
-          <a:prstGeom prst="rect">
-            <a:avLst/>
-          </a:prstGeom>
-          <a:noFill/>
-          <a:ln/>
-        </p:spPr>
-        <p:txBody>
-          <a:bodyPr wrap="square" lIns="0" tIns="0" rIns="0" bIns="0" rtlCol="0" anchor="ctr"/>
-          <a:lstStyle/>
-          <a:p>
-            <a:pPr indent="0" marL="0">
-              <a:buNone/>
-            </a:pPr>
-            <a:r>
-              <a:rPr lang="en-US" sz="1100" b="1" dirty="0">
-                <a:solidFill>
-                  <a:srgbClr val="C9A227"/>
-                </a:solidFill>
-                <a:latin typeface="Microsoft YaHei" pitchFamily="34" charset="0"/>
-                <a:ea typeface="Microsoft YaHei" pitchFamily="34" charset="-122"/>
-                <a:cs typeface="Microsoft YaHei" pitchFamily="34" charset="-120"/>
-              </a:rPr>
-              <a:t>15  </a:t>
-            </a:r>
-            <a:pPr indent="0" marL="0">
-              <a:buNone/>
-            </a:pPr>
-            <a:r>
-              <a:rPr lang="en-US" sz="1450" b="1" dirty="0">
-                <a:solidFill>
-                  <a:srgbClr val="26201C"/>
-                </a:solidFill>
-                <a:latin typeface="Microsoft YaHei" pitchFamily="34" charset="0"/>
-                <a:ea typeface="Microsoft YaHei" pitchFamily="34" charset="-122"/>
-                <a:cs typeface="Microsoft YaHei" pitchFamily="34" charset="-120"/>
-              </a:rPr>
-              <a:t>纪要</a:t>
-            </a:r>
-            <a:endParaRPr lang="en-US" sz="1100" dirty="0"/>
-          </a:p>
-        </p:txBody>
-      </p:sp>
-      <p:sp>
-        <p:nvSpPr>
-          <p:cNvPr id="38" name="Shape 36"/>
           <p:cNvSpPr/>
           <p:nvPr/>
         </p:nvSpPr>
@@ -15198,7 +15136,7 @@
       </p:sp>
       <p:sp>
         <p:nvSpPr>
-          <p:cNvPr id="39" name="Text 37"/>
+          <p:cNvPr id="33" name="Text 31"/>
           <p:cNvSpPr/>
           <p:nvPr/>
         </p:nvSpPr>
@@ -15251,7 +15189,7 @@
       </p:sp>
       <p:sp>
         <p:nvSpPr>
-          <p:cNvPr id="40" name="Shape 38"/>
+          <p:cNvPr id="34" name="Shape 32"/>
           <p:cNvSpPr/>
           <p:nvPr/>
         </p:nvSpPr>
@@ -15273,7 +15211,7 @@
       </p:sp>
       <p:sp>
         <p:nvSpPr>
-          <p:cNvPr id="41" name="Text 39"/>
+          <p:cNvPr id="35" name="Text 33"/>
           <p:cNvSpPr/>
           <p:nvPr/>
         </p:nvSpPr>
@@ -15326,7 +15264,7 @@
       </p:sp>
       <p:sp>
         <p:nvSpPr>
-          <p:cNvPr id="42" name="Text 40"/>
+          <p:cNvPr id="36" name="Text 34"/>
           <p:cNvSpPr/>
           <p:nvPr/>
         </p:nvSpPr>
@@ -16911,7 +16849,7 @@
                 <a:ea typeface="Microsoft YaHei" pitchFamily="34" charset="-122"/>
                 <a:cs typeface="Microsoft YaHei" pitchFamily="34" charset="-120"/>
               </a:rPr>
-              <a:t>15 种文种骨架 · 文秘工具箱 · 写作参考 · 三级纠错</a:t>
+              <a:t>12 种军队文种骨架 · 文秘工具箱 · 写作参考 · 三级纠错</a:t>
             </a:r>
             <a:endParaRPr lang="en-US" sz="1650" dirty="0"/>
           </a:p>
@@ -17365,7 +17303,7 @@
                 <a:ea typeface="Microsoft YaHei" pitchFamily="34" charset="-122"/>
                 <a:cs typeface="Microsoft YaHei" pitchFamily="34" charset="-120"/>
               </a:rPr>
-              <a:t>40 页 · 7 大章节</a:t>
+              <a:t>42 页 · 7 大章节</a:t>
             </a:r>
             <a:endParaRPr lang="en-US" sz="1350" dirty="0"/>
           </a:p>
@@ -23208,7 +23146,7 @@
                 <a:ea typeface="Microsoft YaHei" pitchFamily="34" charset="-122"/>
                 <a:cs typeface="Microsoft YaHei" pitchFamily="34" charset="-120"/>
               </a:rPr>
-              <a:t>默认模板：GB/T 9704-2012 开箱即用</a:t>
+              <a:t>默认模板：军队机关公文格式开箱即用</a:t>
             </a:r>
             <a:endParaRPr lang="en-US" sz="2600" dirty="0"/>
           </a:p>
@@ -23970,7 +23908,7 @@
                 <a:ea typeface="Microsoft YaHei" pitchFamily="34" charset="-122"/>
                 <a:cs typeface="Microsoft YaHei" pitchFamily="34" charset="-120"/>
               </a:rPr>
-              <a:t>封面 · 目录 · 版记 · 水印 / 密级标注（秘密★1年）</a:t>
+              <a:t>封面 · 目录 · 版记 · 水印 / 密级标注（绝密·核心 / 绝密 / 机密 / 秘密）</a:t>
             </a:r>
             <a:endParaRPr lang="en-US" sz="1300" dirty="0"/>
           </a:p>
@@ -28205,7 +28143,7 @@
                 <a:ea typeface="Microsoft YaHei" pitchFamily="34" charset="-122"/>
                 <a:cs typeface="Microsoft YaHei" pitchFamily="34" charset="-120"/>
               </a:rPr>
-              <a:t>GB/T 9704 格式体检：编号链条到字体行距</a:t>
+              <a:t>军队公文格式体检：编号链条到字体行距</a:t>
             </a:r>
             <a:endParaRPr lang="en-US" sz="1350" dirty="0"/>
           </a:p>
@@ -36391,7 +36329,7 @@
                 <a:ea typeface="Microsoft YaHei" pitchFamily="34" charset="-122"/>
                 <a:cs typeface="Microsoft YaHei" pitchFamily="34" charset="-120"/>
               </a:rPr>
-              <a:t>质量保障：1118 项测试，性能指标写进断言</a:t>
+              <a:t>质量保障：1127 项测试，性能指标写进断言</a:t>
             </a:r>
             <a:endParaRPr lang="en-US" sz="2600" dirty="0"/>
           </a:p>
@@ -37429,7 +37367,7 @@
                 <a:ea typeface="Microsoft YaHei" pitchFamily="34" charset="-122"/>
                 <a:cs typeface="Microsoft YaHei" pitchFamily="34" charset="-120"/>
               </a:rPr>
-              <a:t>合计 1118 用例 · 61 个测试文件 · 每次提交 ruff E9+F821 静态门槛（拦截“忘导入即崩溃”）</a:t>
+              <a:t>合计 1127 用例 · 62 个测试文件 · ruff 门槛 E9+F+FA100/FA102+B+PLW2901（拦“忘导入即崩溃”“py39 注解崩”“未用符号回归”）</a:t>
             </a:r>
             <a:endParaRPr lang="en-US" sz="1150" dirty="0"/>
           </a:p>
@@ -37972,7 +37910,7 @@
                 <a:ea typeface="Microsoft YaHei" pitchFamily="34" charset="-122"/>
                 <a:cs typeface="Microsoft YaHei" pitchFamily="34" charset="-120"/>
               </a:rPr>
-              <a:t>18 步全 PASS</a:t>
+              <a:t>20 步全 PASS</a:t>
             </a:r>
             <a:endParaRPr lang="en-US" sz="1500" dirty="0"/>
           </a:p>
@@ -38833,7 +38771,7 @@
                 <a:ea typeface="Microsoft YaHei" pitchFamily="34" charset="-122"/>
                 <a:cs typeface="Microsoft YaHei" pitchFamily="34" charset="-120"/>
               </a:rPr>
-              <a:t>GB/T 9704 默认模板 + 一键汇编，红头目录页码自动生成</a:t>
+              <a:t>军队机关公文格式默认模板 + 一键汇编，红头目录页码自动生成</a:t>
             </a:r>
             <a:endParaRPr lang="en-US" sz="1550" dirty="0"/>
           </a:p>
@@ -39089,7 +39027,7 @@
                 <a:ea typeface="Microsoft YaHei" pitchFamily="34" charset="-122"/>
                 <a:cs typeface="Microsoft YaHei" pitchFamily="34" charset="-120"/>
               </a:rPr>
-              <a:t>15 种法定文种骨架 + 三库联合检索，双击即插入</a:t>
+              <a:t>12 种军队机关公文文种骨架 + 三库联合检索，双击即插入</a:t>
             </a:r>
             <a:endParaRPr lang="en-US" sz="1550" dirty="0"/>
           </a:p>
@@ -40012,6 +39950,2480 @@
     <p:bg>
       <p:bgPr>
         <a:solidFill>
+          <a:srgbClr val="FFFFFF"/>
+        </a:solidFill>
+      </p:bgPr>
+    </p:bg>
+    <p:spTree>
+      <p:nvGrpSpPr>
+        <p:cNvPr id="1" name=""/>
+        <p:cNvGrpSpPr/>
+        <p:nvPr/>
+      </p:nvGrpSpPr>
+      <p:grpSpPr>
+        <a:xfrm>
+          <a:off x="0" y="0"/>
+          <a:ext cx="0" cy="0"/>
+          <a:chOff x="0" y="0"/>
+          <a:chExt cx="0" cy="0"/>
+        </a:xfrm>
+      </p:grpSpPr>
+      <p:sp>
+        <p:nvSpPr>
+          <p:cNvPr id="2" name="Shape 0"/>
+          <p:cNvSpPr/>
+          <p:nvPr/>
+        </p:nvSpPr>
+        <p:spPr>
+          <a:xfrm>
+            <a:off x="457200" y="384048"/>
+            <a:ext cx="347472" cy="347472"/>
+          </a:xfrm>
+          <a:prstGeom prst="roundRect">
+            <a:avLst>
+              <a:gd name="adj" fmla="val 10000"/>
+            </a:avLst>
+          </a:prstGeom>
+          <a:solidFill>
+            <a:srgbClr val="9E2B25"/>
+          </a:solidFill>
+          <a:ln/>
+        </p:spPr>
+      </p:sp>
+      <p:sp>
+        <p:nvSpPr>
+          <p:cNvPr id="3" name="Text 1"/>
+          <p:cNvSpPr/>
+          <p:nvPr/>
+        </p:nvSpPr>
+        <p:spPr>
+          <a:xfrm>
+            <a:off x="457200" y="373624"/>
+            <a:ext cx="347472" cy="347472"/>
+          </a:xfrm>
+          <a:prstGeom prst="rect">
+            <a:avLst/>
+          </a:prstGeom>
+          <a:noFill/>
+          <a:ln/>
+        </p:spPr>
+        <p:txBody>
+          <a:bodyPr wrap="square" lIns="0" tIns="0" rIns="0" bIns="0" rtlCol="0" anchor="ctr"/>
+          <a:lstStyle/>
+          <a:p>
+            <a:pPr algn="ctr" indent="0" marL="0">
+              <a:buNone/>
+            </a:pPr>
+            <a:r>
+              <a:rPr lang="en-US" sz="1400" b="1" dirty="0">
+                <a:solidFill>
+                  <a:srgbClr val="FFFFFF"/>
+                </a:solidFill>
+                <a:latin typeface="Microsoft YaHei" pitchFamily="34" charset="0"/>
+                <a:ea typeface="Microsoft YaHei" pitchFamily="34" charset="-122"/>
+                <a:cs typeface="Microsoft YaHei" pitchFamily="34" charset="-120"/>
+              </a:rPr>
+              <a:t>文</a:t>
+            </a:r>
+            <a:endParaRPr lang="en-US" sz="1400" dirty="0"/>
+          </a:p>
+        </p:txBody>
+      </p:sp>
+      <p:sp>
+        <p:nvSpPr>
+          <p:cNvPr id="4" name="Text 2"/>
+          <p:cNvSpPr/>
+          <p:nvPr/>
+        </p:nvSpPr>
+        <p:spPr>
+          <a:xfrm>
+            <a:off x="914400" y="384048"/>
+            <a:ext cx="7315200" cy="347472"/>
+          </a:xfrm>
+          <a:prstGeom prst="rect">
+            <a:avLst/>
+          </a:prstGeom>
+          <a:noFill/>
+          <a:ln/>
+        </p:spPr>
+        <p:txBody>
+          <a:bodyPr wrap="square" lIns="0" tIns="0" rIns="0" bIns="0" rtlCol="0" anchor="ctr"/>
+          <a:lstStyle/>
+          <a:p>
+            <a:pPr indent="0" marL="0">
+              <a:buNone/>
+            </a:pPr>
+            <a:r>
+              <a:rPr lang="en-US" sz="1200" b="1" spc="200" kern="0" dirty="0">
+                <a:solidFill>
+                  <a:srgbClr val="9E2B25"/>
+                </a:solidFill>
+                <a:latin typeface="Microsoft YaHei" pitchFamily="34" charset="0"/>
+                <a:ea typeface="Microsoft YaHei" pitchFamily="34" charset="-122"/>
+                <a:cs typeface="Microsoft YaHei" pitchFamily="34" charset="-120"/>
+              </a:rPr>
+              <a:t>07 交付、质量与生态</a:t>
+            </a:r>
+            <a:endParaRPr lang="en-US" sz="1200" dirty="0"/>
+          </a:p>
+        </p:txBody>
+      </p:sp>
+      <p:sp>
+        <p:nvSpPr>
+          <p:cNvPr id="5" name="Text 3"/>
+          <p:cNvSpPr/>
+          <p:nvPr/>
+        </p:nvSpPr>
+        <p:spPr>
+          <a:xfrm>
+            <a:off x="457200" y="841248"/>
+            <a:ext cx="11274552" cy="566928"/>
+          </a:xfrm>
+          <a:prstGeom prst="rect">
+            <a:avLst/>
+          </a:prstGeom>
+          <a:noFill/>
+          <a:ln/>
+        </p:spPr>
+        <p:txBody>
+          <a:bodyPr wrap="square" lIns="0" tIns="0" rIns="0" bIns="0" rtlCol="0" anchor="ctr"/>
+          <a:lstStyle/>
+          <a:p>
+            <a:pPr indent="0" marL="0">
+              <a:buNone/>
+            </a:pPr>
+            <a:r>
+              <a:rPr lang="en-US" sz="2600" b="1" dirty="0">
+                <a:solidFill>
+                  <a:srgbClr val="26201C"/>
+                </a:solidFill>
+                <a:latin typeface="Microsoft YaHei" pitchFamily="34" charset="0"/>
+                <a:ea typeface="Microsoft YaHei" pitchFamily="34" charset="-122"/>
+                <a:cs typeface="Microsoft YaHei" pitchFamily="34" charset="-120"/>
+              </a:rPr>
+              <a:t>规范依据与资料来源（逐项可溯）</a:t>
+            </a:r>
+            <a:endParaRPr lang="en-US" sz="2600" dirty="0"/>
+          </a:p>
+        </p:txBody>
+      </p:sp>
+      <p:sp>
+        <p:nvSpPr>
+          <p:cNvPr id="6" name="Text 4"/>
+          <p:cNvSpPr/>
+          <p:nvPr/>
+        </p:nvSpPr>
+        <p:spPr>
+          <a:xfrm>
+            <a:off x="11137392" y="6382512"/>
+            <a:ext cx="594360" cy="292608"/>
+          </a:xfrm>
+          <a:prstGeom prst="rect">
+            <a:avLst/>
+          </a:prstGeom>
+          <a:noFill/>
+          <a:ln/>
+        </p:spPr>
+        <p:txBody>
+          <a:bodyPr wrap="square" lIns="0" tIns="0" rIns="0" bIns="0" rtlCol="0" anchor="ctr"/>
+          <a:lstStyle/>
+          <a:p>
+            <a:pPr algn="r" indent="0" marL="0">
+              <a:buNone/>
+            </a:pPr>
+            <a:r>
+              <a:rPr lang="en-US" sz="1200" dirty="0">
+                <a:solidFill>
+                  <a:srgbClr val="8C8178"/>
+                </a:solidFill>
+                <a:latin typeface="Microsoft YaHei" pitchFamily="34" charset="0"/>
+                <a:ea typeface="Microsoft YaHei" pitchFamily="34" charset="-122"/>
+                <a:cs typeface="Microsoft YaHei" pitchFamily="34" charset="-120"/>
+              </a:rPr>
+              <a:t>41</a:t>
+            </a:r>
+            <a:endParaRPr lang="en-US" sz="1200" dirty="0"/>
+          </a:p>
+        </p:txBody>
+      </p:sp>
+      <p:sp>
+        <p:nvSpPr>
+          <p:cNvPr id="7" name="Text 5"/>
+          <p:cNvSpPr/>
+          <p:nvPr/>
+        </p:nvSpPr>
+        <p:spPr>
+          <a:xfrm>
+            <a:off x="457200" y="6382512"/>
+            <a:ext cx="2926080" cy="292608"/>
+          </a:xfrm>
+          <a:prstGeom prst="rect">
+            <a:avLst/>
+          </a:prstGeom>
+          <a:noFill/>
+          <a:ln/>
+        </p:spPr>
+        <p:txBody>
+          <a:bodyPr wrap="square" lIns="0" tIns="0" rIns="0" bIns="0" rtlCol="0" anchor="ctr"/>
+          <a:lstStyle/>
+          <a:p>
+            <a:pPr indent="0" marL="0">
+              <a:buNone/>
+            </a:pPr>
+            <a:r>
+              <a:rPr lang="en-US" sz="1200" dirty="0">
+                <a:solidFill>
+                  <a:srgbClr val="8C8178"/>
+                </a:solidFill>
+                <a:latin typeface="Microsoft YaHei" pitchFamily="34" charset="0"/>
+                <a:ea typeface="Microsoft YaHei" pitchFamily="34" charset="-122"/>
+                <a:cs typeface="Microsoft YaHei" pitchFamily="34" charset="-120"/>
+              </a:rPr>
+              <a:t>公文汇编助手 · 系统介绍</a:t>
+            </a:r>
+            <a:endParaRPr lang="en-US" sz="1200" dirty="0"/>
+          </a:p>
+        </p:txBody>
+      </p:sp>
+      <p:sp>
+        <p:nvSpPr>
+          <p:cNvPr id="8" name="Shape 6"/>
+          <p:cNvSpPr/>
+          <p:nvPr/>
+        </p:nvSpPr>
+        <p:spPr>
+          <a:xfrm>
+            <a:off x="457200" y="1572768"/>
+            <a:ext cx="11247120" cy="676656"/>
+          </a:xfrm>
+          <a:prstGeom prst="roundRect">
+            <a:avLst>
+              <a:gd name="adj" fmla="val 8108"/>
+            </a:avLst>
+          </a:prstGeom>
+          <a:solidFill>
+            <a:srgbClr val="F5EAE7"/>
+          </a:solidFill>
+          <a:ln w="12700">
+            <a:solidFill>
+              <a:srgbClr val="E7DFD5"/>
+            </a:solidFill>
+            <a:prstDash val="solid"/>
+          </a:ln>
+        </p:spPr>
+      </p:sp>
+      <p:sp>
+        <p:nvSpPr>
+          <p:cNvPr id="9" name="Text 7"/>
+          <p:cNvSpPr/>
+          <p:nvPr/>
+        </p:nvSpPr>
+        <p:spPr>
+          <a:xfrm>
+            <a:off x="566928" y="1618488"/>
+            <a:ext cx="2633472" cy="585216"/>
+          </a:xfrm>
+          <a:prstGeom prst="rect">
+            <a:avLst/>
+          </a:prstGeom>
+          <a:noFill/>
+          <a:ln/>
+        </p:spPr>
+        <p:txBody>
+          <a:bodyPr wrap="square" lIns="0" tIns="0" rIns="0" bIns="0" rtlCol="0" anchor="ctr"/>
+          <a:lstStyle/>
+          <a:p>
+            <a:pPr indent="0" marL="0">
+              <a:lnSpc>
+                <a:spcPct val="112000"/>
+              </a:lnSpc>
+              <a:buNone/>
+            </a:pPr>
+            <a:r>
+              <a:rPr lang="en-US" sz="1150" b="1" dirty="0">
+                <a:solidFill>
+                  <a:srgbClr val="9E2B25"/>
+                </a:solidFill>
+                <a:latin typeface="Microsoft YaHei" pitchFamily="34" charset="0"/>
+                <a:ea typeface="Microsoft YaHei" pitchFamily="34" charset="-122"/>
+                <a:cs typeface="Microsoft YaHei" pitchFamily="34" charset="-120"/>
+              </a:rPr>
+              <a:t>《军队机关公文处理工作条例》</a:t>
+            </a:r>
+            <a:endParaRPr lang="en-US" sz="1150" dirty="0"/>
+          </a:p>
+        </p:txBody>
+      </p:sp>
+      <p:sp>
+        <p:nvSpPr>
+          <p:cNvPr id="10" name="Text 8"/>
+          <p:cNvSpPr/>
+          <p:nvPr/>
+        </p:nvSpPr>
+        <p:spPr>
+          <a:xfrm>
+            <a:off x="3383280" y="1618488"/>
+            <a:ext cx="2907792" cy="585216"/>
+          </a:xfrm>
+          <a:prstGeom prst="rect">
+            <a:avLst/>
+          </a:prstGeom>
+          <a:noFill/>
+          <a:ln/>
+        </p:spPr>
+        <p:txBody>
+          <a:bodyPr wrap="square" lIns="0" tIns="0" rIns="0" bIns="0" rtlCol="0" anchor="ctr"/>
+          <a:lstStyle/>
+          <a:p>
+            <a:pPr indent="0" marL="0">
+              <a:lnSpc>
+                <a:spcPct val="112000"/>
+              </a:lnSpc>
+              <a:buNone/>
+            </a:pPr>
+            <a:r>
+              <a:rPr lang="en-US" sz="1050" dirty="0">
+                <a:solidFill>
+                  <a:srgbClr val="26201C"/>
+                </a:solidFill>
+                <a:latin typeface="Microsoft YaHei" pitchFamily="34" charset="0"/>
+                <a:ea typeface="Microsoft YaHei" pitchFamily="34" charset="-122"/>
+                <a:cs typeface="Microsoft YaHei" pitchFamily="34" charset="-120"/>
+              </a:rPr>
+              <a:t>解放军报 2017-07-17 全文发布</a:t>
+            </a:r>
+            <a:endParaRPr lang="en-US" sz="1050" dirty="0"/>
+          </a:p>
+          <a:p>
+            <a:pPr indent="0" marL="0">
+              <a:lnSpc>
+                <a:spcPct val="112000"/>
+              </a:lnSpc>
+              <a:buNone/>
+            </a:pPr>
+            <a:r>
+              <a:rPr lang="en-US" sz="1050" dirty="0">
+                <a:solidFill>
+                  <a:srgbClr val="26201C"/>
+                </a:solidFill>
+                <a:latin typeface="Microsoft YaHei" pitchFamily="34" charset="0"/>
+                <a:ea typeface="Microsoft YaHei" pitchFamily="34" charset="-122"/>
+                <a:cs typeface="Microsoft YaHei" pitchFamily="34" charset="-120"/>
+              </a:rPr>
+              <a:t>2017-10-01 施行，废止 2005 年版</a:t>
+            </a:r>
+            <a:endParaRPr lang="en-US" sz="1050" dirty="0"/>
+          </a:p>
+        </p:txBody>
+      </p:sp>
+      <p:sp>
+        <p:nvSpPr>
+          <p:cNvPr id="11" name="Text 9"/>
+          <p:cNvSpPr/>
+          <p:nvPr/>
+        </p:nvSpPr>
+        <p:spPr>
+          <a:xfrm>
+            <a:off x="6492240" y="1618488"/>
+            <a:ext cx="5010912" cy="585216"/>
+          </a:xfrm>
+          <a:prstGeom prst="rect">
+            <a:avLst/>
+          </a:prstGeom>
+          <a:noFill/>
+          <a:ln/>
+        </p:spPr>
+        <p:txBody>
+          <a:bodyPr wrap="square" lIns="0" tIns="0" rIns="0" bIns="0" rtlCol="0" anchor="ctr"/>
+          <a:lstStyle/>
+          <a:p>
+            <a:pPr indent="0" marL="0">
+              <a:lnSpc>
+                <a:spcPct val="112000"/>
+              </a:lnSpc>
+              <a:buNone/>
+            </a:pPr>
+            <a:r>
+              <a:rPr lang="en-US" sz="1050" dirty="0">
+                <a:solidFill>
+                  <a:srgbClr val="26201C"/>
+                </a:solidFill>
+                <a:latin typeface="Microsoft YaHei" pitchFamily="34" charset="0"/>
+                <a:ea typeface="Microsoft YaHei" pitchFamily="34" charset="-122"/>
+                <a:cs typeface="Microsoft YaHei" pitchFamily="34" charset="-120"/>
+              </a:rPr>
+              <a:t>文种（12 种）· 格式要素（20 项）· 行文规则 · 起草语言要求（内容简洁、主题突出、观点鲜明、结构严谨、表述准确、文字精练）</a:t>
+            </a:r>
+            <a:endParaRPr lang="en-US" sz="1050" dirty="0"/>
+          </a:p>
+        </p:txBody>
+      </p:sp>
+      <p:sp>
+        <p:nvSpPr>
+          <p:cNvPr id="12" name="Shape 10"/>
+          <p:cNvSpPr/>
+          <p:nvPr/>
+        </p:nvSpPr>
+        <p:spPr>
+          <a:xfrm>
+            <a:off x="457200" y="2322576"/>
+            <a:ext cx="11247120" cy="1024128"/>
+          </a:xfrm>
+          <a:prstGeom prst="roundRect">
+            <a:avLst>
+              <a:gd name="adj" fmla="val 5357"/>
+            </a:avLst>
+          </a:prstGeom>
+          <a:solidFill>
+            <a:srgbClr val="F8F4EE"/>
+          </a:solidFill>
+          <a:ln w="12700">
+            <a:solidFill>
+              <a:srgbClr val="E7DFD5"/>
+            </a:solidFill>
+            <a:prstDash val="solid"/>
+          </a:ln>
+        </p:spPr>
+      </p:sp>
+      <p:sp>
+        <p:nvSpPr>
+          <p:cNvPr id="13" name="Text 11"/>
+          <p:cNvSpPr/>
+          <p:nvPr/>
+        </p:nvSpPr>
+        <p:spPr>
+          <a:xfrm>
+            <a:off x="566928" y="2368296"/>
+            <a:ext cx="2633472" cy="932688"/>
+          </a:xfrm>
+          <a:prstGeom prst="rect">
+            <a:avLst/>
+          </a:prstGeom>
+          <a:noFill/>
+          <a:ln/>
+        </p:spPr>
+        <p:txBody>
+          <a:bodyPr wrap="square" lIns="0" tIns="0" rIns="0" bIns="0" rtlCol="0" anchor="ctr"/>
+          <a:lstStyle/>
+          <a:p>
+            <a:pPr indent="0" marL="0">
+              <a:lnSpc>
+                <a:spcPct val="112000"/>
+              </a:lnSpc>
+              <a:buNone/>
+            </a:pPr>
+            <a:r>
+              <a:rPr lang="en-US" sz="1150" b="1" dirty="0">
+                <a:solidFill>
+                  <a:srgbClr val="9E2B25"/>
+                </a:solidFill>
+                <a:latin typeface="Microsoft YaHei" pitchFamily="34" charset="0"/>
+                <a:ea typeface="Microsoft YaHei" pitchFamily="34" charset="-122"/>
+                <a:cs typeface="Microsoft YaHei" pitchFamily="34" charset="-120"/>
+              </a:rPr>
+              <a:t>GJB 5100A-2017《军队机关公文格式》</a:t>
+            </a:r>
+            <a:endParaRPr lang="en-US" sz="1150" dirty="0"/>
+          </a:p>
+        </p:txBody>
+      </p:sp>
+      <p:sp>
+        <p:nvSpPr>
+          <p:cNvPr id="14" name="Text 12"/>
+          <p:cNvSpPr/>
+          <p:nvPr/>
+        </p:nvSpPr>
+        <p:spPr>
+          <a:xfrm>
+            <a:off x="3383280" y="2368296"/>
+            <a:ext cx="2907792" cy="932688"/>
+          </a:xfrm>
+          <a:prstGeom prst="rect">
+            <a:avLst/>
+          </a:prstGeom>
+          <a:noFill/>
+          <a:ln/>
+        </p:spPr>
+        <p:txBody>
+          <a:bodyPr wrap="square" lIns="0" tIns="0" rIns="0" bIns="0" rtlCol="0" anchor="ctr"/>
+          <a:lstStyle/>
+          <a:p>
+            <a:pPr indent="0" marL="0">
+              <a:lnSpc>
+                <a:spcPct val="112000"/>
+              </a:lnSpc>
+              <a:buNone/>
+            </a:pPr>
+            <a:r>
+              <a:rPr lang="en-US" sz="1050" dirty="0">
+                <a:solidFill>
+                  <a:srgbClr val="26201C"/>
+                </a:solidFill>
+                <a:latin typeface="Microsoft YaHei" pitchFamily="34" charset="0"/>
+                <a:ea typeface="Microsoft YaHei" pitchFamily="34" charset="-122"/>
+                <a:cs typeface="Microsoft YaHei" pitchFamily="34" charset="-120"/>
+              </a:rPr>
+              <a:t>国家军用标准</a:t>
+            </a:r>
+            <a:endParaRPr lang="en-US" sz="1050" dirty="0"/>
+          </a:p>
+          <a:p>
+            <a:pPr indent="0" marL="0">
+              <a:lnSpc>
+                <a:spcPct val="112000"/>
+              </a:lnSpc>
+              <a:buNone/>
+            </a:pPr>
+            <a:r>
+              <a:rPr lang="en-US" sz="1050" dirty="0">
+                <a:solidFill>
+                  <a:srgbClr val="26201C"/>
+                </a:solidFill>
+                <a:latin typeface="Microsoft YaHei" pitchFamily="34" charset="0"/>
+                <a:ea typeface="Microsoft YaHei" pitchFamily="34" charset="-122"/>
+                <a:cs typeface="Microsoft YaHei" pitchFamily="34" charset="-120"/>
+              </a:rPr>
+              <a:t>2017 年发布，36 页</a:t>
+            </a:r>
+            <a:endParaRPr lang="en-US" sz="1050" dirty="0"/>
+          </a:p>
+        </p:txBody>
+      </p:sp>
+      <p:sp>
+        <p:nvSpPr>
+          <p:cNvPr id="15" name="Text 13"/>
+          <p:cNvSpPr/>
+          <p:nvPr/>
+        </p:nvSpPr>
+        <p:spPr>
+          <a:xfrm>
+            <a:off x="6492240" y="2368296"/>
+            <a:ext cx="5010912" cy="932688"/>
+          </a:xfrm>
+          <a:prstGeom prst="rect">
+            <a:avLst/>
+          </a:prstGeom>
+          <a:noFill/>
+          <a:ln/>
+        </p:spPr>
+        <p:txBody>
+          <a:bodyPr wrap="square" lIns="0" tIns="0" rIns="0" bIns="0" rtlCol="0" anchor="ctr"/>
+          <a:lstStyle/>
+          <a:p>
+            <a:pPr indent="0" marL="0">
+              <a:lnSpc>
+                <a:spcPct val="112000"/>
+              </a:lnSpc>
+              <a:buNone/>
+            </a:pPr>
+            <a:r>
+              <a:rPr lang="en-US" sz="1050" dirty="0">
+                <a:solidFill>
+                  <a:srgbClr val="26201C"/>
+                </a:solidFill>
+                <a:latin typeface="Microsoft YaHei" pitchFamily="34" charset="0"/>
+                <a:ea typeface="Microsoft YaHei" pitchFamily="34" charset="-122"/>
+                <a:cs typeface="Microsoft YaHei" pitchFamily="34" charset="-120"/>
+              </a:rPr>
+              <a:t>页面与字体字号：A4 · 天头 37mm · 订口 28mm · 版心 156mm×225mm · 每面 22 行×28 字；正文三号仿宋 · 标题二号小标宋 · 密级三号黑体 · 页码四号半角白体</a:t>
+            </a:r>
+            <a:endParaRPr lang="en-US" sz="1050" dirty="0"/>
+          </a:p>
+        </p:txBody>
+      </p:sp>
+      <p:sp>
+        <p:nvSpPr>
+          <p:cNvPr id="16" name="Shape 14"/>
+          <p:cNvSpPr/>
+          <p:nvPr/>
+        </p:nvSpPr>
+        <p:spPr>
+          <a:xfrm>
+            <a:off x="457200" y="3419856"/>
+            <a:ext cx="11247120" cy="676656"/>
+          </a:xfrm>
+          <a:prstGeom prst="roundRect">
+            <a:avLst>
+              <a:gd name="adj" fmla="val 8108"/>
+            </a:avLst>
+          </a:prstGeom>
+          <a:solidFill>
+            <a:srgbClr val="F5EAE7"/>
+          </a:solidFill>
+          <a:ln w="12700">
+            <a:solidFill>
+              <a:srgbClr val="E7DFD5"/>
+            </a:solidFill>
+            <a:prstDash val="solid"/>
+          </a:ln>
+        </p:spPr>
+      </p:sp>
+      <p:sp>
+        <p:nvSpPr>
+          <p:cNvPr id="17" name="Text 15"/>
+          <p:cNvSpPr/>
+          <p:nvPr/>
+        </p:nvSpPr>
+        <p:spPr>
+          <a:xfrm>
+            <a:off x="566928" y="3465576"/>
+            <a:ext cx="2633472" cy="585216"/>
+          </a:xfrm>
+          <a:prstGeom prst="rect">
+            <a:avLst/>
+          </a:prstGeom>
+          <a:noFill/>
+          <a:ln/>
+        </p:spPr>
+        <p:txBody>
+          <a:bodyPr wrap="square" lIns="0" tIns="0" rIns="0" bIns="0" rtlCol="0" anchor="ctr"/>
+          <a:lstStyle/>
+          <a:p>
+            <a:pPr indent="0" marL="0">
+              <a:lnSpc>
+                <a:spcPct val="112000"/>
+              </a:lnSpc>
+              <a:buNone/>
+            </a:pPr>
+            <a:r>
+              <a:rPr lang="en-US" sz="1150" b="1" dirty="0">
+                <a:solidFill>
+                  <a:srgbClr val="9E2B25"/>
+                </a:solidFill>
+                <a:latin typeface="Microsoft YaHei" pitchFamily="34" charset="0"/>
+                <a:ea typeface="Microsoft YaHei" pitchFamily="34" charset="-122"/>
+                <a:cs typeface="Microsoft YaHei" pitchFamily="34" charset="-120"/>
+              </a:rPr>
+              <a:t>求是网 · 文风建设系列文章</a:t>
+            </a:r>
+            <a:endParaRPr lang="en-US" sz="1150" dirty="0"/>
+          </a:p>
+        </p:txBody>
+      </p:sp>
+      <p:sp>
+        <p:nvSpPr>
+          <p:cNvPr id="18" name="Text 16"/>
+          <p:cNvSpPr/>
+          <p:nvPr/>
+        </p:nvSpPr>
+        <p:spPr>
+          <a:xfrm>
+            <a:off x="3383280" y="3465576"/>
+            <a:ext cx="2907792" cy="585216"/>
+          </a:xfrm>
+          <a:prstGeom prst="rect">
+            <a:avLst/>
+          </a:prstGeom>
+          <a:noFill/>
+          <a:ln/>
+        </p:spPr>
+        <p:txBody>
+          <a:bodyPr wrap="square" lIns="0" tIns="0" rIns="0" bIns="0" rtlCol="0" anchor="ctr"/>
+          <a:lstStyle/>
+          <a:p>
+            <a:pPr indent="0" marL="0">
+              <a:lnSpc>
+                <a:spcPct val="112000"/>
+              </a:lnSpc>
+              <a:buNone/>
+            </a:pPr>
+            <a:r>
+              <a:rPr lang="en-US" sz="1050" dirty="0">
+                <a:solidFill>
+                  <a:srgbClr val="26201C"/>
+                </a:solidFill>
+                <a:latin typeface="Microsoft YaHei" pitchFamily="34" charset="0"/>
+                <a:ea typeface="Microsoft YaHei" pitchFamily="34" charset="-122"/>
+                <a:cs typeface="Microsoft YaHei" pitchFamily="34" charset="-120"/>
+              </a:rPr>
+              <a:t>《“改文风”不只是“改文字”》等 3 篇</a:t>
+            </a:r>
+            <a:endParaRPr lang="en-US" sz="1050" dirty="0"/>
+          </a:p>
+        </p:txBody>
+      </p:sp>
+      <p:sp>
+        <p:nvSpPr>
+          <p:cNvPr id="19" name="Text 17"/>
+          <p:cNvSpPr/>
+          <p:nvPr/>
+        </p:nvSpPr>
+        <p:spPr>
+          <a:xfrm>
+            <a:off x="6492240" y="3465576"/>
+            <a:ext cx="5010912" cy="585216"/>
+          </a:xfrm>
+          <a:prstGeom prst="rect">
+            <a:avLst/>
+          </a:prstGeom>
+          <a:noFill/>
+          <a:ln/>
+        </p:spPr>
+        <p:txBody>
+          <a:bodyPr wrap="square" lIns="0" tIns="0" rIns="0" bIns="0" rtlCol="0" anchor="ctr"/>
+          <a:lstStyle/>
+          <a:p>
+            <a:pPr indent="0" marL="0">
+              <a:lnSpc>
+                <a:spcPct val="112000"/>
+              </a:lnSpc>
+              <a:buNone/>
+            </a:pPr>
+            <a:r>
+              <a:rPr lang="en-US" sz="1050" dirty="0">
+                <a:solidFill>
+                  <a:srgbClr val="26201C"/>
+                </a:solidFill>
+                <a:latin typeface="Microsoft YaHei" pitchFamily="34" charset="0"/>
+                <a:ea typeface="Microsoft YaHei" pitchFamily="34" charset="-122"/>
+                <a:cs typeface="Microsoft YaHei" pitchFamily="34" charset="-120"/>
+              </a:rPr>
+              <a:t>文风检查依据：反对“长、空、假”，倡导“短、实、新”</a:t>
+            </a:r>
+            <a:endParaRPr lang="en-US" sz="1050" dirty="0"/>
+          </a:p>
+        </p:txBody>
+      </p:sp>
+      <p:sp>
+        <p:nvSpPr>
+          <p:cNvPr id="20" name="Shape 18"/>
+          <p:cNvSpPr/>
+          <p:nvPr/>
+        </p:nvSpPr>
+        <p:spPr>
+          <a:xfrm>
+            <a:off x="457200" y="4169664"/>
+            <a:ext cx="11247120" cy="676656"/>
+          </a:xfrm>
+          <a:prstGeom prst="roundRect">
+            <a:avLst>
+              <a:gd name="adj" fmla="val 8108"/>
+            </a:avLst>
+          </a:prstGeom>
+          <a:solidFill>
+            <a:srgbClr val="F8F4EE"/>
+          </a:solidFill>
+          <a:ln w="12700">
+            <a:solidFill>
+              <a:srgbClr val="E7DFD5"/>
+            </a:solidFill>
+            <a:prstDash val="solid"/>
+          </a:ln>
+        </p:spPr>
+      </p:sp>
+      <p:sp>
+        <p:nvSpPr>
+          <p:cNvPr id="21" name="Text 19"/>
+          <p:cNvSpPr/>
+          <p:nvPr/>
+        </p:nvSpPr>
+        <p:spPr>
+          <a:xfrm>
+            <a:off x="566928" y="4215384"/>
+            <a:ext cx="2633472" cy="585216"/>
+          </a:xfrm>
+          <a:prstGeom prst="rect">
+            <a:avLst/>
+          </a:prstGeom>
+          <a:noFill/>
+          <a:ln/>
+        </p:spPr>
+        <p:txBody>
+          <a:bodyPr wrap="square" lIns="0" tIns="0" rIns="0" bIns="0" rtlCol="0" anchor="ctr"/>
+          <a:lstStyle/>
+          <a:p>
+            <a:pPr indent="0" marL="0">
+              <a:lnSpc>
+                <a:spcPct val="112000"/>
+              </a:lnSpc>
+              <a:buNone/>
+            </a:pPr>
+            <a:r>
+              <a:rPr lang="en-US" sz="1150" b="1" dirty="0">
+                <a:solidFill>
+                  <a:srgbClr val="9E2B25"/>
+                </a:solidFill>
+                <a:latin typeface="Microsoft YaHei" pitchFamily="34" charset="0"/>
+                <a:ea typeface="Microsoft YaHei" pitchFamily="34" charset="-122"/>
+                <a:cs typeface="Microsoft YaHei" pitchFamily="34" charset="-120"/>
+              </a:rPr>
+              <a:t>中国军网 · 解放军报</a:t>
+            </a:r>
+            <a:endParaRPr lang="en-US" sz="1150" dirty="0"/>
+          </a:p>
+        </p:txBody>
+      </p:sp>
+      <p:sp>
+        <p:nvSpPr>
+          <p:cNvPr id="22" name="Text 20"/>
+          <p:cNvSpPr/>
+          <p:nvPr/>
+        </p:nvSpPr>
+        <p:spPr>
+          <a:xfrm>
+            <a:off x="3383280" y="4215384"/>
+            <a:ext cx="2907792" cy="585216"/>
+          </a:xfrm>
+          <a:prstGeom prst="rect">
+            <a:avLst/>
+          </a:prstGeom>
+          <a:noFill/>
+          <a:ln/>
+        </p:spPr>
+        <p:txBody>
+          <a:bodyPr wrap="square" lIns="0" tIns="0" rIns="0" bIns="0" rtlCol="0" anchor="ctr"/>
+          <a:lstStyle/>
+          <a:p>
+            <a:pPr indent="0" marL="0">
+              <a:lnSpc>
+                <a:spcPct val="112000"/>
+              </a:lnSpc>
+              <a:buNone/>
+            </a:pPr>
+            <a:r>
+              <a:rPr lang="en-US" sz="1050" dirty="0">
+                <a:solidFill>
+                  <a:srgbClr val="26201C"/>
+                </a:solidFill>
+                <a:latin typeface="Microsoft YaHei" pitchFamily="34" charset="0"/>
+                <a:ea typeface="Microsoft YaHei" pitchFamily="34" charset="-122"/>
+                <a:cs typeface="Microsoft YaHei" pitchFamily="34" charset="-120"/>
+              </a:rPr>
+              <a:t>中国人民解放军官方军事新闻门户</a:t>
+            </a:r>
+            <a:endParaRPr lang="en-US" sz="1050" dirty="0"/>
+          </a:p>
+        </p:txBody>
+      </p:sp>
+      <p:sp>
+        <p:nvSpPr>
+          <p:cNvPr id="23" name="Text 21"/>
+          <p:cNvSpPr/>
+          <p:nvPr/>
+        </p:nvSpPr>
+        <p:spPr>
+          <a:xfrm>
+            <a:off x="6492240" y="4215384"/>
+            <a:ext cx="5010912" cy="585216"/>
+          </a:xfrm>
+          <a:prstGeom prst="rect">
+            <a:avLst/>
+          </a:prstGeom>
+          <a:noFill/>
+          <a:ln/>
+        </p:spPr>
+        <p:txBody>
+          <a:bodyPr wrap="square" lIns="0" tIns="0" rIns="0" bIns="0" rtlCol="0" anchor="ctr"/>
+          <a:lstStyle/>
+          <a:p>
+            <a:pPr indent="0" marL="0">
+              <a:lnSpc>
+                <a:spcPct val="112000"/>
+              </a:lnSpc>
+              <a:buNone/>
+            </a:pPr>
+            <a:r>
+              <a:rPr lang="en-US" sz="1050" dirty="0">
+                <a:solidFill>
+                  <a:srgbClr val="26201C"/>
+                </a:solidFill>
+                <a:latin typeface="Microsoft YaHei" pitchFamily="34" charset="0"/>
+                <a:ea typeface="Microsoft YaHei" pitchFamily="34" charset="-122"/>
+                <a:cs typeface="Microsoft YaHei" pitchFamily="34" charset="-120"/>
+              </a:rPr>
+              <a:t>军队机关公文规范的发布渠道与权威来源</a:t>
+            </a:r>
+            <a:endParaRPr lang="en-US" sz="1050" dirty="0"/>
+          </a:p>
+        </p:txBody>
+      </p:sp>
+      <p:sp>
+        <p:nvSpPr>
+          <p:cNvPr id="24" name="Shape 22"/>
+          <p:cNvSpPr/>
+          <p:nvPr/>
+        </p:nvSpPr>
+        <p:spPr>
+          <a:xfrm>
+            <a:off x="457200" y="4919472"/>
+            <a:ext cx="11247120" cy="896112"/>
+          </a:xfrm>
+          <a:prstGeom prst="roundRect">
+            <a:avLst>
+              <a:gd name="adj" fmla="val 6122"/>
+            </a:avLst>
+          </a:prstGeom>
+          <a:solidFill>
+            <a:srgbClr val="F5EAE7"/>
+          </a:solidFill>
+          <a:ln w="12700">
+            <a:solidFill>
+              <a:srgbClr val="E7DFD5"/>
+            </a:solidFill>
+            <a:prstDash val="solid"/>
+          </a:ln>
+        </p:spPr>
+      </p:sp>
+      <p:sp>
+        <p:nvSpPr>
+          <p:cNvPr id="25" name="Text 23"/>
+          <p:cNvSpPr/>
+          <p:nvPr/>
+        </p:nvSpPr>
+        <p:spPr>
+          <a:xfrm>
+            <a:off x="566928" y="4965192"/>
+            <a:ext cx="2633472" cy="804672"/>
+          </a:xfrm>
+          <a:prstGeom prst="rect">
+            <a:avLst/>
+          </a:prstGeom>
+          <a:noFill/>
+          <a:ln/>
+        </p:spPr>
+        <p:txBody>
+          <a:bodyPr wrap="square" lIns="0" tIns="0" rIns="0" bIns="0" rtlCol="0" anchor="ctr"/>
+          <a:lstStyle/>
+          <a:p>
+            <a:pPr indent="0" marL="0">
+              <a:lnSpc>
+                <a:spcPct val="112000"/>
+              </a:lnSpc>
+              <a:buNone/>
+            </a:pPr>
+            <a:r>
+              <a:rPr lang="en-US" sz="1150" b="1" dirty="0">
+                <a:solidFill>
+                  <a:srgbClr val="9E2B25"/>
+                </a:solidFill>
+                <a:latin typeface="Microsoft YaHei" pitchFamily="34" charset="0"/>
+                <a:ea typeface="Microsoft YaHei" pitchFamily="34" charset="-122"/>
+                <a:cs typeface="Microsoft YaHei" pitchFamily="34" charset="-120"/>
+              </a:rPr>
+              <a:t>文籍典册 wendian.dicomp.net</a:t>
+            </a:r>
+            <a:endParaRPr lang="en-US" sz="1150" dirty="0"/>
+          </a:p>
+        </p:txBody>
+      </p:sp>
+      <p:sp>
+        <p:nvSpPr>
+          <p:cNvPr id="26" name="Text 24"/>
+          <p:cNvSpPr/>
+          <p:nvPr/>
+        </p:nvSpPr>
+        <p:spPr>
+          <a:xfrm>
+            <a:off x="3383280" y="4965192"/>
+            <a:ext cx="2907792" cy="804672"/>
+          </a:xfrm>
+          <a:prstGeom prst="rect">
+            <a:avLst/>
+          </a:prstGeom>
+          <a:noFill/>
+          <a:ln/>
+        </p:spPr>
+        <p:txBody>
+          <a:bodyPr wrap="square" lIns="0" tIns="0" rIns="0" bIns="0" rtlCol="0" anchor="ctr"/>
+          <a:lstStyle/>
+          <a:p>
+            <a:pPr indent="0" marL="0">
+              <a:lnSpc>
+                <a:spcPct val="112000"/>
+              </a:lnSpc>
+              <a:buNone/>
+            </a:pPr>
+            <a:r>
+              <a:rPr lang="en-US" sz="1050" dirty="0">
+                <a:solidFill>
+                  <a:srgbClr val="26201C"/>
+                </a:solidFill>
+                <a:latin typeface="Microsoft YaHei" pitchFamily="34" charset="0"/>
+                <a:ea typeface="Microsoft YaHei" pitchFamily="34" charset="-122"/>
+                <a:cs typeface="Microsoft YaHei" pitchFamily="34" charset="-120"/>
+              </a:rPr>
+              <a:t>外部站点</a:t>
+            </a:r>
+            <a:endParaRPr lang="en-US" sz="1050" dirty="0"/>
+          </a:p>
+        </p:txBody>
+      </p:sp>
+      <p:sp>
+        <p:nvSpPr>
+          <p:cNvPr id="27" name="Text 25"/>
+          <p:cNvSpPr/>
+          <p:nvPr/>
+        </p:nvSpPr>
+        <p:spPr>
+          <a:xfrm>
+            <a:off x="6492240" y="4965192"/>
+            <a:ext cx="5010912" cy="804672"/>
+          </a:xfrm>
+          <a:prstGeom prst="rect">
+            <a:avLst/>
+          </a:prstGeom>
+          <a:noFill/>
+          <a:ln/>
+        </p:spPr>
+        <p:txBody>
+          <a:bodyPr wrap="square" lIns="0" tIns="0" rIns="0" bIns="0" rtlCol="0" anchor="ctr"/>
+          <a:lstStyle/>
+          <a:p>
+            <a:pPr indent="0" marL="0">
+              <a:lnSpc>
+                <a:spcPct val="112000"/>
+              </a:lnSpc>
+              <a:buNone/>
+            </a:pPr>
+            <a:r>
+              <a:rPr lang="en-US" sz="1050" dirty="0">
+                <a:solidFill>
+                  <a:srgbClr val="26201C"/>
+                </a:solidFill>
+                <a:latin typeface="Microsoft YaHei" pitchFamily="34" charset="0"/>
+                <a:ea typeface="Microsoft YaHei" pitchFamily="34" charset="-122"/>
+                <a:cs typeface="Microsoft YaHei" pitchFamily="34" charset="-120"/>
+              </a:rPr>
+              <a:t>核验为 JavaScript 单页应用，未取到与本文档主张对应的正文 —— 按约定标注“不适用”，不作引用</a:t>
+            </a:r>
+            <a:endParaRPr lang="en-US" sz="1050" dirty="0"/>
+          </a:p>
+        </p:txBody>
+      </p:sp>
+      <p:sp>
+        <p:nvSpPr>
+          <p:cNvPr id="28" name="Text 26"/>
+          <p:cNvSpPr/>
+          <p:nvPr/>
+        </p:nvSpPr>
+        <p:spPr>
+          <a:xfrm>
+            <a:off x="457200" y="5870448"/>
+            <a:ext cx="11247120" cy="457200"/>
+          </a:xfrm>
+          <a:prstGeom prst="rect">
+            <a:avLst/>
+          </a:prstGeom>
+          <a:noFill/>
+          <a:ln/>
+        </p:spPr>
+        <p:txBody>
+          <a:bodyPr wrap="square" lIns="0" tIns="0" rIns="0" bIns="0" rtlCol="0" anchor="ctr"/>
+          <a:lstStyle/>
+          <a:p>
+            <a:pPr indent="0" marL="0">
+              <a:lnSpc>
+                <a:spcPct val="115000"/>
+              </a:lnSpc>
+              <a:buNone/>
+            </a:pPr>
+            <a:r>
+              <a:rPr lang="en-US" sz="1000" b="1" dirty="0">
+                <a:solidFill>
+                  <a:srgbClr val="9E2B25"/>
+                </a:solidFill>
+                <a:latin typeface="Microsoft YaHei" pitchFamily="34" charset="0"/>
+                <a:ea typeface="Microsoft YaHei" pitchFamily="34" charset="-122"/>
+                <a:cs typeface="Microsoft YaHei" pitchFamily="34" charset="-120"/>
+              </a:rPr>
+              <a:t>字体字号说明：</a:t>
+            </a:r>
+            <a:pPr indent="0" marL="0">
+              <a:lnSpc>
+                <a:spcPct val="115000"/>
+              </a:lnSpc>
+              <a:buNone/>
+            </a:pPr>
+            <a:r>
+              <a:rPr lang="en-US" sz="1000" dirty="0">
+                <a:solidFill>
+                  <a:srgbClr val="8C8178"/>
+                </a:solidFill>
+                <a:latin typeface="Microsoft YaHei" pitchFamily="34" charset="0"/>
+                <a:ea typeface="Microsoft YaHei" pitchFamily="34" charset="-122"/>
+                <a:cs typeface="Microsoft YaHei" pitchFamily="34" charset="-120"/>
+              </a:rPr>
+              <a:t>GJB 5100A-2017 属内部标准、未公开发行，上表字体字号取自公开整理的对应条款；如与标准正式文本有出入，以正式文本为准。文籍典册经核验无对应正文，故不引用。</a:t>
+            </a:r>
+            <a:endParaRPr lang="en-US" sz="1000" dirty="0"/>
+          </a:p>
+        </p:txBody>
+      </p:sp>
+    </p:spTree>
+  </p:cSld>
+  <p:clrMapOvr>
+    <a:masterClrMapping/>
+  </p:clrMapOvr>
+</p:sld>
+</file>
+
+<file path=ppt/slides/slide42.xml><?xml version="1.0" encoding="utf-8"?>
+<p:sld xmlns:a="http://schemas.openxmlformats.org/drawingml/2006/main" xmlns:r="http://schemas.openxmlformats.org/officeDocument/2006/relationships" xmlns:p="http://schemas.openxmlformats.org/presentationml/2006/main">
+  <p:cSld name="Slide 42">
+    <p:bg>
+      <p:bgPr>
+        <a:solidFill>
+          <a:srgbClr val="FFFFFF"/>
+        </a:solidFill>
+      </p:bgPr>
+    </p:bg>
+    <p:spTree>
+      <p:nvGrpSpPr>
+        <p:cNvPr id="1" name=""/>
+        <p:cNvGrpSpPr/>
+        <p:nvPr/>
+      </p:nvGrpSpPr>
+      <p:grpSpPr>
+        <a:xfrm>
+          <a:off x="0" y="0"/>
+          <a:ext cx="0" cy="0"/>
+          <a:chOff x="0" y="0"/>
+          <a:chExt cx="0" cy="0"/>
+        </a:xfrm>
+      </p:grpSpPr>
+      <p:sp>
+        <p:nvSpPr>
+          <p:cNvPr id="2" name="Shape 0"/>
+          <p:cNvSpPr/>
+          <p:nvPr/>
+        </p:nvSpPr>
+        <p:spPr>
+          <a:xfrm>
+            <a:off x="457200" y="384048"/>
+            <a:ext cx="347472" cy="347472"/>
+          </a:xfrm>
+          <a:prstGeom prst="roundRect">
+            <a:avLst>
+              <a:gd name="adj" fmla="val 10000"/>
+            </a:avLst>
+          </a:prstGeom>
+          <a:solidFill>
+            <a:srgbClr val="9E2B25"/>
+          </a:solidFill>
+          <a:ln/>
+        </p:spPr>
+      </p:sp>
+      <p:sp>
+        <p:nvSpPr>
+          <p:cNvPr id="3" name="Text 1"/>
+          <p:cNvSpPr/>
+          <p:nvPr/>
+        </p:nvSpPr>
+        <p:spPr>
+          <a:xfrm>
+            <a:off x="457200" y="373624"/>
+            <a:ext cx="347472" cy="347472"/>
+          </a:xfrm>
+          <a:prstGeom prst="rect">
+            <a:avLst/>
+          </a:prstGeom>
+          <a:noFill/>
+          <a:ln/>
+        </p:spPr>
+        <p:txBody>
+          <a:bodyPr wrap="square" lIns="0" tIns="0" rIns="0" bIns="0" rtlCol="0" anchor="ctr"/>
+          <a:lstStyle/>
+          <a:p>
+            <a:pPr algn="ctr" indent="0" marL="0">
+              <a:buNone/>
+            </a:pPr>
+            <a:r>
+              <a:rPr lang="en-US" sz="1400" b="1" dirty="0">
+                <a:solidFill>
+                  <a:srgbClr val="FFFFFF"/>
+                </a:solidFill>
+                <a:latin typeface="Microsoft YaHei" pitchFamily="34" charset="0"/>
+                <a:ea typeface="Microsoft YaHei" pitchFamily="34" charset="-122"/>
+                <a:cs typeface="Microsoft YaHei" pitchFamily="34" charset="-120"/>
+              </a:rPr>
+              <a:t>文</a:t>
+            </a:r>
+            <a:endParaRPr lang="en-US" sz="1400" dirty="0"/>
+          </a:p>
+        </p:txBody>
+      </p:sp>
+      <p:sp>
+        <p:nvSpPr>
+          <p:cNvPr id="4" name="Text 2"/>
+          <p:cNvSpPr/>
+          <p:nvPr/>
+        </p:nvSpPr>
+        <p:spPr>
+          <a:xfrm>
+            <a:off x="914400" y="384048"/>
+            <a:ext cx="7315200" cy="347472"/>
+          </a:xfrm>
+          <a:prstGeom prst="rect">
+            <a:avLst/>
+          </a:prstGeom>
+          <a:noFill/>
+          <a:ln/>
+        </p:spPr>
+        <p:txBody>
+          <a:bodyPr wrap="square" lIns="0" tIns="0" rIns="0" bIns="0" rtlCol="0" anchor="ctr"/>
+          <a:lstStyle/>
+          <a:p>
+            <a:pPr indent="0" marL="0">
+              <a:buNone/>
+            </a:pPr>
+            <a:r>
+              <a:rPr lang="en-US" sz="1200" b="1" spc="200" kern="0" dirty="0">
+                <a:solidFill>
+                  <a:srgbClr val="9E2B25"/>
+                </a:solidFill>
+                <a:latin typeface="Microsoft YaHei" pitchFamily="34" charset="0"/>
+                <a:ea typeface="Microsoft YaHei" pitchFamily="34" charset="-122"/>
+                <a:cs typeface="Microsoft YaHei" pitchFamily="34" charset="-120"/>
+              </a:rPr>
+              <a:t>07 交付、质量与生态</a:t>
+            </a:r>
+            <a:endParaRPr lang="en-US" sz="1200" dirty="0"/>
+          </a:p>
+        </p:txBody>
+      </p:sp>
+      <p:sp>
+        <p:nvSpPr>
+          <p:cNvPr id="5" name="Text 3"/>
+          <p:cNvSpPr/>
+          <p:nvPr/>
+        </p:nvSpPr>
+        <p:spPr>
+          <a:xfrm>
+            <a:off x="457200" y="841248"/>
+            <a:ext cx="11274552" cy="566928"/>
+          </a:xfrm>
+          <a:prstGeom prst="rect">
+            <a:avLst/>
+          </a:prstGeom>
+          <a:noFill/>
+          <a:ln/>
+        </p:spPr>
+        <p:txBody>
+          <a:bodyPr wrap="square" lIns="0" tIns="0" rIns="0" bIns="0" rtlCol="0" anchor="ctr"/>
+          <a:lstStyle/>
+          <a:p>
+            <a:pPr indent="0" marL="0">
+              <a:buNone/>
+            </a:pPr>
+            <a:r>
+              <a:rPr lang="en-US" sz="2600" b="1" dirty="0">
+                <a:solidFill>
+                  <a:srgbClr val="26201C"/>
+                </a:solidFill>
+                <a:latin typeface="Microsoft YaHei" pitchFamily="34" charset="0"/>
+                <a:ea typeface="Microsoft YaHei" pitchFamily="34" charset="-122"/>
+                <a:cs typeface="Microsoft YaHei" pitchFamily="34" charset="-120"/>
+              </a:rPr>
+              <a:t>代码审查：请一把外部尺子，把 39,358 行逐一过筛</a:t>
+            </a:r>
+            <a:endParaRPr lang="en-US" sz="2600" dirty="0"/>
+          </a:p>
+        </p:txBody>
+      </p:sp>
+      <p:sp>
+        <p:nvSpPr>
+          <p:cNvPr id="6" name="Text 4"/>
+          <p:cNvSpPr/>
+          <p:nvPr/>
+        </p:nvSpPr>
+        <p:spPr>
+          <a:xfrm>
+            <a:off x="11137392" y="6382512"/>
+            <a:ext cx="594360" cy="292608"/>
+          </a:xfrm>
+          <a:prstGeom prst="rect">
+            <a:avLst/>
+          </a:prstGeom>
+          <a:noFill/>
+          <a:ln/>
+        </p:spPr>
+        <p:txBody>
+          <a:bodyPr wrap="square" lIns="0" tIns="0" rIns="0" bIns="0" rtlCol="0" anchor="ctr"/>
+          <a:lstStyle/>
+          <a:p>
+            <a:pPr algn="r" indent="0" marL="0">
+              <a:buNone/>
+            </a:pPr>
+            <a:r>
+              <a:rPr lang="en-US" sz="1200" dirty="0">
+                <a:solidFill>
+                  <a:srgbClr val="8C8178"/>
+                </a:solidFill>
+                <a:latin typeface="Microsoft YaHei" pitchFamily="34" charset="0"/>
+                <a:ea typeface="Microsoft YaHei" pitchFamily="34" charset="-122"/>
+                <a:cs typeface="Microsoft YaHei" pitchFamily="34" charset="-120"/>
+              </a:rPr>
+              <a:t>42</a:t>
+            </a:r>
+            <a:endParaRPr lang="en-US" sz="1200" dirty="0"/>
+          </a:p>
+        </p:txBody>
+      </p:sp>
+      <p:sp>
+        <p:nvSpPr>
+          <p:cNvPr id="7" name="Text 5"/>
+          <p:cNvSpPr/>
+          <p:nvPr/>
+        </p:nvSpPr>
+        <p:spPr>
+          <a:xfrm>
+            <a:off x="457200" y="6382512"/>
+            <a:ext cx="2926080" cy="292608"/>
+          </a:xfrm>
+          <a:prstGeom prst="rect">
+            <a:avLst/>
+          </a:prstGeom>
+          <a:noFill/>
+          <a:ln/>
+        </p:spPr>
+        <p:txBody>
+          <a:bodyPr wrap="square" lIns="0" tIns="0" rIns="0" bIns="0" rtlCol="0" anchor="ctr"/>
+          <a:lstStyle/>
+          <a:p>
+            <a:pPr indent="0" marL="0">
+              <a:buNone/>
+            </a:pPr>
+            <a:r>
+              <a:rPr lang="en-US" sz="1200" dirty="0">
+                <a:solidFill>
+                  <a:srgbClr val="8C8178"/>
+                </a:solidFill>
+                <a:latin typeface="Microsoft YaHei" pitchFamily="34" charset="0"/>
+                <a:ea typeface="Microsoft YaHei" pitchFamily="34" charset="-122"/>
+                <a:cs typeface="Microsoft YaHei" pitchFamily="34" charset="-120"/>
+              </a:rPr>
+              <a:t>公文汇编助手 · 系统介绍</a:t>
+            </a:r>
+            <a:endParaRPr lang="en-US" sz="1200" dirty="0"/>
+          </a:p>
+        </p:txBody>
+      </p:sp>
+      <p:sp>
+        <p:nvSpPr>
+          <p:cNvPr id="8" name="Shape 6"/>
+          <p:cNvSpPr/>
+          <p:nvPr/>
+        </p:nvSpPr>
+        <p:spPr>
+          <a:xfrm>
+            <a:off x="457200" y="1600200"/>
+            <a:ext cx="5394960" cy="4480560"/>
+          </a:xfrm>
+          <a:prstGeom prst="roundRect">
+            <a:avLst>
+              <a:gd name="adj" fmla="val 1633"/>
+            </a:avLst>
+          </a:prstGeom>
+          <a:solidFill>
+            <a:srgbClr val="F8F4EE"/>
+          </a:solidFill>
+          <a:ln w="12700">
+            <a:solidFill>
+              <a:srgbClr val="E7DFD5"/>
+            </a:solidFill>
+            <a:prstDash val="solid"/>
+          </a:ln>
+        </p:spPr>
+      </p:sp>
+      <p:sp>
+        <p:nvSpPr>
+          <p:cNvPr id="9" name="Text 7"/>
+          <p:cNvSpPr/>
+          <p:nvPr/>
+        </p:nvSpPr>
+        <p:spPr>
+          <a:xfrm>
+            <a:off x="713232" y="1783080"/>
+            <a:ext cx="4846320" cy="365760"/>
+          </a:xfrm>
+          <a:prstGeom prst="rect">
+            <a:avLst/>
+          </a:prstGeom>
+          <a:noFill/>
+          <a:ln/>
+        </p:spPr>
+        <p:txBody>
+          <a:bodyPr wrap="square" lIns="0" tIns="0" rIns="0" bIns="0" rtlCol="0" anchor="ctr"/>
+          <a:lstStyle/>
+          <a:p>
+            <a:pPr indent="0" marL="0">
+              <a:buNone/>
+            </a:pPr>
+            <a:r>
+              <a:rPr lang="en-US" sz="1500" b="1" dirty="0">
+                <a:solidFill>
+                  <a:srgbClr val="9E2B25"/>
+                </a:solidFill>
+                <a:latin typeface="Microsoft YaHei" pitchFamily="34" charset="0"/>
+                <a:ea typeface="Microsoft YaHei" pitchFamily="34" charset="-122"/>
+                <a:cs typeface="Microsoft YaHei" pitchFamily="34" charset="-120"/>
+              </a:rPr>
+              <a:t>怎么审的</a:t>
+            </a:r>
+            <a:endParaRPr lang="en-US" sz="1500" dirty="0"/>
+          </a:p>
+        </p:txBody>
+      </p:sp>
+      <p:sp>
+        <p:nvSpPr>
+          <p:cNvPr id="10" name="Shape 8"/>
+          <p:cNvSpPr/>
+          <p:nvPr/>
+        </p:nvSpPr>
+        <p:spPr>
+          <a:xfrm>
+            <a:off x="713232" y="2322576"/>
+            <a:ext cx="100584" cy="100584"/>
+          </a:xfrm>
+          <a:prstGeom prst="rect">
+            <a:avLst/>
+          </a:prstGeom>
+          <a:solidFill>
+            <a:srgbClr val="9E2B25"/>
+          </a:solidFill>
+          <a:ln/>
+        </p:spPr>
+      </p:sp>
+      <p:sp>
+        <p:nvSpPr>
+          <p:cNvPr id="11" name="Text 9"/>
+          <p:cNvSpPr/>
+          <p:nvPr/>
+        </p:nvSpPr>
+        <p:spPr>
+          <a:xfrm>
+            <a:off x="950976" y="2240280"/>
+            <a:ext cx="4700016" cy="731520"/>
+          </a:xfrm>
+          <a:prstGeom prst="rect">
+            <a:avLst/>
+          </a:prstGeom>
+          <a:noFill/>
+          <a:ln/>
+        </p:spPr>
+        <p:txBody>
+          <a:bodyPr wrap="square" lIns="0" tIns="0" rIns="0" bIns="0" rtlCol="0" anchor="t"/>
+          <a:lstStyle/>
+          <a:p>
+            <a:pPr indent="0" marL="0">
+              <a:lnSpc>
+                <a:spcPct val="112000"/>
+              </a:lnSpc>
+              <a:buNone/>
+            </a:pPr>
+            <a:r>
+              <a:rPr lang="en-US" sz="1300" b="1" dirty="0">
+                <a:solidFill>
+                  <a:srgbClr val="26201C"/>
+                </a:solidFill>
+                <a:latin typeface="Microsoft YaHei" pitchFamily="34" charset="0"/>
+                <a:ea typeface="Microsoft YaHei" pitchFamily="34" charset="-122"/>
+                <a:cs typeface="Microsoft YaHei" pitchFamily="34" charset="-120"/>
+              </a:rPr>
+              <a:t>工具</a:t>
+            </a:r>
+            <a:pPr indent="0" marL="0">
+              <a:lnSpc>
+                <a:spcPct val="112000"/>
+              </a:lnSpc>
+              <a:buNone/>
+            </a:pPr>
+            <a:r>
+              <a:rPr lang="en-US" sz="1150" dirty="0">
+                <a:solidFill>
+                  <a:srgbClr val="8C8178"/>
+                </a:solidFill>
+                <a:latin typeface="Microsoft YaHei" pitchFamily="34" charset="0"/>
+                <a:ea typeface="Microsoft YaHei" pitchFamily="34" charset="-122"/>
+                <a:cs typeface="Microsoft YaHei" pitchFamily="34" charset="-120"/>
+              </a:rPr>
+              <a:t>　alibaba/open-code-review（混合架构：确定性流水线 + LLM）</a:t>
+            </a:r>
+            <a:endParaRPr lang="en-US" sz="1300" dirty="0"/>
+          </a:p>
+        </p:txBody>
+      </p:sp>
+      <p:sp>
+        <p:nvSpPr>
+          <p:cNvPr id="12" name="Shape 10"/>
+          <p:cNvSpPr/>
+          <p:nvPr/>
+        </p:nvSpPr>
+        <p:spPr>
+          <a:xfrm>
+            <a:off x="713232" y="3163824"/>
+            <a:ext cx="100584" cy="100584"/>
+          </a:xfrm>
+          <a:prstGeom prst="rect">
+            <a:avLst/>
+          </a:prstGeom>
+          <a:solidFill>
+            <a:srgbClr val="9E2B25"/>
+          </a:solidFill>
+          <a:ln/>
+        </p:spPr>
+      </p:sp>
+      <p:sp>
+        <p:nvSpPr>
+          <p:cNvPr id="13" name="Text 11"/>
+          <p:cNvSpPr/>
+          <p:nvPr/>
+        </p:nvSpPr>
+        <p:spPr>
+          <a:xfrm>
+            <a:off x="950976" y="3081528"/>
+            <a:ext cx="4700016" cy="731520"/>
+          </a:xfrm>
+          <a:prstGeom prst="rect">
+            <a:avLst/>
+          </a:prstGeom>
+          <a:noFill/>
+          <a:ln/>
+        </p:spPr>
+        <p:txBody>
+          <a:bodyPr wrap="square" lIns="0" tIns="0" rIns="0" bIns="0" rtlCol="0" anchor="t"/>
+          <a:lstStyle/>
+          <a:p>
+            <a:pPr indent="0" marL="0">
+              <a:lnSpc>
+                <a:spcPct val="112000"/>
+              </a:lnSpc>
+              <a:buNone/>
+            </a:pPr>
+            <a:r>
+              <a:rPr lang="en-US" sz="1300" b="1" dirty="0">
+                <a:solidFill>
+                  <a:srgbClr val="26201C"/>
+                </a:solidFill>
+                <a:latin typeface="Microsoft YaHei" pitchFamily="34" charset="0"/>
+                <a:ea typeface="Microsoft YaHei" pitchFamily="34" charset="-122"/>
+                <a:cs typeface="Microsoft YaHei" pitchFamily="34" charset="-120"/>
+              </a:rPr>
+              <a:t>范围</a:t>
+            </a:r>
+            <a:pPr indent="0" marL="0">
+              <a:lnSpc>
+                <a:spcPct val="112000"/>
+              </a:lnSpc>
+              <a:buNone/>
+            </a:pPr>
+            <a:r>
+              <a:rPr lang="en-US" sz="1150" dirty="0">
+                <a:solidFill>
+                  <a:srgbClr val="8C8178"/>
+                </a:solidFill>
+                <a:latin typeface="Microsoft YaHei" pitchFamily="34" charset="0"/>
+                <a:ea typeface="Microsoft YaHei" pitchFamily="34" charset="-122"/>
+                <a:cs typeface="Microsoft YaHei" pitchFamily="34" charset="-120"/>
+              </a:rPr>
+              <a:t>　161 个文件 / 39,358 行（产品码 76 个模块优先）</a:t>
+            </a:r>
+            <a:endParaRPr lang="en-US" sz="1300" dirty="0"/>
+          </a:p>
+        </p:txBody>
+      </p:sp>
+      <p:sp>
+        <p:nvSpPr>
+          <p:cNvPr id="14" name="Shape 12"/>
+          <p:cNvSpPr/>
+          <p:nvPr/>
+        </p:nvSpPr>
+        <p:spPr>
+          <a:xfrm>
+            <a:off x="713232" y="4005072"/>
+            <a:ext cx="100584" cy="100584"/>
+          </a:xfrm>
+          <a:prstGeom prst="rect">
+            <a:avLst/>
+          </a:prstGeom>
+          <a:solidFill>
+            <a:srgbClr val="9E2B25"/>
+          </a:solidFill>
+          <a:ln/>
+        </p:spPr>
+      </p:sp>
+      <p:sp>
+        <p:nvSpPr>
+          <p:cNvPr id="15" name="Text 13"/>
+          <p:cNvSpPr/>
+          <p:nvPr/>
+        </p:nvSpPr>
+        <p:spPr>
+          <a:xfrm>
+            <a:off x="950976" y="3922776"/>
+            <a:ext cx="4700016" cy="731520"/>
+          </a:xfrm>
+          <a:prstGeom prst="rect">
+            <a:avLst/>
+          </a:prstGeom>
+          <a:noFill/>
+          <a:ln/>
+        </p:spPr>
+        <p:txBody>
+          <a:bodyPr wrap="square" lIns="0" tIns="0" rIns="0" bIns="0" rtlCol="0" anchor="t"/>
+          <a:lstStyle/>
+          <a:p>
+            <a:pPr indent="0" marL="0">
+              <a:lnSpc>
+                <a:spcPct val="112000"/>
+              </a:lnSpc>
+              <a:buNone/>
+            </a:pPr>
+            <a:r>
+              <a:rPr lang="en-US" sz="1300" b="1" dirty="0">
+                <a:solidFill>
+                  <a:srgbClr val="26201C"/>
+                </a:solidFill>
+                <a:latin typeface="Microsoft YaHei" pitchFamily="34" charset="0"/>
+                <a:ea typeface="Microsoft YaHei" pitchFamily="34" charset="-122"/>
+                <a:cs typeface="Microsoft YaHei" pitchFamily="34" charset="-120"/>
+              </a:rPr>
+              <a:t>规则</a:t>
+            </a:r>
+            <a:pPr indent="0" marL="0">
+              <a:lnSpc>
+                <a:spcPct val="112000"/>
+              </a:lnSpc>
+              <a:buNone/>
+            </a:pPr>
+            <a:r>
+              <a:rPr lang="en-US" sz="1150" dirty="0">
+                <a:solidFill>
+                  <a:srgbClr val="8C8178"/>
+                </a:solidFill>
+                <a:latin typeface="Microsoft YaHei" pitchFamily="34" charset="0"/>
+                <a:ea typeface="Microsoft YaHei" pitchFamily="34" charset="-122"/>
+                <a:cs typeface="Microsoft YaHei" pitchFamily="34" charset="-120"/>
+              </a:rPr>
+              <a:t>　内置 11 大类：异常处理 / 边界情形 / 资源管理 / 并发 / 安全…</a:t>
+            </a:r>
+            <a:endParaRPr lang="en-US" sz="1300" dirty="0"/>
+          </a:p>
+        </p:txBody>
+      </p:sp>
+      <p:sp>
+        <p:nvSpPr>
+          <p:cNvPr id="16" name="Shape 14"/>
+          <p:cNvSpPr/>
+          <p:nvPr/>
+        </p:nvSpPr>
+        <p:spPr>
+          <a:xfrm>
+            <a:off x="713232" y="4846320"/>
+            <a:ext cx="100584" cy="100584"/>
+          </a:xfrm>
+          <a:prstGeom prst="rect">
+            <a:avLst/>
+          </a:prstGeom>
+          <a:solidFill>
+            <a:srgbClr val="9E2B25"/>
+          </a:solidFill>
+          <a:ln/>
+        </p:spPr>
+      </p:sp>
+      <p:sp>
+        <p:nvSpPr>
+          <p:cNvPr id="17" name="Text 15"/>
+          <p:cNvSpPr/>
+          <p:nvPr/>
+        </p:nvSpPr>
+        <p:spPr>
+          <a:xfrm>
+            <a:off x="950976" y="4764024"/>
+            <a:ext cx="4700016" cy="731520"/>
+          </a:xfrm>
+          <a:prstGeom prst="rect">
+            <a:avLst/>
+          </a:prstGeom>
+          <a:noFill/>
+          <a:ln/>
+        </p:spPr>
+        <p:txBody>
+          <a:bodyPr wrap="square" lIns="0" tIns="0" rIns="0" bIns="0" rtlCol="0" anchor="t"/>
+          <a:lstStyle/>
+          <a:p>
+            <a:pPr indent="0" marL="0">
+              <a:lnSpc>
+                <a:spcPct val="112000"/>
+              </a:lnSpc>
+              <a:buNone/>
+            </a:pPr>
+            <a:r>
+              <a:rPr lang="en-US" sz="1300" b="1" dirty="0">
+                <a:solidFill>
+                  <a:srgbClr val="26201C"/>
+                </a:solidFill>
+                <a:latin typeface="Microsoft YaHei" pitchFamily="34" charset="0"/>
+                <a:ea typeface="Microsoft YaHei" pitchFamily="34" charset="-122"/>
+                <a:cs typeface="Microsoft YaHei" pitchFamily="34" charset="-120"/>
+              </a:rPr>
+              <a:t>方法</a:t>
+            </a:r>
+            <a:pPr indent="0" marL="0">
+              <a:lnSpc>
+                <a:spcPct val="112000"/>
+              </a:lnSpc>
+              <a:buNone/>
+            </a:pPr>
+            <a:r>
+              <a:rPr lang="en-US" sz="1150" dirty="0">
+                <a:solidFill>
+                  <a:srgbClr val="8C8178"/>
+                </a:solidFill>
+                <a:latin typeface="Microsoft YaHei" pitchFamily="34" charset="0"/>
+                <a:ea typeface="Microsoft YaHei" pitchFamily="34" charset="-122"/>
+                <a:cs typeface="Microsoft YaHei" pitchFamily="34" charset="-120"/>
+              </a:rPr>
+              <a:t>　先机检全量候选，再逐条读上下文判真伪</a:t>
+            </a:r>
+            <a:endParaRPr lang="en-US" sz="1300" dirty="0"/>
+          </a:p>
+        </p:txBody>
+      </p:sp>
+      <p:sp>
+        <p:nvSpPr>
+          <p:cNvPr id="18" name="Text 16"/>
+          <p:cNvSpPr/>
+          <p:nvPr/>
+        </p:nvSpPr>
+        <p:spPr>
+          <a:xfrm>
+            <a:off x="713232" y="5532120"/>
+            <a:ext cx="4937760" cy="457200"/>
+          </a:xfrm>
+          <a:prstGeom prst="rect">
+            <a:avLst/>
+          </a:prstGeom>
+          <a:noFill/>
+          <a:ln/>
+        </p:spPr>
+        <p:txBody>
+          <a:bodyPr wrap="square" lIns="0" tIns="0" rIns="0" bIns="0" rtlCol="0" anchor="ctr"/>
+          <a:lstStyle/>
+          <a:p>
+            <a:pPr indent="0" marL="0">
+              <a:lnSpc>
+                <a:spcPct val="115000"/>
+              </a:lnSpc>
+              <a:buNone/>
+            </a:pPr>
+            <a:r>
+              <a:rPr lang="en-US" sz="1000" b="1" dirty="0">
+                <a:solidFill>
+                  <a:srgbClr val="9E2B25"/>
+                </a:solidFill>
+                <a:latin typeface="Microsoft YaHei" pitchFamily="34" charset="0"/>
+                <a:ea typeface="Microsoft YaHei" pitchFamily="34" charset="-122"/>
+                <a:cs typeface="Microsoft YaHei" pitchFamily="34" charset="-120"/>
+              </a:rPr>
+              <a:t>诚实说明：</a:t>
+            </a:r>
+            <a:pPr indent="0" marL="0">
+              <a:lnSpc>
+                <a:spcPct val="115000"/>
+              </a:lnSpc>
+              <a:buNone/>
+            </a:pPr>
+            <a:r>
+              <a:rPr lang="en-US" sz="1000" dirty="0">
+                <a:solidFill>
+                  <a:srgbClr val="8C8178"/>
+                </a:solidFill>
+                <a:latin typeface="Microsoft YaHei" pitchFamily="34" charset="0"/>
+                <a:ea typeface="Microsoft YaHei" pitchFamily="34" charset="-122"/>
+                <a:cs typeface="Microsoft YaHei" pitchFamily="34" charset="-120"/>
+              </a:rPr>
+              <a:t>工具内置 LLM（deepseek）密钥余额为 0，故改用其官方 delegate 模式 —— 由工具出规则集，由本机 AI 完成推理。</a:t>
+            </a:r>
+            <a:endParaRPr lang="en-US" sz="1000" dirty="0"/>
+          </a:p>
+        </p:txBody>
+      </p:sp>
+      <p:sp>
+        <p:nvSpPr>
+          <p:cNvPr id="19" name="Shape 17"/>
+          <p:cNvSpPr/>
+          <p:nvPr/>
+        </p:nvSpPr>
+        <p:spPr>
+          <a:xfrm>
+            <a:off x="6172200" y="1600200"/>
+            <a:ext cx="5559552" cy="4480560"/>
+          </a:xfrm>
+          <a:prstGeom prst="roundRect">
+            <a:avLst>
+              <a:gd name="adj" fmla="val 1633"/>
+            </a:avLst>
+          </a:prstGeom>
+          <a:solidFill>
+            <a:srgbClr val="1F1917"/>
+          </a:solidFill>
+          <a:ln/>
+        </p:spPr>
+      </p:sp>
+      <p:sp>
+        <p:nvSpPr>
+          <p:cNvPr id="20" name="Text 18"/>
+          <p:cNvSpPr/>
+          <p:nvPr/>
+        </p:nvSpPr>
+        <p:spPr>
+          <a:xfrm>
+            <a:off x="6428232" y="1783080"/>
+            <a:ext cx="5029200" cy="365760"/>
+          </a:xfrm>
+          <a:prstGeom prst="rect">
+            <a:avLst/>
+          </a:prstGeom>
+          <a:noFill/>
+          <a:ln/>
+        </p:spPr>
+        <p:txBody>
+          <a:bodyPr wrap="square" lIns="0" tIns="0" rIns="0" bIns="0" rtlCol="0" anchor="ctr"/>
+          <a:lstStyle/>
+          <a:p>
+            <a:pPr indent="0" marL="0">
+              <a:buNone/>
+            </a:pPr>
+            <a:r>
+              <a:rPr lang="en-US" sz="1500" b="1" dirty="0">
+                <a:solidFill>
+                  <a:srgbClr val="F2D8A0"/>
+                </a:solidFill>
+                <a:latin typeface="Microsoft YaHei" pitchFamily="34" charset="0"/>
+                <a:ea typeface="Microsoft YaHei" pitchFamily="34" charset="-122"/>
+                <a:cs typeface="Microsoft YaHei" pitchFamily="34" charset="-120"/>
+              </a:rPr>
+              <a:t>审出了什么</a:t>
+            </a:r>
+            <a:endParaRPr lang="en-US" sz="1500" dirty="0"/>
+          </a:p>
+        </p:txBody>
+      </p:sp>
+      <p:sp>
+        <p:nvSpPr>
+          <p:cNvPr id="21" name="Text 19"/>
+          <p:cNvSpPr/>
+          <p:nvPr/>
+        </p:nvSpPr>
+        <p:spPr>
+          <a:xfrm>
+            <a:off x="6428232" y="2267712"/>
+            <a:ext cx="2834640" cy="365760"/>
+          </a:xfrm>
+          <a:prstGeom prst="rect">
+            <a:avLst/>
+          </a:prstGeom>
+          <a:noFill/>
+          <a:ln/>
+        </p:spPr>
+        <p:txBody>
+          <a:bodyPr wrap="square" lIns="0" tIns="0" rIns="0" bIns="0" rtlCol="0" anchor="ctr"/>
+          <a:lstStyle/>
+          <a:p>
+            <a:pPr indent="0" marL="0">
+              <a:buNone/>
+            </a:pPr>
+            <a:r>
+              <a:rPr lang="en-US" sz="1250" dirty="0">
+                <a:solidFill>
+                  <a:srgbClr val="EFE7DE"/>
+                </a:solidFill>
+                <a:latin typeface="Microsoft YaHei" pitchFamily="34" charset="0"/>
+                <a:ea typeface="Microsoft YaHei" pitchFamily="34" charset="-122"/>
+                <a:cs typeface="Microsoft YaHei" pitchFamily="34" charset="-120"/>
+              </a:rPr>
+              <a:t>原始候选</a:t>
+            </a:r>
+            <a:endParaRPr lang="en-US" sz="1250" dirty="0"/>
+          </a:p>
+        </p:txBody>
+      </p:sp>
+      <p:sp>
+        <p:nvSpPr>
+          <p:cNvPr id="22" name="Text 20"/>
+          <p:cNvSpPr/>
+          <p:nvPr/>
+        </p:nvSpPr>
+        <p:spPr>
+          <a:xfrm>
+            <a:off x="9235440" y="2267712"/>
+            <a:ext cx="914400" cy="365760"/>
+          </a:xfrm>
+          <a:prstGeom prst="rect">
+            <a:avLst/>
+          </a:prstGeom>
+          <a:noFill/>
+          <a:ln/>
+        </p:spPr>
+        <p:txBody>
+          <a:bodyPr wrap="square" lIns="0" tIns="0" rIns="0" bIns="0" rtlCol="0" anchor="ctr"/>
+          <a:lstStyle/>
+          <a:p>
+            <a:pPr algn="r" indent="0" marL="0">
+              <a:buNone/>
+            </a:pPr>
+            <a:r>
+              <a:rPr lang="en-US" sz="1500" b="1" dirty="0">
+                <a:solidFill>
+                  <a:srgbClr val="A99C90"/>
+                </a:solidFill>
+                <a:latin typeface="Microsoft YaHei" pitchFamily="34" charset="0"/>
+                <a:ea typeface="Microsoft YaHei" pitchFamily="34" charset="-122"/>
+                <a:cs typeface="Microsoft YaHei" pitchFamily="34" charset="-120"/>
+              </a:rPr>
+              <a:t>2368</a:t>
+            </a:r>
+            <a:endParaRPr lang="en-US" sz="1500" dirty="0"/>
+          </a:p>
+        </p:txBody>
+      </p:sp>
+      <p:sp>
+        <p:nvSpPr>
+          <p:cNvPr id="23" name="Text 21"/>
+          <p:cNvSpPr/>
+          <p:nvPr/>
+        </p:nvSpPr>
+        <p:spPr>
+          <a:xfrm>
+            <a:off x="6428232" y="2743200"/>
+            <a:ext cx="2834640" cy="365760"/>
+          </a:xfrm>
+          <a:prstGeom prst="rect">
+            <a:avLst/>
+          </a:prstGeom>
+          <a:noFill/>
+          <a:ln/>
+        </p:spPr>
+        <p:txBody>
+          <a:bodyPr wrap="square" lIns="0" tIns="0" rIns="0" bIns="0" rtlCol="0" anchor="ctr"/>
+          <a:lstStyle/>
+          <a:p>
+            <a:pPr indent="0" marL="0">
+              <a:buNone/>
+            </a:pPr>
+            <a:r>
+              <a:rPr lang="en-US" sz="1250" dirty="0">
+                <a:solidFill>
+                  <a:srgbClr val="EFE7DE"/>
+                </a:solidFill>
+                <a:latin typeface="Microsoft YaHei" pitchFamily="34" charset="0"/>
+                <a:ea typeface="Microsoft YaHei" pitchFamily="34" charset="-122"/>
+                <a:cs typeface="Microsoft YaHei" pitchFamily="34" charset="-120"/>
+              </a:rPr>
+              <a:t>生产代码候选</a:t>
+            </a:r>
+            <a:endParaRPr lang="en-US" sz="1250" dirty="0"/>
+          </a:p>
+        </p:txBody>
+      </p:sp>
+      <p:sp>
+        <p:nvSpPr>
+          <p:cNvPr id="24" name="Text 22"/>
+          <p:cNvSpPr/>
+          <p:nvPr/>
+        </p:nvSpPr>
+        <p:spPr>
+          <a:xfrm>
+            <a:off x="9235440" y="2743200"/>
+            <a:ext cx="914400" cy="365760"/>
+          </a:xfrm>
+          <a:prstGeom prst="rect">
+            <a:avLst/>
+          </a:prstGeom>
+          <a:noFill/>
+          <a:ln/>
+        </p:spPr>
+        <p:txBody>
+          <a:bodyPr wrap="square" lIns="0" tIns="0" rIns="0" bIns="0" rtlCol="0" anchor="ctr"/>
+          <a:lstStyle/>
+          <a:p>
+            <a:pPr algn="r" indent="0" marL="0">
+              <a:buNone/>
+            </a:pPr>
+            <a:r>
+              <a:rPr lang="en-US" sz="1500" b="1" dirty="0">
+                <a:solidFill>
+                  <a:srgbClr val="EFE7DE"/>
+                </a:solidFill>
+                <a:latin typeface="Microsoft YaHei" pitchFamily="34" charset="0"/>
+                <a:ea typeface="Microsoft YaHei" pitchFamily="34" charset="-122"/>
+                <a:cs typeface="Microsoft YaHei" pitchFamily="34" charset="-120"/>
+              </a:rPr>
+              <a:t>82</a:t>
+            </a:r>
+            <a:endParaRPr lang="en-US" sz="1500" dirty="0"/>
+          </a:p>
+        </p:txBody>
+      </p:sp>
+      <p:sp>
+        <p:nvSpPr>
+          <p:cNvPr id="25" name="Text 23"/>
+          <p:cNvSpPr/>
+          <p:nvPr/>
+        </p:nvSpPr>
+        <p:spPr>
+          <a:xfrm>
+            <a:off x="6428232" y="3218688"/>
+            <a:ext cx="2834640" cy="365760"/>
+          </a:xfrm>
+          <a:prstGeom prst="rect">
+            <a:avLst/>
+          </a:prstGeom>
+          <a:noFill/>
+          <a:ln/>
+        </p:spPr>
+        <p:txBody>
+          <a:bodyPr wrap="square" lIns="0" tIns="0" rIns="0" bIns="0" rtlCol="0" anchor="ctr"/>
+          <a:lstStyle/>
+          <a:p>
+            <a:pPr indent="0" marL="0">
+              <a:buNone/>
+            </a:pPr>
+            <a:r>
+              <a:rPr lang="en-US" sz="1250" dirty="0">
+                <a:solidFill>
+                  <a:srgbClr val="EFE7DE"/>
+                </a:solidFill>
+                <a:latin typeface="Microsoft YaHei" pitchFamily="34" charset="0"/>
+                <a:ea typeface="Microsoft YaHei" pitchFamily="34" charset="-122"/>
+                <a:cs typeface="Microsoft YaHei" pitchFamily="34" charset="-120"/>
+              </a:rPr>
+              <a:t>确认缺陷 · 已修</a:t>
+            </a:r>
+            <a:endParaRPr lang="en-US" sz="1250" dirty="0"/>
+          </a:p>
+        </p:txBody>
+      </p:sp>
+      <p:sp>
+        <p:nvSpPr>
+          <p:cNvPr id="26" name="Text 24"/>
+          <p:cNvSpPr/>
+          <p:nvPr/>
+        </p:nvSpPr>
+        <p:spPr>
+          <a:xfrm>
+            <a:off x="9235440" y="3218688"/>
+            <a:ext cx="914400" cy="365760"/>
+          </a:xfrm>
+          <a:prstGeom prst="rect">
+            <a:avLst/>
+          </a:prstGeom>
+          <a:noFill/>
+          <a:ln/>
+        </p:spPr>
+        <p:txBody>
+          <a:bodyPr wrap="square" lIns="0" tIns="0" rIns="0" bIns="0" rtlCol="0" anchor="ctr"/>
+          <a:lstStyle/>
+          <a:p>
+            <a:pPr algn="r" indent="0" marL="0">
+              <a:buNone/>
+            </a:pPr>
+            <a:r>
+              <a:rPr lang="en-US" sz="1900" b="1" dirty="0">
+                <a:solidFill>
+                  <a:srgbClr val="C9A227"/>
+                </a:solidFill>
+                <a:latin typeface="Microsoft YaHei" pitchFamily="34" charset="0"/>
+                <a:ea typeface="Microsoft YaHei" pitchFamily="34" charset="-122"/>
+                <a:cs typeface="Microsoft YaHei" pitchFamily="34" charset="-120"/>
+              </a:rPr>
+              <a:t>12</a:t>
+            </a:r>
+            <a:endParaRPr lang="en-US" sz="1900" dirty="0"/>
+          </a:p>
+        </p:txBody>
+      </p:sp>
+      <p:sp>
+        <p:nvSpPr>
+          <p:cNvPr id="27" name="Text 25"/>
+          <p:cNvSpPr/>
+          <p:nvPr/>
+        </p:nvSpPr>
+        <p:spPr>
+          <a:xfrm>
+            <a:off x="6428232" y="3694176"/>
+            <a:ext cx="2834640" cy="365760"/>
+          </a:xfrm>
+          <a:prstGeom prst="rect">
+            <a:avLst/>
+          </a:prstGeom>
+          <a:noFill/>
+          <a:ln/>
+        </p:spPr>
+        <p:txBody>
+          <a:bodyPr wrap="square" lIns="0" tIns="0" rIns="0" bIns="0" rtlCol="0" anchor="ctr"/>
+          <a:lstStyle/>
+          <a:p>
+            <a:pPr indent="0" marL="0">
+              <a:buNone/>
+            </a:pPr>
+            <a:r>
+              <a:rPr lang="en-US" sz="1250" dirty="0">
+                <a:solidFill>
+                  <a:srgbClr val="EFE7DE"/>
+                </a:solidFill>
+                <a:latin typeface="Microsoft YaHei" pitchFamily="34" charset="0"/>
+                <a:ea typeface="Microsoft YaHei" pitchFamily="34" charset="-122"/>
+                <a:cs typeface="Microsoft YaHei" pitchFamily="34" charset="-120"/>
+              </a:rPr>
+              <a:t>合理降级 · 不动</a:t>
+            </a:r>
+            <a:endParaRPr lang="en-US" sz="1250" dirty="0"/>
+          </a:p>
+        </p:txBody>
+      </p:sp>
+      <p:sp>
+        <p:nvSpPr>
+          <p:cNvPr id="28" name="Text 26"/>
+          <p:cNvSpPr/>
+          <p:nvPr/>
+        </p:nvSpPr>
+        <p:spPr>
+          <a:xfrm>
+            <a:off x="9235440" y="3694176"/>
+            <a:ext cx="914400" cy="365760"/>
+          </a:xfrm>
+          <a:prstGeom prst="rect">
+            <a:avLst/>
+          </a:prstGeom>
+          <a:noFill/>
+          <a:ln/>
+        </p:spPr>
+        <p:txBody>
+          <a:bodyPr wrap="square" lIns="0" tIns="0" rIns="0" bIns="0" rtlCol="0" anchor="ctr"/>
+          <a:lstStyle/>
+          <a:p>
+            <a:pPr algn="r" indent="0" marL="0">
+              <a:buNone/>
+            </a:pPr>
+            <a:r>
+              <a:rPr lang="en-US" sz="1500" b="1" dirty="0">
+                <a:solidFill>
+                  <a:srgbClr val="EFE7DE"/>
+                </a:solidFill>
+                <a:latin typeface="Microsoft YaHei" pitchFamily="34" charset="0"/>
+                <a:ea typeface="Microsoft YaHei" pitchFamily="34" charset="-122"/>
+                <a:cs typeface="Microsoft YaHei" pitchFamily="34" charset="-120"/>
+              </a:rPr>
+              <a:t>62</a:t>
+            </a:r>
+            <a:endParaRPr lang="en-US" sz="1500" dirty="0"/>
+          </a:p>
+        </p:txBody>
+      </p:sp>
+      <p:sp>
+        <p:nvSpPr>
+          <p:cNvPr id="29" name="Text 27"/>
+          <p:cNvSpPr/>
+          <p:nvPr/>
+        </p:nvSpPr>
+        <p:spPr>
+          <a:xfrm>
+            <a:off x="6428232" y="4169664"/>
+            <a:ext cx="2834640" cy="365760"/>
+          </a:xfrm>
+          <a:prstGeom prst="rect">
+            <a:avLst/>
+          </a:prstGeom>
+          <a:noFill/>
+          <a:ln/>
+        </p:spPr>
+        <p:txBody>
+          <a:bodyPr wrap="square" lIns="0" tIns="0" rIns="0" bIns="0" rtlCol="0" anchor="ctr"/>
+          <a:lstStyle/>
+          <a:p>
+            <a:pPr indent="0" marL="0">
+              <a:buNone/>
+            </a:pPr>
+            <a:r>
+              <a:rPr lang="en-US" sz="1250" dirty="0">
+                <a:solidFill>
+                  <a:srgbClr val="EFE7DE"/>
+                </a:solidFill>
+                <a:latin typeface="Microsoft YaHei" pitchFamily="34" charset="0"/>
+                <a:ea typeface="Microsoft YaHei" pitchFamily="34" charset="-122"/>
+                <a:cs typeface="Microsoft YaHei" pitchFamily="34" charset="-120"/>
+              </a:rPr>
+              <a:t>误报 · 剔除</a:t>
+            </a:r>
+            <a:endParaRPr lang="en-US" sz="1250" dirty="0"/>
+          </a:p>
+        </p:txBody>
+      </p:sp>
+      <p:sp>
+        <p:nvSpPr>
+          <p:cNvPr id="30" name="Text 28"/>
+          <p:cNvSpPr/>
+          <p:nvPr/>
+        </p:nvSpPr>
+        <p:spPr>
+          <a:xfrm>
+            <a:off x="9235440" y="4169664"/>
+            <a:ext cx="914400" cy="365760"/>
+          </a:xfrm>
+          <a:prstGeom prst="rect">
+            <a:avLst/>
+          </a:prstGeom>
+          <a:noFill/>
+          <a:ln/>
+        </p:spPr>
+        <p:txBody>
+          <a:bodyPr wrap="square" lIns="0" tIns="0" rIns="0" bIns="0" rtlCol="0" anchor="ctr"/>
+          <a:lstStyle/>
+          <a:p>
+            <a:pPr algn="r" indent="0" marL="0">
+              <a:buNone/>
+            </a:pPr>
+            <a:r>
+              <a:rPr lang="en-US" sz="1500" b="1" dirty="0">
+                <a:solidFill>
+                  <a:srgbClr val="A99C90"/>
+                </a:solidFill>
+                <a:latin typeface="Microsoft YaHei" pitchFamily="34" charset="0"/>
+                <a:ea typeface="Microsoft YaHei" pitchFamily="34" charset="-122"/>
+                <a:cs typeface="Microsoft YaHei" pitchFamily="34" charset="-120"/>
+              </a:rPr>
+              <a:t>8</a:t>
+            </a:r>
+            <a:endParaRPr lang="en-US" sz="1500" dirty="0"/>
+          </a:p>
+        </p:txBody>
+      </p:sp>
+      <p:sp>
+        <p:nvSpPr>
+          <p:cNvPr id="31" name="Shape 29"/>
+          <p:cNvSpPr/>
+          <p:nvPr/>
+        </p:nvSpPr>
+        <p:spPr>
+          <a:xfrm>
+            <a:off x="6428232" y="4709160"/>
+            <a:ext cx="5029200" cy="0"/>
+          </a:xfrm>
+          <a:prstGeom prst="line">
+            <a:avLst/>
+          </a:prstGeom>
+          <a:noFill/>
+          <a:ln w="12700">
+            <a:solidFill>
+              <a:srgbClr val="4A3F38"/>
+            </a:solidFill>
+            <a:prstDash val="solid"/>
+          </a:ln>
+        </p:spPr>
+      </p:sp>
+      <p:sp>
+        <p:nvSpPr>
+          <p:cNvPr id="32" name="Text 30"/>
+          <p:cNvSpPr/>
+          <p:nvPr/>
+        </p:nvSpPr>
+        <p:spPr>
+          <a:xfrm>
+            <a:off x="6428232" y="4846320"/>
+            <a:ext cx="5029200" cy="365760"/>
+          </a:xfrm>
+          <a:prstGeom prst="rect">
+            <a:avLst/>
+          </a:prstGeom>
+          <a:noFill/>
+          <a:ln/>
+        </p:spPr>
+        <p:txBody>
+          <a:bodyPr wrap="square" lIns="0" tIns="0" rIns="0" bIns="0" rtlCol="0" anchor="ctr"/>
+          <a:lstStyle/>
+          <a:p>
+            <a:pPr indent="0" marL="0">
+              <a:buNone/>
+            </a:pPr>
+            <a:r>
+              <a:rPr lang="en-US" sz="1200" b="1" dirty="0">
+                <a:solidFill>
+                  <a:srgbClr val="F2D8A0"/>
+                </a:solidFill>
+                <a:latin typeface="Microsoft YaHei" pitchFamily="34" charset="0"/>
+                <a:ea typeface="Microsoft YaHei" pitchFamily="34" charset="-122"/>
+                <a:cs typeface="Microsoft YaHei" pitchFamily="34" charset="-120"/>
+              </a:rPr>
+              <a:t>缺陷的共同特征：失败被吞掉，代码却仍做出“成功”的承诺</a:t>
+            </a:r>
+            <a:endParaRPr lang="en-US" sz="1200" dirty="0"/>
+          </a:p>
+        </p:txBody>
+      </p:sp>
+      <p:sp>
+        <p:nvSpPr>
+          <p:cNvPr id="33" name="Shape 31"/>
+          <p:cNvSpPr/>
+          <p:nvPr/>
+        </p:nvSpPr>
+        <p:spPr>
+          <a:xfrm>
+            <a:off x="6428232" y="5340096"/>
+            <a:ext cx="100584" cy="100584"/>
+          </a:xfrm>
+          <a:prstGeom prst="rect">
+            <a:avLst/>
+          </a:prstGeom>
+          <a:solidFill>
+            <a:srgbClr val="9E2B25"/>
+          </a:solidFill>
+          <a:ln/>
+        </p:spPr>
+      </p:sp>
+      <p:sp>
+        <p:nvSpPr>
+          <p:cNvPr id="34" name="Text 32"/>
+          <p:cNvSpPr/>
+          <p:nvPr/>
+        </p:nvSpPr>
+        <p:spPr>
+          <a:xfrm>
+            <a:off x="6665976" y="5257800"/>
+            <a:ext cx="4791456" cy="457200"/>
+          </a:xfrm>
+          <a:prstGeom prst="rect">
+            <a:avLst/>
+          </a:prstGeom>
+          <a:noFill/>
+          <a:ln/>
+        </p:spPr>
+        <p:txBody>
+          <a:bodyPr wrap="square" lIns="0" tIns="0" rIns="0" bIns="0" rtlCol="0" anchor="t"/>
+          <a:lstStyle/>
+          <a:p>
+            <a:pPr indent="0" marL="0">
+              <a:lnSpc>
+                <a:spcPct val="112000"/>
+              </a:lnSpc>
+              <a:buNone/>
+            </a:pPr>
+            <a:r>
+              <a:rPr lang="en-US" sz="1250" b="1" dirty="0">
+                <a:solidFill>
+                  <a:srgbClr val="EFE7DE"/>
+                </a:solidFill>
+                <a:latin typeface="Microsoft YaHei" pitchFamily="34" charset="0"/>
+                <a:ea typeface="Microsoft YaHei" pitchFamily="34" charset="-122"/>
+                <a:cs typeface="Microsoft YaHei" pitchFamily="34" charset="-120"/>
+              </a:rPr>
+              <a:t>隐私</a:t>
+            </a:r>
+            <a:pPr indent="0" marL="0">
+              <a:lnSpc>
+                <a:spcPct val="112000"/>
+              </a:lnSpc>
+              <a:buNone/>
+            </a:pPr>
+            <a:r>
+              <a:rPr lang="en-US" sz="1100" dirty="0">
+                <a:solidFill>
+                  <a:srgbClr val="A99C90"/>
+                </a:solidFill>
+                <a:latin typeface="Microsoft YaHei" pitchFamily="34" charset="0"/>
+                <a:ea typeface="Microsoft YaHei" pitchFamily="34" charset="-122"/>
+                <a:cs typeface="Microsoft YaHei" pitchFamily="34" charset="-120"/>
+              </a:rPr>
+              <a:t>　诊断包与日志确保不含公文正文（原 redact 护栏形同虚设）</a:t>
+            </a:r>
+            <a:endParaRPr lang="en-US" sz="1250" dirty="0"/>
+          </a:p>
+        </p:txBody>
+      </p:sp>
+      <p:sp>
+        <p:nvSpPr>
+          <p:cNvPr id="35" name="Shape 33"/>
+          <p:cNvSpPr/>
+          <p:nvPr/>
+        </p:nvSpPr>
+        <p:spPr>
+          <a:xfrm>
+            <a:off x="6428232" y="5843016"/>
+            <a:ext cx="100584" cy="100584"/>
+          </a:xfrm>
+          <a:prstGeom prst="rect">
+            <a:avLst/>
+          </a:prstGeom>
+          <a:solidFill>
+            <a:srgbClr val="9E2B25"/>
+          </a:solidFill>
+          <a:ln/>
+        </p:spPr>
+      </p:sp>
+      <p:sp>
+        <p:nvSpPr>
+          <p:cNvPr id="36" name="Text 34"/>
+          <p:cNvSpPr/>
+          <p:nvPr/>
+        </p:nvSpPr>
+        <p:spPr>
+          <a:xfrm>
+            <a:off x="6665976" y="5760720"/>
+            <a:ext cx="4791456" cy="457200"/>
+          </a:xfrm>
+          <a:prstGeom prst="rect">
+            <a:avLst/>
+          </a:prstGeom>
+          <a:noFill/>
+          <a:ln/>
+        </p:spPr>
+        <p:txBody>
+          <a:bodyPr wrap="square" lIns="0" tIns="0" rIns="0" bIns="0" rtlCol="0" anchor="t"/>
+          <a:lstStyle/>
+          <a:p>
+            <a:pPr indent="0" marL="0">
+              <a:lnSpc>
+                <a:spcPct val="112000"/>
+              </a:lnSpc>
+              <a:buNone/>
+            </a:pPr>
+            <a:r>
+              <a:rPr lang="en-US" sz="1250" b="1" dirty="0">
+                <a:solidFill>
+                  <a:srgbClr val="EFE7DE"/>
+                </a:solidFill>
+                <a:latin typeface="Microsoft YaHei" pitchFamily="34" charset="0"/>
+                <a:ea typeface="Microsoft YaHei" pitchFamily="34" charset="-122"/>
+                <a:cs typeface="Microsoft YaHei" pitchFamily="34" charset="-120"/>
+              </a:rPr>
+              <a:t>可见</a:t>
+            </a:r>
+            <a:pPr indent="0" marL="0">
+              <a:lnSpc>
+                <a:spcPct val="112000"/>
+              </a:lnSpc>
+              <a:buNone/>
+            </a:pPr>
+            <a:r>
+              <a:rPr lang="en-US" sz="1100" dirty="0">
+                <a:solidFill>
+                  <a:srgbClr val="A99C90"/>
+                </a:solidFill>
+                <a:latin typeface="Microsoft YaHei" pitchFamily="34" charset="0"/>
+                <a:ea typeface="Microsoft YaHei" pitchFamily="34" charset="-122"/>
+                <a:cs typeface="Microsoft YaHei" pitchFamily="34" charset="-120"/>
+              </a:rPr>
+              <a:t>　恢复失败/降级如实点名，不再一律说“成功”</a:t>
+            </a:r>
+            <a:endParaRPr lang="en-US" sz="1250" dirty="0"/>
+          </a:p>
+        </p:txBody>
+      </p:sp>
+    </p:spTree>
+  </p:cSld>
+  <p:clrMapOvr>
+    <a:masterClrMapping/>
+  </p:clrMapOvr>
+</p:sld>
+</file>
+
+<file path=ppt/slides/slide43.xml><?xml version="1.0" encoding="utf-8"?>
+<p:sld xmlns:a="http://schemas.openxmlformats.org/drawingml/2006/main" xmlns:r="http://schemas.openxmlformats.org/officeDocument/2006/relationships" xmlns:p="http://schemas.openxmlformats.org/presentationml/2006/main">
+  <p:cSld name="Slide 43">
+    <p:bg>
+      <p:bgPr>
+        <a:solidFill>
           <a:srgbClr val="1F1917"/>
         </a:solidFill>
       </p:bgPr>
@@ -40449,7 +42861,7 @@
                 <a:ea typeface="Microsoft YaHei" pitchFamily="34" charset="-122"/>
                 <a:cs typeface="Microsoft YaHei" pitchFamily="34" charset="-120"/>
               </a:rPr>
-              <a:t>scripts/e2e_check.py</a:t>
+              <a:t>open-code-review审查报告.md</a:t>
             </a:r>
             <a:endParaRPr lang="en-US" sz="1400" dirty="0"/>
           </a:p>
@@ -40469,7 +42881,7 @@
                 <a:ea typeface="Microsoft YaHei" pitchFamily="34" charset="-122"/>
                 <a:cs typeface="Microsoft YaHei" pitchFamily="34" charset="-120"/>
               </a:rPr>
-              <a:t>20 步端到端自检，部署后一键验货</a:t>
+              <a:t>全项目代码审查：范围、逐条真伪甄别、修复与验证</a:t>
             </a:r>
             <a:endParaRPr lang="en-US" sz="1400" dirty="0"/>
           </a:p>
@@ -41161,7 +43573,7 @@
                 <a:ea typeface="Microsoft YaHei" pitchFamily="34" charset="-122"/>
                 <a:cs typeface="Microsoft YaHei" pitchFamily="34" charset="-120"/>
               </a:rPr>
-              <a:t>15</a:t>
+              <a:t>12</a:t>
             </a:r>
             <a:endParaRPr lang="en-US" sz="4400" dirty="0"/>
           </a:p>
@@ -41203,7 +43615,7 @@
                 <a:ea typeface="Microsoft YaHei" pitchFamily="34" charset="-122"/>
                 <a:cs typeface="Microsoft YaHei" pitchFamily="34" charset="-120"/>
               </a:rPr>
-              <a:t>法定文种骨架</a:t>
+              <a:t>军队公文文种</a:t>
             </a:r>
             <a:endParaRPr lang="en-US" sz="1400" dirty="0"/>
           </a:p>
@@ -41223,7 +43635,7 @@
                 <a:ea typeface="Microsoft YaHei" pitchFamily="34" charset="-122"/>
                 <a:cs typeface="Microsoft YaHei" pitchFamily="34" charset="-120"/>
               </a:rPr>
-              <a:t>对应《公文处理工作条例》</a:t>
+              <a:t>对应《军队机关公文处理工作条例》第八条</a:t>
             </a:r>
             <a:endParaRPr lang="en-US" sz="1400" dirty="0"/>
           </a:p>
@@ -42379,7 +44791,7 @@
                 <a:ea typeface="Microsoft YaHei" pitchFamily="34" charset="-122"/>
                 <a:cs typeface="Microsoft YaHei" pitchFamily="34" charset="-120"/>
               </a:rPr>
-              <a:t>15 文种骨架 · 文秘工具箱</a:t>
+              <a:t>12 文种骨架 · 文秘工具箱</a:t>
             </a:r>
             <a:endParaRPr lang="en-US" sz="1500" dirty="0"/>
           </a:p>
@@ -42488,7 +44900,7 @@
                 <a:ea typeface="Microsoft YaHei" pitchFamily="34" charset="-122"/>
                 <a:cs typeface="Microsoft YaHei" pitchFamily="34" charset="-120"/>
               </a:rPr>
-              <a:t>三级纠错流水线 · GB/T 9704 体检</a:t>
+              <a:t>三级纠错流水线 · 军队公文格式体检</a:t>
             </a:r>
             <a:endParaRPr lang="en-US" sz="1500" dirty="0"/>
           </a:p>
